--- a/docs/Retail_Rocket_Presentation.pptx
+++ b/docs/Retail_Rocket_Presentation.pptx
@@ -2,25 +2,25 @@
 <file path=ppt/presentation.xml><?xml version="1.0" encoding="utf-8"?>
 <p:presentation xmlns:p="http://schemas.openxmlformats.org/presentationml/2006/main">
   <p:sldMasterIdLst>
-    <p:sldMasterId xmlns:r="http://schemas.openxmlformats.org/officeDocument/2006/relationships" id="2147483648" r:id="R807d451a09de431f"/>
+    <p:sldMasterId xmlns:r="http://schemas.openxmlformats.org/officeDocument/2006/relationships" id="2147483648" r:id="R3b3a411009b54ba9"/>
   </p:sldMasterIdLst>
   <p:notesMasterIdLst>
-    <p:notesMasterId xmlns:r="http://schemas.openxmlformats.org/officeDocument/2006/relationships" r:id="R84c2b1a8561e49b7"/>
+    <p:notesMasterId xmlns:r="http://schemas.openxmlformats.org/officeDocument/2006/relationships" r:id="R02a017419e754f2a"/>
   </p:notesMasterIdLst>
   <p:sldIdLst>
-    <p:sldId xmlns:r="http://schemas.openxmlformats.org/officeDocument/2006/relationships" id="256" r:id="Re3c6e5cbb8e347d4"/>
-    <p:sldId xmlns:r="http://schemas.openxmlformats.org/officeDocument/2006/relationships" id="257" r:id="R42d13333563f43fa"/>
-    <p:sldId xmlns:r="http://schemas.openxmlformats.org/officeDocument/2006/relationships" id="258" r:id="R62b3dc39c2ae4176"/>
-    <p:sldId xmlns:r="http://schemas.openxmlformats.org/officeDocument/2006/relationships" id="259" r:id="R6944b485457449dd"/>
-    <p:sldId xmlns:r="http://schemas.openxmlformats.org/officeDocument/2006/relationships" id="260" r:id="Re44e796a01b74324"/>
-    <p:sldId xmlns:r="http://schemas.openxmlformats.org/officeDocument/2006/relationships" id="261" r:id="R7cd3974377374a4a"/>
-    <p:sldId xmlns:r="http://schemas.openxmlformats.org/officeDocument/2006/relationships" id="262" r:id="R6717a800ae4a4fb4"/>
-    <p:sldId xmlns:r="http://schemas.openxmlformats.org/officeDocument/2006/relationships" id="263" r:id="R7b8d3a2c767e48ab"/>
-    <p:sldId xmlns:r="http://schemas.openxmlformats.org/officeDocument/2006/relationships" id="264" r:id="R58e293a5e55f4c3e"/>
-    <p:sldId xmlns:r="http://schemas.openxmlformats.org/officeDocument/2006/relationships" id="265" r:id="R258d5509b6f049e3"/>
-    <p:sldId xmlns:r="http://schemas.openxmlformats.org/officeDocument/2006/relationships" id="266" r:id="R06a982e8075c40e1"/>
-    <p:sldId xmlns:r="http://schemas.openxmlformats.org/officeDocument/2006/relationships" id="267" r:id="R9d24b6c9e4a940bd"/>
-    <p:sldId xmlns:r="http://schemas.openxmlformats.org/officeDocument/2006/relationships" id="268" r:id="Rb61e767fda6e423f"/>
+    <p:sldId xmlns:r="http://schemas.openxmlformats.org/officeDocument/2006/relationships" id="256" r:id="Rb4fa4e7a7d3b418b"/>
+    <p:sldId xmlns:r="http://schemas.openxmlformats.org/officeDocument/2006/relationships" id="257" r:id="R4bc80b7c07c341a8"/>
+    <p:sldId xmlns:r="http://schemas.openxmlformats.org/officeDocument/2006/relationships" id="258" r:id="R183427e0f7dd48a6"/>
+    <p:sldId xmlns:r="http://schemas.openxmlformats.org/officeDocument/2006/relationships" id="259" r:id="Rbd6dad7b84ad4e5e"/>
+    <p:sldId xmlns:r="http://schemas.openxmlformats.org/officeDocument/2006/relationships" id="260" r:id="Rc37a24144d204606"/>
+    <p:sldId xmlns:r="http://schemas.openxmlformats.org/officeDocument/2006/relationships" id="261" r:id="R6961cc8d243b404f"/>
+    <p:sldId xmlns:r="http://schemas.openxmlformats.org/officeDocument/2006/relationships" id="262" r:id="R73998cbe097446d4"/>
+    <p:sldId xmlns:r="http://schemas.openxmlformats.org/officeDocument/2006/relationships" id="263" r:id="R44e0673169054a37"/>
+    <p:sldId xmlns:r="http://schemas.openxmlformats.org/officeDocument/2006/relationships" id="264" r:id="R2925f414aa554a52"/>
+    <p:sldId xmlns:r="http://schemas.openxmlformats.org/officeDocument/2006/relationships" id="265" r:id="Raf22c4ef10f443c0"/>
+    <p:sldId xmlns:r="http://schemas.openxmlformats.org/officeDocument/2006/relationships" id="266" r:id="R0029e1441e1b49cb"/>
+    <p:sldId xmlns:r="http://schemas.openxmlformats.org/officeDocument/2006/relationships" id="267" r:id="R796e6d30e380403a"/>
+    <p:sldId xmlns:r="http://schemas.openxmlformats.org/officeDocument/2006/relationships" id="268" r:id="Rd59c45d588084761"/>
   </p:sldIdLst>
   <p:sldSz cx="12192000" cy="6858000"/>
   <p:notesSz cx="6858000" cy="9144000"/>
@@ -524,7 +524,7 @@
           <a:lstStyle xmlns:a="http://schemas.openxmlformats.org/drawingml/2006/main"/>
           <a:p xmlns:a="http://schemas.openxmlformats.org/drawingml/2006/main">
             <a:r>
-              <a:t>About one minute. Native streaming Parquet retains file-sink commits. foreachBatch needs application retry protection. The sink writes state and recommendations to staging, renames the complete epoch and skips that epoch on replay after consuming the stateful batch. Contract: one writer and a same-filesystem local rename. It is not an object-store transaction or a cross-query transaction. Sources: retail/sinks.py and https://spark.apache.org/docs/3.5.7/structured-streaming-programming-guide.html</a:t>
+              <a:t>About one minute. The incomplete threshold in the assignment is resolved as score at least 5, with a cart and zero transactions for the visitor-item pair. A high numeric score alone is insufficient. Values are code constants rather than empirical measurements. Source: retail/transforms.py.</a:t>
             </a:r>
           </a:p>
         </p:txBody>
@@ -594,7 +594,7 @@
           <a:lstStyle xmlns:a="http://schemas.openxmlformats.org/drawingml/2006/main"/>
           <a:p xmlns:a="http://schemas.openxmlformats.org/drawingml/2006/main">
             <a:r>
-              <a:t>About 45 seconds. Use Linux containers and Docker Compose v2.20 or newer. Build before class. The default producer streams the real sample and then exits successfully. Use the terminal to show the topic partitions and Kafka events. Open localhost:4040 for the Spark UI. Source: README.md.</a:t>
+              <a:t>About 45 seconds. Use Linux containers and Docker Compose v2.20 or newer. Build before class. The default producer sends all 2,756,101 real source rows and exits only after acknowledgement. Verify the full audit and intent-query progress before class. No sample limit is used. Use the terminal to show the topic partitions and Kafka events. Open localhost:4040 for the Spark UI. Source: README.md.</a:t>
             </a:r>
           </a:p>
         </p:txBody>
@@ -664,7 +664,7 @@
           <a:lstStyle xmlns:a="http://schemas.openxmlformats.org/drawingml/2006/main"/>
           <a:p xmlns:a="http://schemas.openxmlformats.org/drawingml/2006/main">
             <a:r>
-              <a:t>Use this slide as a schedule, then spend the time in the terminals. Total target is 13 minutes including the introductory slides. Commands and backup guidance are in DEMO.md. Stop the sample producer before controlled mock or lateness checks. Display saved evidence as saved evidence if a restart is slow.</a:t>
+              <a:t>Use this slide as a schedule, then spend the time in the terminals. Total target is 13 minutes including the introductory slides. Commands and backup guidance are in DEMO.md. Complete and verify full-source ingestion before class. The live demo selects genuine records from the full CSV and requires its verified receipt. Display saved evidence as saved evidence if a restart is slow.</a:t>
             </a:r>
           </a:p>
         </p:txBody>
@@ -734,7 +734,7 @@
           <a:lstStyle xmlns:a="http://schemas.openxmlformats.org/drawingml/2006/main"/>
           <a:p xmlns:a="http://schemas.openxmlformats.org/drawingml/2006/main">
             <a:r>
-              <a:t>Closing slide, about 30 seconds. Thirteen local tests passed on portable Java 17 and PySpark 3.5.7. Docker and WSL were absent on the preparation machine, so do not claim an executed Docker stack or invent throughput or accuracy. The provided GitHub Actions workflow runs Linux container acceptance checks after publication. Source: VALIDATION.md. Research references are in REPORT.md and the relevant slide notes.</a:t>
+              <a:t>Closing slide, about 30 seconds. Twenty-one local tests passed on portable Java 17 and PySpark 3.5.7. Docker and WSL were absent on the preparation machine, so do not claim an executed Docker stack or invent throughput or accuracy. The provided GitHub Actions workflow runs Linux container acceptance checks after publication. Source: VALIDATION.md. Research references are in REPORT.md and the relevant slide notes.</a:t>
             </a:r>
           </a:p>
         </p:txBody>
@@ -804,7 +804,7 @@
           <a:lstStyle xmlns:a="http://schemas.openxmlformats.org/drawingml/2006/main"/>
           <a:p xmlns:a="http://schemas.openxmlformats.org/drawingml/2006/main">
             <a:r>
-              <a:t>About 45 seconds. The question is which unseen products to suggest while a cart remains unpurchased. The project includes 5,000 genuine events: 4,879 views, 98 carts and 23 transactions. A separate mock script makes the demonstration deterministic. Source: https://www.kaggle.com/datasets/retailrocket/ecommerce-dataset</a:t>
+              <a:t>About 45 seconds. Both can use micro-batches. Structured Streaming expresses an unbounded table and incremental query rather than requiring a sequence-of-RDD programming model. The project uses a five-second micro-batch trigger. Sources: https://spark.apache.org/docs/3.5.7/streaming-programming-guide.html and https://spark.apache.org/docs/3.5.7/structured-streaming-programming-guide.html</a:t>
             </a:r>
           </a:p>
         </p:txBody>
@@ -874,7 +874,7 @@
           <a:lstStyle xmlns:a="http://schemas.openxmlformats.org/drawingml/2006/main"/>
           <a:p xmlns:a="http://schemas.openxmlformats.org/drawingml/2006/main">
             <a:r>
-              <a:t>About one minute. Explain each processing boundary and that the audit, intent and console queries use separate checkpoints. This is a single-host deployment with two parallel Spark tasks. Sources: delivered docker-compose.yml, streaming_etl.py and retail modules.</a:t>
+              <a:t>About 45 seconds. Armbrust et al., Spark SQL: Relational Data Processing in Spark, SIGMOD 2015, DOI 10.1145/2723372.2742797, motivates relational and procedural ETL and presents Catalyst. Apply its ideas by expressing transformations in built-in DataFrame operations. Its paper benchmarks are not this project's measurements. Source: https://jkbradley.github.io/assets/papers/2015_sigmod_spark_sql.pdf</a:t>
             </a:r>
           </a:p>
         </p:txBody>
@@ -944,7 +944,7 @@
           <a:lstStyle xmlns:a="http://schemas.openxmlformats.org/drawingml/2006/main"/>
           <a:p xmlns:a="http://schemas.openxmlformats.org/drawingml/2006/main">
             <a:r>
-              <a:t>About 45 seconds. Both can use micro-batches. Structured Streaming expresses an unbounded table and incremental query rather than requiring a sequence-of-RDD programming model. The project uses a five-second micro-batch trigger. Sources: https://spark.apache.org/docs/3.5.7/streaming-programming-guide.html and https://spark.apache.org/docs/3.5.7/structured-streaming-programming-guide.html</a:t>
+              <a:t>About 45 seconds. One strongest cart anchor per visitor, then live popularity candidates, exclusion of seen items and top three. The current snapshot replaces earlier output. A purchased anchor is suppressed, but another unpurchased cart may still qualify. This is an explainable rule-based baseline and does not claim online model training. Source: retail/transforms.py.</a:t>
             </a:r>
           </a:p>
         </p:txBody>
@@ -1084,7 +1084,7 @@
           <a:lstStyle xmlns:a="http://schemas.openxmlformats.org/drawingml/2006/main"/>
           <a:p xmlns:a="http://schemas.openxmlformats.org/drawingml/2006/main">
             <a:r>
-              <a:t>About 45 seconds. Armbrust et al., Spark SQL: Relational Data Processing in Spark, SIGMOD 2015, DOI 10.1145/2723372.2742797, motivates relational and procedural ETL and presents Catalyst. Apply its ideas by expressing transformations in built-in DataFrame operations. Its paper benchmarks are not this project's measurements. Source: https://jkbradley.github.io/assets/papers/2015_sigmod_spark_sql.pdf</a:t>
+              <a:t>About one minute. Native streaming Parquet retains file-sink commits. foreachBatch needs application retry protection. The sink writes state and recommendations to staging, renames the complete epoch and skips that epoch on replay after consuming the stateful batch. Contract: one writer and a same-filesystem local rename. It is not an object-store transaction or a cross-query transaction. Sources: retail/sinks.py and https://spark.apache.org/docs/3.5.7/structured-streaming-programming-guide.html</a:t>
             </a:r>
           </a:p>
         </p:txBody>
@@ -1154,7 +1154,7 @@
           <a:lstStyle xmlns:a="http://schemas.openxmlformats.org/drawingml/2006/main"/>
           <a:p xmlns:a="http://schemas.openxmlformats.org/drawingml/2006/main">
             <a:r>
-              <a:t>About one minute. Spark computes ten overlapping windows per event. The serving snapshot chooses one earliest still-active aligned window so popularity is not counted ten times. Watermark progress follows observed event time and can stall when input is idle. Older events are not universally guaranteed to be dropped immediately. The acceptance test places a rejected event beyond all affected windows. Source: https://spark.apache.org/docs/3.5.7/structured-streaming-programming-guide.html</a:t>
+              <a:t>About 45 seconds. The question is which unseen products to suggest while a cart remains unpurchased. The default input is the complete 2,756,101-event CSV: 2,664,312 views, 69,332 carts and 22,457 transactions. Verify complete downstream replay before class. The visible cart trace uses actual records selected from that full CSV. Source: https://www.kaggle.com/datasets/retailrocket/ecommerce-dataset</a:t>
             </a:r>
           </a:p>
         </p:txBody>
@@ -1224,7 +1224,7 @@
           <a:lstStyle xmlns:a="http://schemas.openxmlformats.org/drawingml/2006/main"/>
           <a:p xmlns:a="http://schemas.openxmlformats.org/drawingml/2006/main">
             <a:r>
-              <a:t>About one minute. The incomplete threshold in the assignment is resolved as score at least 5, with a cart and zero transactions for the visitor-item pair. A high numeric score alone is insufficient. Values are code constants rather than empirical measurements. Source: retail/transforms.py.</a:t>
+              <a:t>About one minute. Explain each processing boundary and that the audit, intent and console queries use separate checkpoints. This is a single-host deployment with two parallel Spark tasks. Sources: delivered docker-compose.yml, streaming_etl.py and retail modules.</a:t>
             </a:r>
           </a:p>
         </p:txBody>
@@ -1294,7 +1294,7 @@
           <a:lstStyle xmlns:a="http://schemas.openxmlformats.org/drawingml/2006/main"/>
           <a:p xmlns:a="http://schemas.openxmlformats.org/drawingml/2006/main">
             <a:r>
-              <a:t>About 45 seconds. One strongest cart anchor per visitor, then live popularity candidates, exclusion of seen items and top three. The current snapshot replaces earlier output. A purchased anchor is suppressed, but another unpurchased cart may still qualify. This is an explainable rule-based baseline and does not claim online model training. Source: retail/transforms.py.</a:t>
+              <a:t>About one minute. Spark computes ten overlapping windows per event. The serving snapshot chooses one earliest still-active aligned window so popularity is not counted ten times. Watermark progress follows observed event time and can stall when input is idle. Older events are not universally guaranteed to be dropped immediately. The acceptance test places a rejected event beyond all affected windows. Source: https://spark.apache.org/docs/3.5.7/structured-streaming-programming-guide.html</a:t>
             </a:r>
           </a:p>
         </p:txBody>
@@ -1341,7 +1341,7 @@
           <p:cNvPr id="3" name="Title">
             <a:extLst xmlns:a="http://schemas.openxmlformats.org/drawingml/2006/main">
               <a:ext uri="{FF2B5EF4-FFF2-40B4-BE49-F238E27FC236}">
-                <a16:creationId xmlns:a16="http://schemas.microsoft.com/office/drawing/2014/main" id="{FFDE761F-FFCA-460F-BD5D-FDD1D4AABF13}"/>
+                <a16:creationId xmlns:a16="http://schemas.microsoft.com/office/drawing/2014/main" id="{B555181E-983F-4BE8-B0E9-71A19014B717}"/>
               </a:ext>
             </a:extLst>
           </p:cNvPr>
@@ -1498,7 +1498,7 @@
           <p:cNvPr id="2" name="Subtitle">
             <a:extLst xmlns:a="http://schemas.openxmlformats.org/drawingml/2006/main">
               <a:ext uri="{FF2B5EF4-FFF2-40B4-BE49-F238E27FC236}">
-                <a16:creationId xmlns:a16="http://schemas.microsoft.com/office/drawing/2014/main" id="{20CE6F22-7715-42AD-B4FF-A8097B9CE3C5}"/>
+                <a16:creationId xmlns:a16="http://schemas.microsoft.com/office/drawing/2014/main" id="{56FA7ED3-99E5-4720-A9FE-F00767A9F787}"/>
               </a:ext>
             </a:extLst>
           </p:cNvPr>
@@ -1672,7 +1672,7 @@
           <p:cNvPr id="2" name="Section title">
             <a:extLst xmlns:a="http://schemas.openxmlformats.org/drawingml/2006/main">
               <a:ext uri="{FF2B5EF4-FFF2-40B4-BE49-F238E27FC236}">
-                <a16:creationId xmlns:a16="http://schemas.microsoft.com/office/drawing/2014/main" id="{1E0B9CA5-2B90-44B4-834D-1455A5643C4E}"/>
+                <a16:creationId xmlns:a16="http://schemas.microsoft.com/office/drawing/2014/main" id="{B0A92BAC-2353-40BD-9C33-D6D3E154C675}"/>
               </a:ext>
             </a:extLst>
           </p:cNvPr>
@@ -1846,7 +1846,7 @@
           <p:cNvPr id="3" name="Title">
             <a:extLst xmlns:a="http://schemas.openxmlformats.org/drawingml/2006/main">
               <a:ext uri="{FF2B5EF4-FFF2-40B4-BE49-F238E27FC236}">
-                <a16:creationId xmlns:a16="http://schemas.microsoft.com/office/drawing/2014/main" id="{7128B4AB-689C-489D-AA7F-BAC4E040016A}"/>
+                <a16:creationId xmlns:a16="http://schemas.microsoft.com/office/drawing/2014/main" id="{69AF435C-778E-4E83-B7D9-28E90417E049}"/>
               </a:ext>
             </a:extLst>
           </p:cNvPr>
@@ -2003,7 +2003,7 @@
           <p:cNvPr id="2" name="Body">
             <a:extLst xmlns:a="http://schemas.openxmlformats.org/drawingml/2006/main">
               <a:ext uri="{FF2B5EF4-FFF2-40B4-BE49-F238E27FC236}">
-                <a16:creationId xmlns:a16="http://schemas.microsoft.com/office/drawing/2014/main" id="{D460C013-4F01-4F31-9001-541EDCA66B67}"/>
+                <a16:creationId xmlns:a16="http://schemas.microsoft.com/office/drawing/2014/main" id="{62A642D5-2104-4095-969E-884671BB7017}"/>
               </a:ext>
             </a:extLst>
           </p:cNvPr>
@@ -2177,7 +2177,7 @@
           <p:cNvPr id="4" name="Title">
             <a:extLst xmlns:a="http://schemas.openxmlformats.org/drawingml/2006/main">
               <a:ext uri="{FF2B5EF4-FFF2-40B4-BE49-F238E27FC236}">
-                <a16:creationId xmlns:a16="http://schemas.microsoft.com/office/drawing/2014/main" id="{A1D4EB90-B927-45B8-957D-C6268FD15C34}"/>
+                <a16:creationId xmlns:a16="http://schemas.microsoft.com/office/drawing/2014/main" id="{CCC516E3-504C-46D4-8E0A-C39F7FAAA20D}"/>
               </a:ext>
             </a:extLst>
           </p:cNvPr>
@@ -2334,7 +2334,7 @@
           <p:cNvPr id="2" name="Left column">
             <a:extLst xmlns:a="http://schemas.openxmlformats.org/drawingml/2006/main">
               <a:ext uri="{FF2B5EF4-FFF2-40B4-BE49-F238E27FC236}">
-                <a16:creationId xmlns:a16="http://schemas.microsoft.com/office/drawing/2014/main" id="{087744FD-ACD1-4A4C-BD7A-381EEB6F4277}"/>
+                <a16:creationId xmlns:a16="http://schemas.microsoft.com/office/drawing/2014/main" id="{5226A111-A395-42F1-A2B6-2A6BDC96C9D8}"/>
               </a:ext>
             </a:extLst>
           </p:cNvPr>
@@ -2491,7 +2491,7 @@
           <p:cNvPr id="3" name="Right column">
             <a:extLst xmlns:a="http://schemas.openxmlformats.org/drawingml/2006/main">
               <a:ext uri="{FF2B5EF4-FFF2-40B4-BE49-F238E27FC236}">
-                <a16:creationId xmlns:a16="http://schemas.microsoft.com/office/drawing/2014/main" id="{76103048-CDF3-40D7-8017-2EC2D5CA64B8}"/>
+                <a16:creationId xmlns:a16="http://schemas.microsoft.com/office/drawing/2014/main" id="{3402F19F-CCBB-40FC-B4AB-E4A36F774185}"/>
               </a:ext>
             </a:extLst>
           </p:cNvPr>
@@ -2665,7 +2665,7 @@
           <p:cNvPr id="3" name="Title">
             <a:extLst xmlns:a="http://schemas.openxmlformats.org/drawingml/2006/main">
               <a:ext uri="{FF2B5EF4-FFF2-40B4-BE49-F238E27FC236}">
-                <a16:creationId xmlns:a16="http://schemas.microsoft.com/office/drawing/2014/main" id="{65CB0088-1DA9-4913-B51E-F00FC443C8D2}"/>
+                <a16:creationId xmlns:a16="http://schemas.microsoft.com/office/drawing/2014/main" id="{4A33C16C-9BBD-44C0-9C7C-180ABCAE8395}"/>
               </a:ext>
             </a:extLst>
           </p:cNvPr>
@@ -2822,7 +2822,7 @@
           <p:cNvPr id="2" name="Left column">
             <a:extLst xmlns:a="http://schemas.openxmlformats.org/drawingml/2006/main">
               <a:ext uri="{FF2B5EF4-FFF2-40B4-BE49-F238E27FC236}">
-                <a16:creationId xmlns:a16="http://schemas.microsoft.com/office/drawing/2014/main" id="{21413AFA-F6FF-415D-8A5F-D79D44171079}"/>
+                <a16:creationId xmlns:a16="http://schemas.microsoft.com/office/drawing/2014/main" id="{9698FE22-EDDE-4975-A717-87FD2660B5B9}"/>
               </a:ext>
             </a:extLst>
           </p:cNvPr>
@@ -3017,12 +3017,12 @@
   </p:cSld>
   <p:clrMap bg1="lt1" tx1="dk1" bg2="lt2" tx2="dk2" accent1="accent1" accent2="accent2" accent3="accent3" accent4="accent4" accent5="accent5" accent6="accent6" hlink="hlink" folHlink="folHlink"/>
   <p:sldLayoutIdLst>
-    <p:sldLayoutId xmlns:r="http://schemas.openxmlformats.org/officeDocument/2006/relationships" id="2147483649" r:id="R5cced9508a6543cb"/>
-    <p:sldLayoutId xmlns:r="http://schemas.openxmlformats.org/officeDocument/2006/relationships" id="2147483650" r:id="R566ad521e5144ac9"/>
-    <p:sldLayoutId xmlns:r="http://schemas.openxmlformats.org/officeDocument/2006/relationships" id="2147483651" r:id="R3b0db5e029464730"/>
-    <p:sldLayoutId xmlns:r="http://schemas.openxmlformats.org/officeDocument/2006/relationships" id="2147483652" r:id="Rb609e17729c34bd9"/>
-    <p:sldLayoutId xmlns:r="http://schemas.openxmlformats.org/officeDocument/2006/relationships" id="2147483653" r:id="Rf667c64b0f8e4483"/>
-    <p:sldLayoutId xmlns:r="http://schemas.openxmlformats.org/officeDocument/2006/relationships" id="2147483654" r:id="R4da3bd4579cd4b8e"/>
+    <p:sldLayoutId xmlns:r="http://schemas.openxmlformats.org/officeDocument/2006/relationships" id="2147483649" r:id="Rf940ad9ccbf84233"/>
+    <p:sldLayoutId xmlns:r="http://schemas.openxmlformats.org/officeDocument/2006/relationships" id="2147483650" r:id="Re89a55a477be4c16"/>
+    <p:sldLayoutId xmlns:r="http://schemas.openxmlformats.org/officeDocument/2006/relationships" id="2147483651" r:id="Rab9817ce798f45c8"/>
+    <p:sldLayoutId xmlns:r="http://schemas.openxmlformats.org/officeDocument/2006/relationships" id="2147483652" r:id="Rb0863244101b482b"/>
+    <p:sldLayoutId xmlns:r="http://schemas.openxmlformats.org/officeDocument/2006/relationships" id="2147483653" r:id="R0bbeecf171734bb8"/>
+    <p:sldLayoutId xmlns:r="http://schemas.openxmlformats.org/officeDocument/2006/relationships" id="2147483654" r:id="R7a0d8c16a1294ddf"/>
   </p:sldLayoutIdLst>
   <p:txStyles>
     <p:titleStyle>
@@ -3573,7 +3573,7 @@
           <p:cNvPr id="4" name="">
             <a:extLst xmlns:a="http://schemas.openxmlformats.org/drawingml/2006/main">
               <a:ext uri="{FF2B5EF4-FFF2-40B4-BE49-F238E27FC236}">
-                <a16:creationId xmlns:a16="http://schemas.microsoft.com/office/drawing/2014/main" id="{563BE861-DCBE-4977-9DC3-6DE5777EC27F}"/>
+                <a16:creationId xmlns:a16="http://schemas.microsoft.com/office/drawing/2014/main" id="{6D803BA4-1D19-4FA3-9489-1C2FC1F0AD5B}"/>
               </a:ext>
             </a:extLst>
           </p:cNvPr>
@@ -3662,7 +3662,7 @@
           <p:cNvPr id="2" name="">
             <a:extLst xmlns:a="http://schemas.openxmlformats.org/drawingml/2006/main">
               <a:ext uri="{FF2B5EF4-FFF2-40B4-BE49-F238E27FC236}">
-                <a16:creationId xmlns:a16="http://schemas.microsoft.com/office/drawing/2014/main" id="{DED474F1-0C92-4160-B596-1C68BFEE084B}"/>
+                <a16:creationId xmlns:a16="http://schemas.microsoft.com/office/drawing/2014/main" id="{BE28AE0C-55A1-496B-8EE4-4552D2F69AA3}"/>
               </a:ext>
             </a:extLst>
           </p:cNvPr>
@@ -3718,7 +3718,7 @@
                 <a:ea typeface="Arial"/>
                 <a:cs typeface="Arial"/>
               </a:rPr>
-              <a:t>Kafka ingestion and Spark Structured Streaming personalization</a:t>
+              <a:t>Kafka ingestion and PySpark Structured Streaming personalization</a:t>
             </a:r>
           </a:p>
         </p:txBody>
@@ -3728,7 +3728,7 @@
           <p:cNvPr id="3" name="">
             <a:extLst xmlns:a="http://schemas.openxmlformats.org/drawingml/2006/main">
               <a:ext uri="{FF2B5EF4-FFF2-40B4-BE49-F238E27FC236}">
-                <a16:creationId xmlns:a16="http://schemas.microsoft.com/office/drawing/2014/main" id="{167F3154-E0C2-4003-9642-15F0B7ECD285}"/>
+                <a16:creationId xmlns:a16="http://schemas.microsoft.com/office/drawing/2014/main" id="{CB8061BC-3264-4E55-A4B4-9FA8ECC7051C}"/>
               </a:ext>
             </a:extLst>
           </p:cNvPr>
@@ -3792,7 +3792,7 @@
     </p:spTree>
     <p:extLst>
       <p:ext uri="{BB962C8B-B14F-4D97-AF65-F5344CB8AC3E}">
-        <p14:creationId xmlns:p14="http://schemas.microsoft.com/office/powerpoint/2010/main" val="2020732964"/>
+        <p14:creationId xmlns:p14="http://schemas.microsoft.com/office/powerpoint/2010/main" val="1220233012"/>
       </p:ext>
     </p:extLst>
   </p:cSld>
@@ -3820,10 +3820,10 @@
       </p:grpSpPr>
       <p:sp>
         <p:nvSpPr>
-          <p:cNvPr id="15" name="">
+          <p:cNvPr id="4" name="">
             <a:extLst xmlns:a="http://schemas.openxmlformats.org/drawingml/2006/main">
               <a:ext uri="{FF2B5EF4-FFF2-40B4-BE49-F238E27FC236}">
-                <a16:creationId xmlns:a16="http://schemas.microsoft.com/office/drawing/2014/main" id="{35A3963D-EE31-41E1-B17B-4E8C92114F27}"/>
+                <a16:creationId xmlns:a16="http://schemas.microsoft.com/office/drawing/2014/main" id="{C2BA1F37-EE75-408C-9E6B-FEF8FADF60B4}"/>
               </a:ext>
             </a:extLst>
           </p:cNvPr>
@@ -3879,49 +3879,342 @@
                 <a:ea typeface="Arial"/>
                 <a:cs typeface="Arial"/>
               </a:rPr>
-              <a:t>Checkpoint recovery and atomic epochs</a:t>
+              <a:t>Intent scores and purchase suppression</a:t>
             </a:r>
           </a:p>
         </p:txBody>
       </p:sp>
-      <p:sp>
-        <p:nvSpPr>
+      <p:graphicFrame>
+        <p:nvGraphicFramePr>
           <p:cNvPr id="2" name="">
             <a:extLst xmlns:a="http://schemas.openxmlformats.org/drawingml/2006/main">
               <a:ext uri="{FF2B5EF4-FFF2-40B4-BE49-F238E27FC236}">
-                <a16:creationId xmlns:a16="http://schemas.microsoft.com/office/drawing/2014/main" id="{DF8D3039-2AF9-4428-B5BF-8EB0661F2B60}"/>
+                <a16:creationId xmlns:a16="http://schemas.microsoft.com/office/drawing/2014/main" id="{16CE8B83-7694-4203-8371-219E4A98687F}"/>
               </a:ext>
             </a:extLst>
           </p:cNvPr>
-          <p:cNvSpPr>
-            <a:spLocks xmlns:a="http://schemas.openxmlformats.org/drawingml/2006/main" noGrp="1"/>
-          </p:cNvSpPr>
+          <p:cNvGraphicFramePr/>
           <p:nvPr/>
-        </p:nvSpPr>
-        <p:spPr>
-          <a:xfrm xmlns:a="http://schemas.openxmlformats.org/drawingml/2006/main">
-            <a:off x="609600" y="2047875"/>
-            <a:ext cx="2952750" cy="1123950"/>
-          </a:xfrm>
-          <a:prstGeom xmlns:a="http://schemas.openxmlformats.org/drawingml/2006/main" prst="rect">
-            <a:avLst/>
-          </a:prstGeom>
-          <a:solidFill xmlns:a="http://schemas.openxmlformats.org/drawingml/2006/main">
-            <a:srgbClr val="EDF2F4"/>
-          </a:solidFill>
-          <a:ln xmlns:a="http://schemas.openxmlformats.org/drawingml/2006/main" w="11430">
-            <a:solidFill>
-              <a:srgbClr val="8799A6"/>
-            </a:solidFill>
-          </a:ln>
-        </p:spPr>
-      </p:sp>
+        </p:nvGraphicFramePr>
+        <p:xfrm>
+          <a:off xmlns:a="http://schemas.openxmlformats.org/drawingml/2006/main" x="609600" y="1714500"/>
+          <a:ext xmlns:a="http://schemas.openxmlformats.org/drawingml/2006/main" cx="10972800" cy="2714625"/>
+        </p:xfrm>
+        <a:graphic xmlns:a="http://schemas.openxmlformats.org/drawingml/2006/main">
+          <a:graphicData uri="http://schemas.openxmlformats.org/drawingml/2006/table">
+            <a:tbl>
+              <a:tblPr/>
+              <a:tblGrid>
+                <a:gridCol w="3333750"/>
+                <a:gridCol w="2095500"/>
+                <a:gridCol w="5543550"/>
+              </a:tblGrid>
+              <a:tr h="678656">
+                <a:tc>
+                  <a:txBody>
+                    <a:bodyPr/>
+                    <a:lstStyle/>
+                    <a:p>
+                      <a:r>
+                        <a:rPr sz="2175" b="1">
+                          <a:solidFill>
+                            <a:srgbClr val="FFFFFF"/>
+                          </a:solidFill>
+                          <a:latin typeface="Arial"/>
+                          <a:ea typeface="Arial"/>
+                          <a:cs typeface="Arial"/>
+                        </a:rPr>
+                        <a:t>Event</a:t>
+                      </a:r>
+                    </a:p>
+                  </a:txBody>
+                  <a:tcPr marL="91440" marR="91440" marT="45720" marB="45720">
+                    <a:solidFill>
+                      <a:srgbClr val="142839"/>
+                    </a:solidFill>
+                  </a:tcPr>
+                </a:tc>
+                <a:tc>
+                  <a:txBody>
+                    <a:bodyPr/>
+                    <a:lstStyle/>
+                    <a:p>
+                      <a:r>
+                        <a:rPr sz="2175" b="1">
+                          <a:solidFill>
+                            <a:srgbClr val="FFFFFF"/>
+                          </a:solidFill>
+                          <a:latin typeface="Arial"/>
+                          <a:ea typeface="Arial"/>
+                          <a:cs typeface="Arial"/>
+                        </a:rPr>
+                        <a:t>Weight</a:t>
+                      </a:r>
+                    </a:p>
+                  </a:txBody>
+                  <a:tcPr marL="91440" marR="91440" marT="45720" marB="45720">
+                    <a:solidFill>
+                      <a:srgbClr val="142839"/>
+                    </a:solidFill>
+                  </a:tcPr>
+                </a:tc>
+                <a:tc>
+                  <a:txBody>
+                    <a:bodyPr/>
+                    <a:lstStyle/>
+                    <a:p>
+                      <a:r>
+                        <a:rPr sz="2175" b="1">
+                          <a:solidFill>
+                            <a:srgbClr val="FFFFFF"/>
+                          </a:solidFill>
+                          <a:latin typeface="Arial"/>
+                          <a:ea typeface="Arial"/>
+                          <a:cs typeface="Arial"/>
+                        </a:rPr>
+                        <a:t>Example running score</a:t>
+                      </a:r>
+                    </a:p>
+                  </a:txBody>
+                  <a:tcPr marL="91440" marR="91440" marT="45720" marB="45720">
+                    <a:solidFill>
+                      <a:srgbClr val="142839"/>
+                    </a:solidFill>
+                  </a:tcPr>
+                </a:tc>
+              </a:tr>
+              <a:tr h="678656">
+                <a:tc>
+                  <a:txBody>
+                    <a:bodyPr/>
+                    <a:lstStyle/>
+                    <a:p>
+                      <a:r>
+                        <a:rPr sz="2175" b="0">
+                          <a:solidFill>
+                            <a:srgbClr val="142839"/>
+                          </a:solidFill>
+                          <a:latin typeface="Arial"/>
+                          <a:ea typeface="Arial"/>
+                          <a:cs typeface="Arial"/>
+                        </a:rPr>
+                        <a:t>view</a:t>
+                      </a:r>
+                    </a:p>
+                  </a:txBody>
+                  <a:tcPr marL="91440" marR="91440" marT="45720" marB="45720">
+                    <a:solidFill>
+                      <a:srgbClr val="FFFFFF"/>
+                    </a:solidFill>
+                  </a:tcPr>
+                </a:tc>
+                <a:tc>
+                  <a:txBody>
+                    <a:bodyPr/>
+                    <a:lstStyle/>
+                    <a:p>
+                      <a:r>
+                        <a:rPr sz="2175" b="0">
+                          <a:solidFill>
+                            <a:srgbClr val="142839"/>
+                          </a:solidFill>
+                          <a:latin typeface="Arial"/>
+                          <a:ea typeface="Arial"/>
+                          <a:cs typeface="Arial"/>
+                        </a:rPr>
+                        <a:t>1</a:t>
+                      </a:r>
+                    </a:p>
+                  </a:txBody>
+                  <a:tcPr marL="91440" marR="91440" marT="45720" marB="45720">
+                    <a:solidFill>
+                      <a:srgbClr val="FFFFFF"/>
+                    </a:solidFill>
+                  </a:tcPr>
+                </a:tc>
+                <a:tc>
+                  <a:txBody>
+                    <a:bodyPr/>
+                    <a:lstStyle/>
+                    <a:p>
+                      <a:r>
+                        <a:rPr sz="2175" b="0">
+                          <a:solidFill>
+                            <a:srgbClr val="142839"/>
+                          </a:solidFill>
+                          <a:latin typeface="Arial"/>
+                          <a:ea typeface="Arial"/>
+                          <a:cs typeface="Arial"/>
+                        </a:rPr>
+                        <a:t>1</a:t>
+                      </a:r>
+                    </a:p>
+                  </a:txBody>
+                  <a:tcPr marL="91440" marR="91440" marT="45720" marB="45720">
+                    <a:solidFill>
+                      <a:srgbClr val="FFFFFF"/>
+                    </a:solidFill>
+                  </a:tcPr>
+                </a:tc>
+              </a:tr>
+              <a:tr h="678656">
+                <a:tc>
+                  <a:txBody>
+                    <a:bodyPr/>
+                    <a:lstStyle/>
+                    <a:p>
+                      <a:r>
+                        <a:rPr sz="2175" b="0">
+                          <a:solidFill>
+                            <a:srgbClr val="142839"/>
+                          </a:solidFill>
+                          <a:latin typeface="Arial"/>
+                          <a:ea typeface="Arial"/>
+                          <a:cs typeface="Arial"/>
+                        </a:rPr>
+                        <a:t>addtocart</a:t>
+                      </a:r>
+                    </a:p>
+                  </a:txBody>
+                  <a:tcPr marL="91440" marR="91440" marT="45720" marB="45720">
+                    <a:solidFill>
+                      <a:srgbClr val="EDF2F4"/>
+                    </a:solidFill>
+                  </a:tcPr>
+                </a:tc>
+                <a:tc>
+                  <a:txBody>
+                    <a:bodyPr/>
+                    <a:lstStyle/>
+                    <a:p>
+                      <a:r>
+                        <a:rPr sz="2175" b="0">
+                          <a:solidFill>
+                            <a:srgbClr val="142839"/>
+                          </a:solidFill>
+                          <a:latin typeface="Arial"/>
+                          <a:ea typeface="Arial"/>
+                          <a:cs typeface="Arial"/>
+                        </a:rPr>
+                        <a:t>5</a:t>
+                      </a:r>
+                    </a:p>
+                  </a:txBody>
+                  <a:tcPr marL="91440" marR="91440" marT="45720" marB="45720">
+                    <a:solidFill>
+                      <a:srgbClr val="EDF2F4"/>
+                    </a:solidFill>
+                  </a:tcPr>
+                </a:tc>
+                <a:tc>
+                  <a:txBody>
+                    <a:bodyPr/>
+                    <a:lstStyle/>
+                    <a:p>
+                      <a:r>
+                        <a:rPr sz="2175" b="0">
+                          <a:solidFill>
+                            <a:srgbClr val="142839"/>
+                          </a:solidFill>
+                          <a:latin typeface="Arial"/>
+                          <a:ea typeface="Arial"/>
+                          <a:cs typeface="Arial"/>
+                        </a:rPr>
+                        <a:t>6</a:t>
+                      </a:r>
+                    </a:p>
+                  </a:txBody>
+                  <a:tcPr marL="91440" marR="91440" marT="45720" marB="45720">
+                    <a:solidFill>
+                      <a:srgbClr val="EDF2F4"/>
+                    </a:solidFill>
+                  </a:tcPr>
+                </a:tc>
+              </a:tr>
+              <a:tr h="678656">
+                <a:tc>
+                  <a:txBody>
+                    <a:bodyPr/>
+                    <a:lstStyle/>
+                    <a:p>
+                      <a:r>
+                        <a:rPr sz="2175" b="0">
+                          <a:solidFill>
+                            <a:srgbClr val="142839"/>
+                          </a:solidFill>
+                          <a:latin typeface="Arial"/>
+                          <a:ea typeface="Arial"/>
+                          <a:cs typeface="Arial"/>
+                        </a:rPr>
+                        <a:t>transaction</a:t>
+                      </a:r>
+                    </a:p>
+                  </a:txBody>
+                  <a:tcPr marL="91440" marR="91440" marT="45720" marB="45720">
+                    <a:solidFill>
+                      <a:srgbClr val="FFFFFF"/>
+                    </a:solidFill>
+                  </a:tcPr>
+                </a:tc>
+                <a:tc>
+                  <a:txBody>
+                    <a:bodyPr/>
+                    <a:lstStyle/>
+                    <a:p>
+                      <a:r>
+                        <a:rPr sz="2175" b="0">
+                          <a:solidFill>
+                            <a:srgbClr val="142839"/>
+                          </a:solidFill>
+                          <a:latin typeface="Arial"/>
+                          <a:ea typeface="Arial"/>
+                          <a:cs typeface="Arial"/>
+                        </a:rPr>
+                        <a:t>10</a:t>
+                      </a:r>
+                    </a:p>
+                  </a:txBody>
+                  <a:tcPr marL="91440" marR="91440" marT="45720" marB="45720">
+                    <a:solidFill>
+                      <a:srgbClr val="FFFFFF"/>
+                    </a:solidFill>
+                  </a:tcPr>
+                </a:tc>
+                <a:tc>
+                  <a:txBody>
+                    <a:bodyPr/>
+                    <a:lstStyle/>
+                    <a:p>
+                      <a:r>
+                        <a:rPr sz="2175" b="0">
+                          <a:solidFill>
+                            <a:srgbClr val="142839"/>
+                          </a:solidFill>
+                          <a:latin typeface="Arial"/>
+                          <a:ea typeface="Arial"/>
+                          <a:cs typeface="Arial"/>
+                        </a:rPr>
+                        <a:t>16</a:t>
+                      </a:r>
+                    </a:p>
+                  </a:txBody>
+                  <a:tcPr marL="91440" marR="91440" marT="45720" marB="45720">
+                    <a:solidFill>
+                      <a:srgbClr val="FFFFFF"/>
+                    </a:solidFill>
+                  </a:tcPr>
+                </a:tc>
+              </a:tr>
+            </a:tbl>
+          </a:graphicData>
+        </a:graphic>
+      </p:graphicFrame>
       <p:sp>
         <p:nvSpPr>
           <p:cNvPr id="3" name="">
             <a:extLst xmlns:a="http://schemas.openxmlformats.org/drawingml/2006/main">
               <a:ext uri="{FF2B5EF4-FFF2-40B4-BE49-F238E27FC236}">
-                <a16:creationId xmlns:a16="http://schemas.microsoft.com/office/drawing/2014/main" id="{C766B3C8-DA1E-4B51-A23D-D54CF8ECC7DC}"/>
+                <a16:creationId xmlns:a16="http://schemas.microsoft.com/office/drawing/2014/main" id="{E7146228-08A3-44FC-935A-C29DAB91E8E1}"/>
               </a:ext>
             </a:extLst>
           </p:cNvPr>
@@ -3932,8 +4225,8 @@
         </p:nvSpPr>
         <p:spPr>
           <a:xfrm xmlns:a="http://schemas.openxmlformats.org/drawingml/2006/main">
-            <a:off x="723900" y="2219325"/>
-            <a:ext cx="2724150" cy="419100"/>
+            <a:off x="704850" y="4857750"/>
+            <a:ext cx="10668000" cy="1095375"/>
           </a:xfrm>
           <a:prstGeom xmlns:a="http://schemas.openxmlformats.org/drawingml/2006/main" prst="rect">
             <a:avLst/>
@@ -3947,9 +4240,9 @@
           <a:bodyPr xmlns:a="http://schemas.openxmlformats.org/drawingml/2006/main" lIns="0" tIns="0" rIns="0" bIns="0"/>
           <a:lstStyle xmlns:a="http://schemas.openxmlformats.org/drawingml/2006/main">
             <a:defPPr>
-              <a:defRPr sz="2025" b="1">
-                <a:solidFill>
-                  <a:srgbClr val="142839"/>
+              <a:defRPr sz="2625" b="1">
+                <a:solidFill>
+                  <a:srgbClr val="176C75"/>
                 </a:solidFill>
                 <a:latin typeface="Arial"/>
                 <a:ea typeface="Arial"/>
@@ -3959,9 +4252,9 @@
           </a:lstStyle>
           <a:p xmlns:a="http://schemas.openxmlformats.org/drawingml/2006/main">
             <a:pPr>
-              <a:defRPr sz="2025" b="1">
-                <a:solidFill>
-                  <a:srgbClr val="142839"/>
+              <a:defRPr sz="2625" b="1">
+                <a:solidFill>
+                  <a:srgbClr val="176C75"/>
                 </a:solidFill>
                 <a:latin typeface="Arial"/>
                 <a:ea typeface="Arial"/>
@@ -3969,608 +4262,22 @@
               </a:defRPr>
             </a:pPr>
             <a:r>
-              <a:rPr sz="2025" b="1">
-                <a:solidFill>
-                  <a:srgbClr val="142839"/>
+              <a:rPr sz="2625" b="1">
+                <a:solidFill>
+                  <a:srgbClr val="176C75"/>
                 </a:solidFill>
                 <a:latin typeface="Arial"/>
                 <a:ea typeface="Arial"/>
                 <a:cs typeface="Arial"/>
               </a:rPr>
-              <a:t>Write staging epoch</a:t>
-            </a:r>
-          </a:p>
-        </p:txBody>
-      </p:sp>
-      <p:sp>
-        <p:nvSpPr>
-          <p:cNvPr id="4" name="">
-            <a:extLst xmlns:a="http://schemas.openxmlformats.org/drawingml/2006/main">
-              <a:ext uri="{FF2B5EF4-FFF2-40B4-BE49-F238E27FC236}">
-                <a16:creationId xmlns:a16="http://schemas.microsoft.com/office/drawing/2014/main" id="{5155C12B-300D-4272-BC8C-F685AEA80E65}"/>
-              </a:ext>
-            </a:extLst>
-          </p:cNvPr>
-          <p:cNvSpPr>
-            <a:spLocks xmlns:a="http://schemas.openxmlformats.org/drawingml/2006/main" noGrp="1"/>
-          </p:cNvSpPr>
-          <p:nvPr/>
-        </p:nvSpPr>
-        <p:spPr>
-          <a:xfrm xmlns:a="http://schemas.openxmlformats.org/drawingml/2006/main">
-            <a:off x="723900" y="2667000"/>
-            <a:ext cx="2724150" cy="428625"/>
-          </a:xfrm>
-          <a:prstGeom xmlns:a="http://schemas.openxmlformats.org/drawingml/2006/main" prst="rect">
-            <a:avLst/>
-          </a:prstGeom>
-          <a:noFill xmlns:a="http://schemas.openxmlformats.org/drawingml/2006/main"/>
-          <a:ln xmlns:a="http://schemas.openxmlformats.org/drawingml/2006/main" w="0">
-            <a:noFill/>
-          </a:ln>
-        </p:spPr>
-        <p:txBody>
-          <a:bodyPr xmlns:a="http://schemas.openxmlformats.org/drawingml/2006/main" lIns="0" tIns="0" rIns="0" bIns="0"/>
-          <a:lstStyle xmlns:a="http://schemas.openxmlformats.org/drawingml/2006/main">
-            <a:defPPr>
-              <a:defRPr sz="1575" b="0">
-                <a:solidFill>
-                  <a:srgbClr val="42586A"/>
-                </a:solidFill>
-                <a:latin typeface="Arial"/>
-                <a:ea typeface="Arial"/>
-                <a:cs typeface="Arial"/>
-              </a:defRPr>
-            </a:defPPr>
-          </a:lstStyle>
-          <a:p xmlns:a="http://schemas.openxmlformats.org/drawingml/2006/main">
-            <a:pPr>
-              <a:defRPr sz="1575" b="0">
-                <a:solidFill>
-                  <a:srgbClr val="42586A"/>
-                </a:solidFill>
-                <a:latin typeface="Arial"/>
-                <a:ea typeface="Arial"/>
-                <a:cs typeface="Arial"/>
-              </a:defRPr>
-            </a:pPr>
-            <a:r>
-              <a:rPr sz="1575" b="0">
-                <a:solidFill>
-                  <a:srgbClr val="42586A"/>
-                </a:solidFill>
-                <a:latin typeface="Arial"/>
-                <a:ea typeface="Arial"/>
-                <a:cs typeface="Arial"/>
-              </a:rPr>
-              <a:t>State and recommendations</a:t>
-            </a:r>
-          </a:p>
-        </p:txBody>
-      </p:sp>
-      <p:sp>
-        <p:nvSpPr>
-          <p:cNvPr id="5" name="">
-            <a:extLst xmlns:a="http://schemas.openxmlformats.org/drawingml/2006/main">
-              <a:ext uri="{FF2B5EF4-FFF2-40B4-BE49-F238E27FC236}">
-                <a16:creationId xmlns:a16="http://schemas.microsoft.com/office/drawing/2014/main" id="{2777FD75-FB05-4643-8C83-985592AC036F}"/>
-              </a:ext>
-            </a:extLst>
-          </p:cNvPr>
-          <p:cNvSpPr>
-            <a:spLocks xmlns:a="http://schemas.openxmlformats.org/drawingml/2006/main" noGrp="1"/>
-          </p:cNvSpPr>
-          <p:nvPr/>
-        </p:nvSpPr>
-        <p:spPr>
-          <a:xfrm xmlns:a="http://schemas.openxmlformats.org/drawingml/2006/main">
-            <a:off x="3686175" y="2457450"/>
-            <a:ext cx="419100" cy="238125"/>
-          </a:xfrm>
-          <a:prstGeom xmlns:a="http://schemas.openxmlformats.org/drawingml/2006/main" prst="rightArrow">
-            <a:avLst/>
-          </a:prstGeom>
-          <a:solidFill xmlns:a="http://schemas.openxmlformats.org/drawingml/2006/main">
-            <a:srgbClr val="176C75"/>
-          </a:solidFill>
-          <a:ln xmlns:a="http://schemas.openxmlformats.org/drawingml/2006/main" w="0">
-            <a:noFill/>
-          </a:ln>
-        </p:spPr>
-      </p:sp>
-      <p:sp>
-        <p:nvSpPr>
-          <p:cNvPr id="6" name="">
-            <a:extLst xmlns:a="http://schemas.openxmlformats.org/drawingml/2006/main">
-              <a:ext uri="{FF2B5EF4-FFF2-40B4-BE49-F238E27FC236}">
-                <a16:creationId xmlns:a16="http://schemas.microsoft.com/office/drawing/2014/main" id="{13FCB184-6FAF-4BF8-BEA9-CF82FFBED342}"/>
-              </a:ext>
-            </a:extLst>
-          </p:cNvPr>
-          <p:cNvSpPr>
-            <a:spLocks xmlns:a="http://schemas.openxmlformats.org/drawingml/2006/main" noGrp="1"/>
-          </p:cNvSpPr>
-          <p:nvPr/>
-        </p:nvSpPr>
-        <p:spPr>
-          <a:xfrm xmlns:a="http://schemas.openxmlformats.org/drawingml/2006/main">
-            <a:off x="4286250" y="2047875"/>
-            <a:ext cx="2952750" cy="1123950"/>
-          </a:xfrm>
-          <a:prstGeom xmlns:a="http://schemas.openxmlformats.org/drawingml/2006/main" prst="rect">
-            <a:avLst/>
-          </a:prstGeom>
-          <a:solidFill xmlns:a="http://schemas.openxmlformats.org/drawingml/2006/main">
-            <a:srgbClr val="EDF2F4"/>
-          </a:solidFill>
-          <a:ln xmlns:a="http://schemas.openxmlformats.org/drawingml/2006/main" w="11430">
-            <a:solidFill>
-              <a:srgbClr val="8799A6"/>
-            </a:solidFill>
-          </a:ln>
-        </p:spPr>
-      </p:sp>
-      <p:sp>
-        <p:nvSpPr>
-          <p:cNvPr id="7" name="">
-            <a:extLst xmlns:a="http://schemas.openxmlformats.org/drawingml/2006/main">
-              <a:ext uri="{FF2B5EF4-FFF2-40B4-BE49-F238E27FC236}">
-                <a16:creationId xmlns:a16="http://schemas.microsoft.com/office/drawing/2014/main" id="{08E8A4CF-15A5-48E8-BBE4-A7759D8FDC31}"/>
-              </a:ext>
-            </a:extLst>
-          </p:cNvPr>
-          <p:cNvSpPr>
-            <a:spLocks xmlns:a="http://schemas.openxmlformats.org/drawingml/2006/main" noGrp="1"/>
-          </p:cNvSpPr>
-          <p:nvPr/>
-        </p:nvSpPr>
-        <p:spPr>
-          <a:xfrm xmlns:a="http://schemas.openxmlformats.org/drawingml/2006/main">
-            <a:off x="4400550" y="2219325"/>
-            <a:ext cx="2724150" cy="419100"/>
-          </a:xfrm>
-          <a:prstGeom xmlns:a="http://schemas.openxmlformats.org/drawingml/2006/main" prst="rect">
-            <a:avLst/>
-          </a:prstGeom>
-          <a:noFill xmlns:a="http://schemas.openxmlformats.org/drawingml/2006/main"/>
-          <a:ln xmlns:a="http://schemas.openxmlformats.org/drawingml/2006/main" w="0">
-            <a:noFill/>
-          </a:ln>
-        </p:spPr>
-        <p:txBody>
-          <a:bodyPr xmlns:a="http://schemas.openxmlformats.org/drawingml/2006/main" lIns="0" tIns="0" rIns="0" bIns="0"/>
-          <a:lstStyle xmlns:a="http://schemas.openxmlformats.org/drawingml/2006/main">
-            <a:defPPr>
-              <a:defRPr sz="2025" b="1">
-                <a:solidFill>
-                  <a:srgbClr val="142839"/>
-                </a:solidFill>
-                <a:latin typeface="Arial"/>
-                <a:ea typeface="Arial"/>
-                <a:cs typeface="Arial"/>
-              </a:defRPr>
-            </a:defPPr>
-          </a:lstStyle>
-          <a:p xmlns:a="http://schemas.openxmlformats.org/drawingml/2006/main">
-            <a:pPr>
-              <a:defRPr sz="2025" b="1">
-                <a:solidFill>
-                  <a:srgbClr val="142839"/>
-                </a:solidFill>
-                <a:latin typeface="Arial"/>
-                <a:ea typeface="Arial"/>
-                <a:cs typeface="Arial"/>
-              </a:defRPr>
-            </a:pPr>
-            <a:r>
-              <a:rPr sz="2025" b="1">
-                <a:solidFill>
-                  <a:srgbClr val="142839"/>
-                </a:solidFill>
-                <a:latin typeface="Arial"/>
-                <a:ea typeface="Arial"/>
-                <a:cs typeface="Arial"/>
-              </a:rPr>
-              <a:t>Publish epoch</a:t>
-            </a:r>
-          </a:p>
-        </p:txBody>
-      </p:sp>
-      <p:sp>
-        <p:nvSpPr>
-          <p:cNvPr id="8" name="">
-            <a:extLst xmlns:a="http://schemas.openxmlformats.org/drawingml/2006/main">
-              <a:ext uri="{FF2B5EF4-FFF2-40B4-BE49-F238E27FC236}">
-                <a16:creationId xmlns:a16="http://schemas.microsoft.com/office/drawing/2014/main" id="{0D4B6CA5-CBF4-4EF7-81DD-397EA5498A00}"/>
-              </a:ext>
-            </a:extLst>
-          </p:cNvPr>
-          <p:cNvSpPr>
-            <a:spLocks xmlns:a="http://schemas.openxmlformats.org/drawingml/2006/main" noGrp="1"/>
-          </p:cNvSpPr>
-          <p:nvPr/>
-        </p:nvSpPr>
-        <p:spPr>
-          <a:xfrm xmlns:a="http://schemas.openxmlformats.org/drawingml/2006/main">
-            <a:off x="4400550" y="2667000"/>
-            <a:ext cx="2724150" cy="428625"/>
-          </a:xfrm>
-          <a:prstGeom xmlns:a="http://schemas.openxmlformats.org/drawingml/2006/main" prst="rect">
-            <a:avLst/>
-          </a:prstGeom>
-          <a:noFill xmlns:a="http://schemas.openxmlformats.org/drawingml/2006/main"/>
-          <a:ln xmlns:a="http://schemas.openxmlformats.org/drawingml/2006/main" w="0">
-            <a:noFill/>
-          </a:ln>
-        </p:spPr>
-        <p:txBody>
-          <a:bodyPr xmlns:a="http://schemas.openxmlformats.org/drawingml/2006/main" lIns="0" tIns="0" rIns="0" bIns="0"/>
-          <a:lstStyle xmlns:a="http://schemas.openxmlformats.org/drawingml/2006/main">
-            <a:defPPr>
-              <a:defRPr sz="1575" b="0">
-                <a:solidFill>
-                  <a:srgbClr val="42586A"/>
-                </a:solidFill>
-                <a:latin typeface="Arial"/>
-                <a:ea typeface="Arial"/>
-                <a:cs typeface="Arial"/>
-              </a:defRPr>
-            </a:defPPr>
-          </a:lstStyle>
-          <a:p xmlns:a="http://schemas.openxmlformats.org/drawingml/2006/main">
-            <a:pPr>
-              <a:defRPr sz="1575" b="0">
-                <a:solidFill>
-                  <a:srgbClr val="42586A"/>
-                </a:solidFill>
-                <a:latin typeface="Arial"/>
-                <a:ea typeface="Arial"/>
-                <a:cs typeface="Arial"/>
-              </a:defRPr>
-            </a:pPr>
-            <a:r>
-              <a:rPr sz="1575" b="0">
-                <a:solidFill>
-                  <a:srgbClr val="42586A"/>
-                </a:solidFill>
-                <a:latin typeface="Arial"/>
-                <a:ea typeface="Arial"/>
-                <a:cs typeface="Arial"/>
-              </a:rPr>
-              <a:t>Same-filesystem rename</a:t>
-            </a:r>
-          </a:p>
-        </p:txBody>
-      </p:sp>
-      <p:sp>
-        <p:nvSpPr>
-          <p:cNvPr id="9" name="">
-            <a:extLst xmlns:a="http://schemas.openxmlformats.org/drawingml/2006/main">
-              <a:ext uri="{FF2B5EF4-FFF2-40B4-BE49-F238E27FC236}">
-                <a16:creationId xmlns:a16="http://schemas.microsoft.com/office/drawing/2014/main" id="{432D12E9-F1D5-494A-931C-59458F1F5126}"/>
-              </a:ext>
-            </a:extLst>
-          </p:cNvPr>
-          <p:cNvSpPr>
-            <a:spLocks xmlns:a="http://schemas.openxmlformats.org/drawingml/2006/main" noGrp="1"/>
-          </p:cNvSpPr>
-          <p:nvPr/>
-        </p:nvSpPr>
-        <p:spPr>
-          <a:xfrm xmlns:a="http://schemas.openxmlformats.org/drawingml/2006/main">
-            <a:off x="7362825" y="2457450"/>
-            <a:ext cx="419100" cy="238125"/>
-          </a:xfrm>
-          <a:prstGeom xmlns:a="http://schemas.openxmlformats.org/drawingml/2006/main" prst="rightArrow">
-            <a:avLst/>
-          </a:prstGeom>
-          <a:solidFill xmlns:a="http://schemas.openxmlformats.org/drawingml/2006/main">
-            <a:srgbClr val="176C75"/>
-          </a:solidFill>
-          <a:ln xmlns:a="http://schemas.openxmlformats.org/drawingml/2006/main" w="0">
-            <a:noFill/>
-          </a:ln>
-        </p:spPr>
-      </p:sp>
-      <p:sp>
-        <p:nvSpPr>
-          <p:cNvPr id="10" name="">
-            <a:extLst xmlns:a="http://schemas.openxmlformats.org/drawingml/2006/main">
-              <a:ext uri="{FF2B5EF4-FFF2-40B4-BE49-F238E27FC236}">
-                <a16:creationId xmlns:a16="http://schemas.microsoft.com/office/drawing/2014/main" id="{E5F2DED0-AC8E-43FD-BB2B-F67B87999543}"/>
-              </a:ext>
-            </a:extLst>
-          </p:cNvPr>
-          <p:cNvSpPr>
-            <a:spLocks xmlns:a="http://schemas.openxmlformats.org/drawingml/2006/main" noGrp="1"/>
-          </p:cNvSpPr>
-          <p:nvPr/>
-        </p:nvSpPr>
-        <p:spPr>
-          <a:xfrm xmlns:a="http://schemas.openxmlformats.org/drawingml/2006/main">
-            <a:off x="7962900" y="2047875"/>
-            <a:ext cx="3619500" cy="1123950"/>
-          </a:xfrm>
-          <a:prstGeom xmlns:a="http://schemas.openxmlformats.org/drawingml/2006/main" prst="rect">
-            <a:avLst/>
-          </a:prstGeom>
-          <a:solidFill xmlns:a="http://schemas.openxmlformats.org/drawingml/2006/main">
-            <a:srgbClr val="EDF2F4"/>
-          </a:solidFill>
-          <a:ln xmlns:a="http://schemas.openxmlformats.org/drawingml/2006/main" w="11430">
-            <a:solidFill>
-              <a:srgbClr val="8799A6"/>
-            </a:solidFill>
-          </a:ln>
-        </p:spPr>
-      </p:sp>
-      <p:sp>
-        <p:nvSpPr>
-          <p:cNvPr id="11" name="">
-            <a:extLst xmlns:a="http://schemas.openxmlformats.org/drawingml/2006/main">
-              <a:ext uri="{FF2B5EF4-FFF2-40B4-BE49-F238E27FC236}">
-                <a16:creationId xmlns:a16="http://schemas.microsoft.com/office/drawing/2014/main" id="{921B6F3C-92A4-405C-9E31-1A2AE76091AE}"/>
-              </a:ext>
-            </a:extLst>
-          </p:cNvPr>
-          <p:cNvSpPr>
-            <a:spLocks xmlns:a="http://schemas.openxmlformats.org/drawingml/2006/main" noGrp="1"/>
-          </p:cNvSpPr>
-          <p:nvPr/>
-        </p:nvSpPr>
-        <p:spPr>
-          <a:xfrm xmlns:a="http://schemas.openxmlformats.org/drawingml/2006/main">
-            <a:off x="8077200" y="2219325"/>
-            <a:ext cx="3390900" cy="419100"/>
-          </a:xfrm>
-          <a:prstGeom xmlns:a="http://schemas.openxmlformats.org/drawingml/2006/main" prst="rect">
-            <a:avLst/>
-          </a:prstGeom>
-          <a:noFill xmlns:a="http://schemas.openxmlformats.org/drawingml/2006/main"/>
-          <a:ln xmlns:a="http://schemas.openxmlformats.org/drawingml/2006/main" w="0">
-            <a:noFill/>
-          </a:ln>
-        </p:spPr>
-        <p:txBody>
-          <a:bodyPr xmlns:a="http://schemas.openxmlformats.org/drawingml/2006/main" lIns="0" tIns="0" rIns="0" bIns="0"/>
-          <a:lstStyle xmlns:a="http://schemas.openxmlformats.org/drawingml/2006/main">
-            <a:defPPr>
-              <a:defRPr sz="2025" b="1">
-                <a:solidFill>
-                  <a:srgbClr val="142839"/>
-                </a:solidFill>
-                <a:latin typeface="Arial"/>
-                <a:ea typeface="Arial"/>
-                <a:cs typeface="Arial"/>
-              </a:defRPr>
-            </a:defPPr>
-          </a:lstStyle>
-          <a:p xmlns:a="http://schemas.openxmlformats.org/drawingml/2006/main">
-            <a:pPr>
-              <a:defRPr sz="2025" b="1">
-                <a:solidFill>
-                  <a:srgbClr val="142839"/>
-                </a:solidFill>
-                <a:latin typeface="Arial"/>
-                <a:ea typeface="Arial"/>
-                <a:cs typeface="Arial"/>
-              </a:defRPr>
-            </a:pPr>
-            <a:r>
-              <a:rPr sz="2025" b="1">
-                <a:solidFill>
-                  <a:srgbClr val="142839"/>
-                </a:solidFill>
-                <a:latin typeface="Arial"/>
-                <a:ea typeface="Arial"/>
-                <a:cs typeface="Arial"/>
-              </a:rPr>
-              <a:t>Spark checkpoint</a:t>
-            </a:r>
-          </a:p>
-        </p:txBody>
-      </p:sp>
-      <p:sp>
-        <p:nvSpPr>
-          <p:cNvPr id="12" name="">
-            <a:extLst xmlns:a="http://schemas.openxmlformats.org/drawingml/2006/main">
-              <a:ext uri="{FF2B5EF4-FFF2-40B4-BE49-F238E27FC236}">
-                <a16:creationId xmlns:a16="http://schemas.microsoft.com/office/drawing/2014/main" id="{AC440ADB-3A63-4C6F-A82A-9F19097599EF}"/>
-              </a:ext>
-            </a:extLst>
-          </p:cNvPr>
-          <p:cNvSpPr>
-            <a:spLocks xmlns:a="http://schemas.openxmlformats.org/drawingml/2006/main" noGrp="1"/>
-          </p:cNvSpPr>
-          <p:nvPr/>
-        </p:nvSpPr>
-        <p:spPr>
-          <a:xfrm xmlns:a="http://schemas.openxmlformats.org/drawingml/2006/main">
-            <a:off x="8077200" y="2667000"/>
-            <a:ext cx="3390900" cy="428625"/>
-          </a:xfrm>
-          <a:prstGeom xmlns:a="http://schemas.openxmlformats.org/drawingml/2006/main" prst="rect">
-            <a:avLst/>
-          </a:prstGeom>
-          <a:noFill xmlns:a="http://schemas.openxmlformats.org/drawingml/2006/main"/>
-          <a:ln xmlns:a="http://schemas.openxmlformats.org/drawingml/2006/main" w="0">
-            <a:noFill/>
-          </a:ln>
-        </p:spPr>
-        <p:txBody>
-          <a:bodyPr xmlns:a="http://schemas.openxmlformats.org/drawingml/2006/main" lIns="0" tIns="0" rIns="0" bIns="0"/>
-          <a:lstStyle xmlns:a="http://schemas.openxmlformats.org/drawingml/2006/main">
-            <a:defPPr>
-              <a:defRPr sz="1575" b="0">
-                <a:solidFill>
-                  <a:srgbClr val="42586A"/>
-                </a:solidFill>
-                <a:latin typeface="Arial"/>
-                <a:ea typeface="Arial"/>
-                <a:cs typeface="Arial"/>
-              </a:defRPr>
-            </a:defPPr>
-          </a:lstStyle>
-          <a:p xmlns:a="http://schemas.openxmlformats.org/drawingml/2006/main">
-            <a:pPr>
-              <a:defRPr sz="1575" b="0">
-                <a:solidFill>
-                  <a:srgbClr val="42586A"/>
-                </a:solidFill>
-                <a:latin typeface="Arial"/>
-                <a:ea typeface="Arial"/>
-                <a:cs typeface="Arial"/>
-              </a:defRPr>
-            </a:pPr>
-            <a:r>
-              <a:rPr sz="1575" b="0">
-                <a:solidFill>
-                  <a:srgbClr val="42586A"/>
-                </a:solidFill>
-                <a:latin typeface="Arial"/>
-                <a:ea typeface="Arial"/>
-                <a:cs typeface="Arial"/>
-              </a:rPr>
-              <a:t>Commit source progress</a:t>
-            </a:r>
-          </a:p>
-        </p:txBody>
-      </p:sp>
-      <p:sp>
-        <p:nvSpPr>
-          <p:cNvPr id="13" name="">
-            <a:extLst xmlns:a="http://schemas.openxmlformats.org/drawingml/2006/main">
-              <a:ext uri="{FF2B5EF4-FFF2-40B4-BE49-F238E27FC236}">
-                <a16:creationId xmlns:a16="http://schemas.microsoft.com/office/drawing/2014/main" id="{7D6E678A-49F0-4669-9224-579F5C03AD5C}"/>
-              </a:ext>
-            </a:extLst>
-          </p:cNvPr>
-          <p:cNvSpPr>
-            <a:spLocks xmlns:a="http://schemas.openxmlformats.org/drawingml/2006/main" noGrp="1"/>
-          </p:cNvSpPr>
-          <p:nvPr/>
-        </p:nvSpPr>
-        <p:spPr>
-          <a:xfrm xmlns:a="http://schemas.openxmlformats.org/drawingml/2006/main">
-            <a:off x="704850" y="3952875"/>
-            <a:ext cx="10668000" cy="809625"/>
-          </a:xfrm>
-          <a:prstGeom xmlns:a="http://schemas.openxmlformats.org/drawingml/2006/main" prst="rect">
-            <a:avLst/>
-          </a:prstGeom>
-          <a:noFill xmlns:a="http://schemas.openxmlformats.org/drawingml/2006/main"/>
-          <a:ln xmlns:a="http://schemas.openxmlformats.org/drawingml/2006/main" w="0">
-            <a:noFill/>
-          </a:ln>
-        </p:spPr>
-        <p:txBody>
-          <a:bodyPr xmlns:a="http://schemas.openxmlformats.org/drawingml/2006/main" lIns="0" tIns="0" rIns="0" bIns="0"/>
-          <a:lstStyle xmlns:a="http://schemas.openxmlformats.org/drawingml/2006/main">
-            <a:defPPr>
-              <a:defRPr sz="2550" b="1">
-                <a:solidFill>
-                  <a:srgbClr val="176C75"/>
-                </a:solidFill>
-                <a:latin typeface="Arial"/>
-                <a:ea typeface="Arial"/>
-                <a:cs typeface="Arial"/>
-              </a:defRPr>
-            </a:defPPr>
-          </a:lstStyle>
-          <a:p xmlns:a="http://schemas.openxmlformats.org/drawingml/2006/main">
-            <a:pPr>
-              <a:defRPr sz="2550" b="1">
-                <a:solidFill>
-                  <a:srgbClr val="176C75"/>
-                </a:solidFill>
-                <a:latin typeface="Arial"/>
-                <a:ea typeface="Arial"/>
-                <a:cs typeface="Arial"/>
-              </a:defRPr>
-            </a:pPr>
-            <a:r>
-              <a:rPr sz="2550" b="1">
-                <a:solidFill>
-                  <a:srgbClr val="176C75"/>
-                </a:solidFill>
-                <a:latin typeface="Arial"/>
-                <a:ea typeface="Arial"/>
-                <a:cs typeface="Arial"/>
-              </a:rPr>
-              <a:t>A retry consumes the batch and skips an already-published epoch.</a:t>
-            </a:r>
-          </a:p>
-        </p:txBody>
-      </p:sp>
-      <p:sp>
-        <p:nvSpPr>
-          <p:cNvPr id="14" name="">
-            <a:extLst xmlns:a="http://schemas.openxmlformats.org/drawingml/2006/main">
-              <a:ext uri="{FF2B5EF4-FFF2-40B4-BE49-F238E27FC236}">
-                <a16:creationId xmlns:a16="http://schemas.microsoft.com/office/drawing/2014/main" id="{003CC698-CA8C-43D7-A650-B83507384CE9}"/>
-              </a:ext>
-            </a:extLst>
-          </p:cNvPr>
-          <p:cNvSpPr>
-            <a:spLocks xmlns:a="http://schemas.openxmlformats.org/drawingml/2006/main" noGrp="1"/>
-          </p:cNvSpPr>
-          <p:nvPr/>
-        </p:nvSpPr>
-        <p:spPr>
-          <a:xfrm xmlns:a="http://schemas.openxmlformats.org/drawingml/2006/main">
-            <a:off x="704850" y="5143500"/>
-            <a:ext cx="10668000" cy="1047750"/>
-          </a:xfrm>
-          <a:prstGeom xmlns:a="http://schemas.openxmlformats.org/drawingml/2006/main" prst="rect">
-            <a:avLst/>
-          </a:prstGeom>
-          <a:noFill xmlns:a="http://schemas.openxmlformats.org/drawingml/2006/main"/>
-          <a:ln xmlns:a="http://schemas.openxmlformats.org/drawingml/2006/main" w="0">
-            <a:noFill/>
-          </a:ln>
-        </p:spPr>
-        <p:txBody>
-          <a:bodyPr xmlns:a="http://schemas.openxmlformats.org/drawingml/2006/main" lIns="0" tIns="0" rIns="0" bIns="0"/>
-          <a:lstStyle xmlns:a="http://schemas.openxmlformats.org/drawingml/2006/main">
-            <a:defPPr>
-              <a:defRPr sz="2175" b="0">
-                <a:solidFill>
-                  <a:srgbClr val="42586A"/>
-                </a:solidFill>
-                <a:latin typeface="Arial"/>
-                <a:ea typeface="Arial"/>
-                <a:cs typeface="Arial"/>
-              </a:defRPr>
-            </a:defPPr>
-          </a:lstStyle>
-          <a:p xmlns:a="http://schemas.openxmlformats.org/drawingml/2006/main">
-            <a:pPr>
-              <a:defRPr sz="2175" b="0">
-                <a:solidFill>
-                  <a:srgbClr val="42586A"/>
-                </a:solidFill>
-                <a:latin typeface="Arial"/>
-                <a:ea typeface="Arial"/>
-                <a:cs typeface="Arial"/>
-              </a:defRPr>
-            </a:pPr>
-            <a:r>
-              <a:rPr sz="2175" b="0">
-                <a:solidFill>
-                  <a:srgbClr val="42586A"/>
-                </a:solidFill>
-                <a:latin typeface="Arial"/>
-                <a:ea typeface="Arial"/>
-                <a:cs typeface="Arial"/>
-              </a:rPr>
-              <a:t>Console logs can repeat. Independent queries commit separately.</a:t>
+              <a:t>Cart at score 6 qualifies.</a:t>
             </a:r>
           </a:p>
           <a:p xmlns:a="http://schemas.openxmlformats.org/drawingml/2006/main">
             <a:pPr>
-              <a:defRPr sz="2175" b="0">
-                <a:solidFill>
-                  <a:srgbClr val="42586A"/>
+              <a:defRPr sz="2625" b="1">
+                <a:solidFill>
+                  <a:srgbClr val="176C75"/>
                 </a:solidFill>
                 <a:latin typeface="Arial"/>
                 <a:ea typeface="Arial"/>
@@ -4578,15 +4285,15 @@
               </a:defRPr>
             </a:pPr>
             <a:r>
-              <a:rPr sz="2175" b="0">
-                <a:solidFill>
-                  <a:srgbClr val="42586A"/>
+              <a:rPr sz="2625" b="1">
+                <a:solidFill>
+                  <a:srgbClr val="176C75"/>
                 </a:solidFill>
                 <a:latin typeface="Arial"/>
                 <a:ea typeface="Arial"/>
                 <a:cs typeface="Arial"/>
               </a:rPr>
-              <a:t>Keep Kafka storage, checkpoints and epochs together.</a:t>
+              <a:t>Purchase at score 16 removes that item from eligibility.</a:t>
             </a:r>
           </a:p>
         </p:txBody>
@@ -4594,7 +4301,7 @@
     </p:spTree>
     <p:extLst>
       <p:ext uri="{BB962C8B-B14F-4D97-AF65-F5344CB8AC3E}">
-        <p14:creationId xmlns:p14="http://schemas.microsoft.com/office/powerpoint/2010/main" val="1864903828"/>
+        <p14:creationId xmlns:p14="http://schemas.microsoft.com/office/powerpoint/2010/main" val="1247785385"/>
       </p:ext>
     </p:extLst>
   </p:cSld>
@@ -4622,10 +4329,10 @@
       </p:grpSpPr>
       <p:sp>
         <p:nvSpPr>
-          <p:cNvPr id="6" name="">
+          <p:cNvPr id="7" name="">
             <a:extLst xmlns:a="http://schemas.openxmlformats.org/drawingml/2006/main">
               <a:ext uri="{FF2B5EF4-FFF2-40B4-BE49-F238E27FC236}">
-                <a16:creationId xmlns:a16="http://schemas.microsoft.com/office/drawing/2014/main" id="{84FA3E1E-22E1-4DB1-BDAF-162089F4CA6D}"/>
+                <a16:creationId xmlns:a16="http://schemas.microsoft.com/office/drawing/2014/main" id="{F167D2F6-0058-46E1-B525-5DF22C9B25C6}"/>
               </a:ext>
             </a:extLst>
           </p:cNvPr>
@@ -4691,7 +4398,7 @@
           <p:cNvPr id="2" name="">
             <a:extLst xmlns:a="http://schemas.openxmlformats.org/drawingml/2006/main">
               <a:ext uri="{FF2B5EF4-FFF2-40B4-BE49-F238E27FC236}">
-                <a16:creationId xmlns:a16="http://schemas.microsoft.com/office/drawing/2014/main" id="{3B0BC870-3D31-4835-AD36-6D48B3A8F285}"/>
+                <a16:creationId xmlns:a16="http://schemas.microsoft.com/office/drawing/2014/main" id="{0D162540-7165-40D9-A01F-8A20652F7752}"/>
               </a:ext>
             </a:extLst>
           </p:cNvPr>
@@ -4757,7 +4464,7 @@
           <p:cNvPr id="3" name="">
             <a:extLst xmlns:a="http://schemas.openxmlformats.org/drawingml/2006/main">
               <a:ext uri="{FF2B5EF4-FFF2-40B4-BE49-F238E27FC236}">
-                <a16:creationId xmlns:a16="http://schemas.microsoft.com/office/drawing/2014/main" id="{4C41B864-7D64-4232-9DC3-B19F3010BDEF}"/>
+                <a16:creationId xmlns:a16="http://schemas.microsoft.com/office/drawing/2014/main" id="{19DD6957-F735-422D-88D5-A8DB8F6E8BCC}"/>
               </a:ext>
             </a:extLst>
           </p:cNvPr>
@@ -4823,7 +4530,7 @@
           <p:cNvPr id="4" name="">
             <a:extLst xmlns:a="http://schemas.openxmlformats.org/drawingml/2006/main">
               <a:ext uri="{FF2B5EF4-FFF2-40B4-BE49-F238E27FC236}">
-                <a16:creationId xmlns:a16="http://schemas.microsoft.com/office/drawing/2014/main" id="{A0810766-7A2C-464D-A599-0401982CACBA}"/>
+                <a16:creationId xmlns:a16="http://schemas.microsoft.com/office/drawing/2014/main" id="{14DB21B3-19CA-45E2-BDA2-B8AA1E9DB6F4}"/>
               </a:ext>
             </a:extLst>
           </p:cNvPr>
@@ -4912,7 +4619,73 @@
           <p:cNvPr id="5" name="">
             <a:extLst xmlns:a="http://schemas.openxmlformats.org/drawingml/2006/main">
               <a:ext uri="{FF2B5EF4-FFF2-40B4-BE49-F238E27FC236}">
-                <a16:creationId xmlns:a16="http://schemas.microsoft.com/office/drawing/2014/main" id="{B8EC297F-3F26-4886-9E0B-CD2ED31CEA5F}"/>
+                <a16:creationId xmlns:a16="http://schemas.microsoft.com/office/drawing/2014/main" id="{98DF3759-61F9-4822-B27C-4A1129ABC07D}"/>
+              </a:ext>
+            </a:extLst>
+          </p:cNvPr>
+          <p:cNvSpPr>
+            <a:spLocks xmlns:a="http://schemas.openxmlformats.org/drawingml/2006/main" noGrp="1"/>
+          </p:cNvSpPr>
+          <p:nvPr/>
+        </p:nvSpPr>
+        <p:spPr>
+          <a:xfrm xmlns:a="http://schemas.openxmlformats.org/drawingml/2006/main">
+            <a:off x="704850" y="3619500"/>
+            <a:ext cx="10668000" cy="428625"/>
+          </a:xfrm>
+          <a:prstGeom xmlns:a="http://schemas.openxmlformats.org/drawingml/2006/main" prst="rect">
+            <a:avLst/>
+          </a:prstGeom>
+          <a:noFill xmlns:a="http://schemas.openxmlformats.org/drawingml/2006/main"/>
+          <a:ln xmlns:a="http://schemas.openxmlformats.org/drawingml/2006/main" w="0">
+            <a:noFill/>
+          </a:ln>
+        </p:spPr>
+        <p:txBody>
+          <a:bodyPr xmlns:a="http://schemas.openxmlformats.org/drawingml/2006/main" lIns="0" tIns="0" rIns="0" bIns="0"/>
+          <a:lstStyle xmlns:a="http://schemas.openxmlformats.org/drawingml/2006/main">
+            <a:defPPr>
+              <a:defRPr sz="2025" b="1">
+                <a:solidFill>
+                  <a:srgbClr val="142839"/>
+                </a:solidFill>
+                <a:latin typeface="Arial"/>
+                <a:ea typeface="Arial"/>
+                <a:cs typeface="Arial"/>
+              </a:defRPr>
+            </a:defPPr>
+          </a:lstStyle>
+          <a:p xmlns:a="http://schemas.openxmlformats.org/drawingml/2006/main">
+            <a:pPr>
+              <a:defRPr sz="2025" b="1">
+                <a:solidFill>
+                  <a:srgbClr val="142839"/>
+                </a:solidFill>
+                <a:latin typeface="Arial"/>
+                <a:ea typeface="Arial"/>
+                <a:cs typeface="Arial"/>
+              </a:defRPr>
+            </a:pPr>
+            <a:r>
+              <a:rPr sz="2025" b="1">
+                <a:solidFill>
+                  <a:srgbClr val="142839"/>
+                </a:solidFill>
+                <a:latin typeface="Arial"/>
+                <a:ea typeface="Arial"/>
+                <a:cs typeface="Arial"/>
+              </a:rPr>
+              <a:t>docker compose --profile tools run --rm verify-full</a:t>
+            </a:r>
+          </a:p>
+        </p:txBody>
+      </p:sp>
+      <p:sp>
+        <p:nvSpPr>
+          <p:cNvPr id="6" name="">
+            <a:extLst xmlns:a="http://schemas.openxmlformats.org/drawingml/2006/main">
+              <a:ext uri="{FF2B5EF4-FFF2-40B4-BE49-F238E27FC236}">
+                <a16:creationId xmlns:a16="http://schemas.microsoft.com/office/drawing/2014/main" id="{B8BF479C-DA28-44FA-BB52-CA59EF5EA726}"/>
               </a:ext>
             </a:extLst>
           </p:cNvPr>
@@ -4968,7 +4741,7 @@
                 <a:ea typeface="Arial"/>
                 <a:cs typeface="Arial"/>
               </a:rPr>
-              <a:t>First-build downloads require Internet access.</a:t>
+              <a:t>Verify all 2,756,101 events before class.</a:t>
             </a:r>
           </a:p>
         </p:txBody>
@@ -4976,7 +4749,7 @@
     </p:spTree>
     <p:extLst>
       <p:ext uri="{BB962C8B-B14F-4D97-AF65-F5344CB8AC3E}">
-        <p14:creationId xmlns:p14="http://schemas.microsoft.com/office/powerpoint/2010/main" val="1373460382"/>
+        <p14:creationId xmlns:p14="http://schemas.microsoft.com/office/powerpoint/2010/main" val="357869404"/>
       </p:ext>
     </p:extLst>
   </p:cSld>
@@ -5007,7 +4780,7 @@
           <p:cNvPr id="3" name="">
             <a:extLst xmlns:a="http://schemas.openxmlformats.org/drawingml/2006/main">
               <a:ext uri="{FF2B5EF4-FFF2-40B4-BE49-F238E27FC236}">
-                <a16:creationId xmlns:a16="http://schemas.microsoft.com/office/drawing/2014/main" id="{98537624-8D2B-40BC-BD05-D8D134A143B8}"/>
+                <a16:creationId xmlns:a16="http://schemas.microsoft.com/office/drawing/2014/main" id="{83CD2076-540A-4120-98F2-F6CD0FD25535}"/>
               </a:ext>
             </a:extLst>
           </p:cNvPr>
@@ -5073,7 +4846,7 @@
           <p:cNvPr id="2" name="">
             <a:extLst xmlns:a="http://schemas.openxmlformats.org/drawingml/2006/main">
               <a:ext uri="{FF2B5EF4-FFF2-40B4-BE49-F238E27FC236}">
-                <a16:creationId xmlns:a16="http://schemas.microsoft.com/office/drawing/2014/main" id="{04803031-3DCD-43D5-9809-9D0027DAE671}"/>
+                <a16:creationId xmlns:a16="http://schemas.microsoft.com/office/drawing/2014/main" id="{B158F4EF-239A-48CA-876D-8167F55BF723}"/>
               </a:ext>
             </a:extLst>
           </p:cNvPr>
@@ -5181,7 +4954,7 @@
                           <a:ea typeface="Arial"/>
                           <a:cs typeface="Arial"/>
                         </a:rPr>
-                        <a:t>Business scenario and event contract</a:t>
+                        <a:t>Full-source business case and event contract</a:t>
                       </a:r>
                     </a:p>
                   </a:txBody>
@@ -5231,7 +5004,7 @@
                           <a:ea typeface="Arial"/>
                           <a:cs typeface="Arial"/>
                         </a:rPr>
-                        <a:t>Kafka topic and two partitions</a:t>
+                        <a:t>Kafka partitions and full producer receipt</a:t>
                       </a:r>
                     </a:p>
                   </a:txBody>
@@ -5281,7 +5054,7 @@
                           <a:ea typeface="Arial"/>
                           <a:cs typeface="Arial"/>
                         </a:rPr>
-                        <a:t>CSV producer, Kafka JSON and Spark logs</a:t>
+                        <a:t>Full replay verification and PySpark logs</a:t>
                       </a:r>
                     </a:p>
                   </a:txBody>
@@ -5331,7 +5104,7 @@
                           <a:ea typeface="Arial"/>
                           <a:cs typeface="Arial"/>
                         </a:rPr>
-                        <a:t>Cart recommendations and purchase retraction</a:t>
+                        <a:t>Genuine cart trace and purchase retraction</a:t>
                       </a:r>
                     </a:p>
                   </a:txBody>
@@ -5381,7 +5154,7 @@
                           <a:ea typeface="Arial"/>
                           <a:cs typeface="Arial"/>
                         </a:rPr>
-                        <a:t>Watermark checks, Parquet and checkpoints</a:t>
+                        <a:t>Parquet, watermark metrics and checkpoints</a:t>
                       </a:r>
                     </a:p>
                   </a:txBody>
@@ -5449,7 +5222,7 @@
     </p:spTree>
     <p:extLst>
       <p:ext uri="{BB962C8B-B14F-4D97-AF65-F5344CB8AC3E}">
-        <p14:creationId xmlns:p14="http://schemas.microsoft.com/office/powerpoint/2010/main" val="1376646617"/>
+        <p14:creationId xmlns:p14="http://schemas.microsoft.com/office/powerpoint/2010/main" val="178760619"/>
       </p:ext>
     </p:extLst>
   </p:cSld>
@@ -5480,7 +5253,7 @@
           <p:cNvPr id="4" name="">
             <a:extLst xmlns:a="http://schemas.openxmlformats.org/drawingml/2006/main">
               <a:ext uri="{FF2B5EF4-FFF2-40B4-BE49-F238E27FC236}">
-                <a16:creationId xmlns:a16="http://schemas.microsoft.com/office/drawing/2014/main" id="{ECC76F39-370D-4133-BAD2-5DEDAA03FB19}"/>
+                <a16:creationId xmlns:a16="http://schemas.microsoft.com/office/drawing/2014/main" id="{3F955590-E026-4D15-B45D-D794A4B0995E}"/>
               </a:ext>
             </a:extLst>
           </p:cNvPr>
@@ -5546,7 +5319,7 @@
           <p:cNvPr id="2" name="">
             <a:extLst xmlns:a="http://schemas.openxmlformats.org/drawingml/2006/main">
               <a:ext uri="{FF2B5EF4-FFF2-40B4-BE49-F238E27FC236}">
-                <a16:creationId xmlns:a16="http://schemas.microsoft.com/office/drawing/2014/main" id="{7EDF9812-9B1A-4E53-987F-822D12D97710}"/>
+                <a16:creationId xmlns:a16="http://schemas.microsoft.com/office/drawing/2014/main" id="{8BA39C50-9C57-4F5E-B652-795DCDDF8F35}"/>
               </a:ext>
             </a:extLst>
           </p:cNvPr>
@@ -5565,7 +5338,7 @@
                 <a:gridCol w="6572250"/>
                 <a:gridCol w="4400550"/>
               </a:tblGrid>
-              <a:tr h="628650">
+              <a:tr h="449036">
                 <a:tc>
                   <a:txBody>
                     <a:bodyPr/>
@@ -5615,7 +5388,7 @@
                   </a:tcPr>
                 </a:tc>
               </a:tr>
-              <a:tr h="628650">
+              <a:tr h="449036">
                 <a:tc>
                   <a:txBody>
                     <a:bodyPr/>
@@ -5630,7 +5403,7 @@
                           <a:ea typeface="Arial"/>
                           <a:cs typeface="Arial"/>
                         </a:rPr>
-                        <a:t>Producer, validation and sorting</a:t>
+                        <a:t>Python producer, validation and sorting</a:t>
                       </a:r>
                     </a:p>
                   </a:txBody>
@@ -5654,7 +5427,7 @@
                           <a:ea typeface="Arial"/>
                           <a:cs typeface="Arial"/>
                         </a:rPr>
-                        <a:t>8 tests passed</a:t>
+                        <a:t>11 tests passed</a:t>
                       </a:r>
                     </a:p>
                   </a:txBody>
@@ -5665,7 +5438,7 @@
                   </a:tcPr>
                 </a:tc>
               </a:tr>
-              <a:tr h="628650">
+              <a:tr h="449036">
                 <a:tc>
                   <a:txBody>
                     <a:bodyPr/>
@@ -5680,7 +5453,7 @@
                           <a:ea typeface="Arial"/>
                           <a:cs typeface="Arial"/>
                         </a:rPr>
-                        <a:t>Spark parsing, scoring and recommendations</a:t>
+                        <a:t>PySpark parsing, scoring and recommendations</a:t>
                       </a:r>
                     </a:p>
                   </a:txBody>
@@ -5715,7 +5488,107 @@
                   </a:tcPr>
                 </a:tc>
               </a:tr>
-              <a:tr h="628650">
+              <a:tr h="449036">
+                <a:tc>
+                  <a:txBody>
+                    <a:bodyPr/>
+                    <a:lstStyle/>
+                    <a:p>
+                      <a:r>
+                        <a:rPr sz="1950" b="0">
+                          <a:solidFill>
+                            <a:srgbClr val="142839"/>
+                          </a:solidFill>
+                          <a:latin typeface="Arial"/>
+                          <a:ea typeface="Arial"/>
+                          <a:cs typeface="Arial"/>
+                        </a:rPr>
+                        <a:t>Completion verifier safeguards</a:t>
+                      </a:r>
+                    </a:p>
+                  </a:txBody>
+                  <a:tcPr marL="91440" marR="91440" marT="45720" marB="45720">
+                    <a:solidFill>
+                      <a:srgbClr val="FFFFFF"/>
+                    </a:solidFill>
+                  </a:tcPr>
+                </a:tc>
+                <a:tc>
+                  <a:txBody>
+                    <a:bodyPr/>
+                    <a:lstStyle/>
+                    <a:p>
+                      <a:r>
+                        <a:rPr sz="1950" b="0">
+                          <a:solidFill>
+                            <a:srgbClr val="142839"/>
+                          </a:solidFill>
+                          <a:latin typeface="Arial"/>
+                          <a:ea typeface="Arial"/>
+                          <a:cs typeface="Arial"/>
+                        </a:rPr>
+                        <a:t>5 tests passed</a:t>
+                      </a:r>
+                    </a:p>
+                  </a:txBody>
+                  <a:tcPr marL="91440" marR="91440" marT="45720" marB="45720">
+                    <a:solidFill>
+                      <a:srgbClr val="FFFFFF"/>
+                    </a:solidFill>
+                  </a:tcPr>
+                </a:tc>
+              </a:tr>
+              <a:tr h="449036">
+                <a:tc>
+                  <a:txBody>
+                    <a:bodyPr/>
+                    <a:lstStyle/>
+                    <a:p>
+                      <a:r>
+                        <a:rPr sz="1950" b="0">
+                          <a:solidFill>
+                            <a:srgbClr val="142839"/>
+                          </a:solidFill>
+                          <a:latin typeface="Arial"/>
+                          <a:ea typeface="Arial"/>
+                          <a:cs typeface="Arial"/>
+                        </a:rPr>
+                        <a:t>Complete source: 2,756,101 events</a:t>
+                      </a:r>
+                    </a:p>
+                  </a:txBody>
+                  <a:tcPr marL="91440" marR="91440" marT="45720" marB="45720">
+                    <a:solidFill>
+                      <a:srgbClr val="EDF2F4"/>
+                    </a:solidFill>
+                  </a:tcPr>
+                </a:tc>
+                <a:tc>
+                  <a:txBody>
+                    <a:bodyPr/>
+                    <a:lstStyle/>
+                    <a:p>
+                      <a:r>
+                        <a:rPr sz="1950" b="0">
+                          <a:solidFill>
+                            <a:srgbClr val="142839"/>
+                          </a:solidFill>
+                          <a:latin typeface="Arial"/>
+                          <a:ea typeface="Arial"/>
+                          <a:cs typeface="Arial"/>
+                        </a:rPr>
+                        <a:t>Validated and sorted</a:t>
+                      </a:r>
+                    </a:p>
+                  </a:txBody>
+                  <a:tcPr marL="91440" marR="91440" marT="45720" marB="45720">
+                    <a:solidFill>
+                      <a:srgbClr val="EDF2F4"/>
+                    </a:solidFill>
+                  </a:tcPr>
+                </a:tc>
+              </a:tr>
+              <a:tr h="449036">
                 <a:tc>
                   <a:txBody>
                     <a:bodyPr/>
@@ -5765,7 +5638,7 @@
                   </a:tcPr>
                 </a:tc>
               </a:tr>
-              <a:tr h="628650">
+              <a:tr h="449036">
                 <a:tc>
                   <a:txBody>
                     <a:bodyPr/>
@@ -5824,7 +5697,7 @@
           <p:cNvPr id="3" name="">
             <a:extLst xmlns:a="http://schemas.openxmlformats.org/drawingml/2006/main">
               <a:ext uri="{FF2B5EF4-FFF2-40B4-BE49-F238E27FC236}">
-                <a16:creationId xmlns:a16="http://schemas.microsoft.com/office/drawing/2014/main" id="{3C90CE03-E2EE-4152-B58E-F379524B3D9E}"/>
+                <a16:creationId xmlns:a16="http://schemas.microsoft.com/office/drawing/2014/main" id="{F44B7C52-5077-4B3B-8DA6-E0B5D91368D6}"/>
               </a:ext>
             </a:extLst>
           </p:cNvPr>
@@ -5911,7 +5784,7 @@
     </p:spTree>
     <p:extLst>
       <p:ext uri="{BB962C8B-B14F-4D97-AF65-F5344CB8AC3E}">
-        <p14:creationId xmlns:p14="http://schemas.microsoft.com/office/powerpoint/2010/main" val="1350071206"/>
+        <p14:creationId xmlns:p14="http://schemas.microsoft.com/office/powerpoint/2010/main" val="1759203053"/>
       </p:ext>
     </p:extLst>
   </p:cSld>
@@ -5939,10 +5812,10 @@
       </p:grpSpPr>
       <p:sp>
         <p:nvSpPr>
-          <p:cNvPr id="4" name="">
+          <p:cNvPr id="3" name="">
             <a:extLst xmlns:a="http://schemas.openxmlformats.org/drawingml/2006/main">
               <a:ext uri="{FF2B5EF4-FFF2-40B4-BE49-F238E27FC236}">
-                <a16:creationId xmlns:a16="http://schemas.microsoft.com/office/drawing/2014/main" id="{38206046-D31B-42E9-98DC-3941F0C8CBE5}"/>
+                <a16:creationId xmlns:a16="http://schemas.microsoft.com/office/drawing/2014/main" id="{F9FFD6FE-BC09-41FA-8BA8-C8AB42BDB046}"/>
               </a:ext>
             </a:extLst>
           </p:cNvPr>
@@ -5998,7 +5871,7 @@
                 <a:ea typeface="Arial"/>
                 <a:cs typeface="Arial"/>
               </a:rPr>
-              <a:t>Retail Rocket events and the business question</a:t>
+              <a:t>Part A: DStreams and Structured Streaming</a:t>
             </a:r>
           </a:p>
         </p:txBody>
@@ -6008,1637 +5881,7 @@
           <p:cNvPr id="2" name="">
             <a:extLst xmlns:a="http://schemas.openxmlformats.org/drawingml/2006/main">
               <a:ext uri="{FF2B5EF4-FFF2-40B4-BE49-F238E27FC236}">
-                <a16:creationId xmlns:a16="http://schemas.microsoft.com/office/drawing/2014/main" id="{322EEDFA-4F1A-48FF-8712-F453A73A66A4}"/>
-              </a:ext>
-            </a:extLst>
-          </p:cNvPr>
-          <p:cNvGraphicFramePr/>
-          <p:nvPr/>
-        </p:nvGraphicFramePr>
-        <p:xfrm>
-          <a:off xmlns:a="http://schemas.openxmlformats.org/drawingml/2006/main" x="609600" y="1714500"/>
-          <a:ext xmlns:a="http://schemas.openxmlformats.org/drawingml/2006/main" cx="10972800" cy="3619500"/>
-        </p:xfrm>
-        <a:graphic xmlns:a="http://schemas.openxmlformats.org/drawingml/2006/main">
-          <a:graphicData uri="http://schemas.openxmlformats.org/drawingml/2006/table">
-            <a:tbl>
-              <a:tblPr/>
-              <a:tblGrid>
-                <a:gridCol w="2571750"/>
-                <a:gridCol w="4286250"/>
-                <a:gridCol w="4114800"/>
-              </a:tblGrid>
-              <a:tr h="603250">
-                <a:tc>
-                  <a:txBody>
-                    <a:bodyPr/>
-                    <a:lstStyle/>
-                    <a:p>
-                      <a:r>
-                        <a:rPr sz="1875" b="1">
-                          <a:solidFill>
-                            <a:srgbClr val="FFFFFF"/>
-                          </a:solidFill>
-                          <a:latin typeface="Arial"/>
-                          <a:ea typeface="Arial"/>
-                          <a:cs typeface="Arial"/>
-                        </a:rPr>
-                        <a:t>Field</a:t>
-                      </a:r>
-                    </a:p>
-                  </a:txBody>
-                  <a:tcPr marL="91440" marR="91440" marT="45720" marB="45720">
-                    <a:solidFill>
-                      <a:srgbClr val="142839"/>
-                    </a:solidFill>
-                  </a:tcPr>
-                </a:tc>
-                <a:tc>
-                  <a:txBody>
-                    <a:bodyPr/>
-                    <a:lstStyle/>
-                    <a:p>
-                      <a:r>
-                        <a:rPr sz="1875" b="1">
-                          <a:solidFill>
-                            <a:srgbClr val="FFFFFF"/>
-                          </a:solidFill>
-                          <a:latin typeface="Arial"/>
-                          <a:ea typeface="Arial"/>
-                          <a:cs typeface="Arial"/>
-                        </a:rPr>
-                        <a:t>Representation</a:t>
-                      </a:r>
-                    </a:p>
-                  </a:txBody>
-                  <a:tcPr marL="91440" marR="91440" marT="45720" marB="45720">
-                    <a:solidFill>
-                      <a:srgbClr val="142839"/>
-                    </a:solidFill>
-                  </a:tcPr>
-                </a:tc>
-                <a:tc>
-                  <a:txBody>
-                    <a:bodyPr/>
-                    <a:lstStyle/>
-                    <a:p>
-                      <a:r>
-                        <a:rPr sz="1875" b="1">
-                          <a:solidFill>
-                            <a:srgbClr val="FFFFFF"/>
-                          </a:solidFill>
-                          <a:latin typeface="Arial"/>
-                          <a:ea typeface="Arial"/>
-                          <a:cs typeface="Arial"/>
-                        </a:rPr>
-                        <a:t>Purpose</a:t>
-                      </a:r>
-                    </a:p>
-                  </a:txBody>
-                  <a:tcPr marL="91440" marR="91440" marT="45720" marB="45720">
-                    <a:solidFill>
-                      <a:srgbClr val="142839"/>
-                    </a:solidFill>
-                  </a:tcPr>
-                </a:tc>
-              </a:tr>
-              <a:tr h="603250">
-                <a:tc>
-                  <a:txBody>
-                    <a:bodyPr/>
-                    <a:lstStyle/>
-                    <a:p>
-                      <a:r>
-                        <a:rPr sz="1875" b="0">
-                          <a:solidFill>
-                            <a:srgbClr val="142839"/>
-                          </a:solidFill>
-                          <a:latin typeface="Arial"/>
-                          <a:ea typeface="Arial"/>
-                          <a:cs typeface="Arial"/>
-                        </a:rPr>
-                        <a:t>timestamp</a:t>
-                      </a:r>
-                    </a:p>
-                  </a:txBody>
-                  <a:tcPr marL="91440" marR="91440" marT="45720" marB="45720">
-                    <a:solidFill>
-                      <a:srgbClr val="FFFFFF"/>
-                    </a:solidFill>
-                  </a:tcPr>
-                </a:tc>
-                <a:tc>
-                  <a:txBody>
-                    <a:bodyPr/>
-                    <a:lstStyle/>
-                    <a:p>
-                      <a:r>
-                        <a:rPr sz="1875" b="0">
-                          <a:solidFill>
-                            <a:srgbClr val="142839"/>
-                          </a:solidFill>
-                          <a:latin typeface="Arial"/>
-                          <a:ea typeface="Arial"/>
-                          <a:cs typeface="Arial"/>
-                        </a:rPr>
-                        <a:t>Epoch milliseconds</a:t>
-                      </a:r>
-                    </a:p>
-                  </a:txBody>
-                  <a:tcPr marL="91440" marR="91440" marT="45720" marB="45720">
-                    <a:solidFill>
-                      <a:srgbClr val="FFFFFF"/>
-                    </a:solidFill>
-                  </a:tcPr>
-                </a:tc>
-                <a:tc>
-                  <a:txBody>
-                    <a:bodyPr/>
-                    <a:lstStyle/>
-                    <a:p>
-                      <a:r>
-                        <a:rPr sz="1875" b="0">
-                          <a:solidFill>
-                            <a:srgbClr val="142839"/>
-                          </a:solidFill>
-                          <a:latin typeface="Arial"/>
-                          <a:ea typeface="Arial"/>
-                          <a:cs typeface="Arial"/>
-                        </a:rPr>
-                        <a:t>Event-time windows</a:t>
-                      </a:r>
-                    </a:p>
-                  </a:txBody>
-                  <a:tcPr marL="91440" marR="91440" marT="45720" marB="45720">
-                    <a:solidFill>
-                      <a:srgbClr val="FFFFFF"/>
-                    </a:solidFill>
-                  </a:tcPr>
-                </a:tc>
-              </a:tr>
-              <a:tr h="603250">
-                <a:tc>
-                  <a:txBody>
-                    <a:bodyPr/>
-                    <a:lstStyle/>
-                    <a:p>
-                      <a:r>
-                        <a:rPr sz="1875" b="0">
-                          <a:solidFill>
-                            <a:srgbClr val="142839"/>
-                          </a:solidFill>
-                          <a:latin typeface="Arial"/>
-                          <a:ea typeface="Arial"/>
-                          <a:cs typeface="Arial"/>
-                        </a:rPr>
-                        <a:t>visitorid</a:t>
-                      </a:r>
-                    </a:p>
-                  </a:txBody>
-                  <a:tcPr marL="91440" marR="91440" marT="45720" marB="45720">
-                    <a:solidFill>
-                      <a:srgbClr val="EDF2F4"/>
-                    </a:solidFill>
-                  </a:tcPr>
-                </a:tc>
-                <a:tc>
-                  <a:txBody>
-                    <a:bodyPr/>
-                    <a:lstStyle/>
-                    <a:p>
-                      <a:r>
-                        <a:rPr sz="1875" b="0">
-                          <a:solidFill>
-                            <a:srgbClr val="142839"/>
-                          </a:solidFill>
-                          <a:latin typeface="Arial"/>
-                          <a:ea typeface="Arial"/>
-                          <a:cs typeface="Arial"/>
-                        </a:rPr>
-                        <a:t>Integer</a:t>
-                      </a:r>
-                    </a:p>
-                  </a:txBody>
-                  <a:tcPr marL="91440" marR="91440" marT="45720" marB="45720">
-                    <a:solidFill>
-                      <a:srgbClr val="EDF2F4"/>
-                    </a:solidFill>
-                  </a:tcPr>
-                </a:tc>
-                <a:tc>
-                  <a:txBody>
-                    <a:bodyPr/>
-                    <a:lstStyle/>
-                    <a:p>
-                      <a:r>
-                        <a:rPr sz="1875" b="0">
-                          <a:solidFill>
-                            <a:srgbClr val="142839"/>
-                          </a:solidFill>
-                          <a:latin typeface="Arial"/>
-                          <a:ea typeface="Arial"/>
-                          <a:cs typeface="Arial"/>
-                        </a:rPr>
-                        <a:t>Visitor key</a:t>
-                      </a:r>
-                    </a:p>
-                  </a:txBody>
-                  <a:tcPr marL="91440" marR="91440" marT="45720" marB="45720">
-                    <a:solidFill>
-                      <a:srgbClr val="EDF2F4"/>
-                    </a:solidFill>
-                  </a:tcPr>
-                </a:tc>
-              </a:tr>
-              <a:tr h="603250">
-                <a:tc>
-                  <a:txBody>
-                    <a:bodyPr/>
-                    <a:lstStyle/>
-                    <a:p>
-                      <a:r>
-                        <a:rPr sz="1875" b="0">
-                          <a:solidFill>
-                            <a:srgbClr val="142839"/>
-                          </a:solidFill>
-                          <a:latin typeface="Arial"/>
-                          <a:ea typeface="Arial"/>
-                          <a:cs typeface="Arial"/>
-                        </a:rPr>
-                        <a:t>event</a:t>
-                      </a:r>
-                    </a:p>
-                  </a:txBody>
-                  <a:tcPr marL="91440" marR="91440" marT="45720" marB="45720">
-                    <a:solidFill>
-                      <a:srgbClr val="FFFFFF"/>
-                    </a:solidFill>
-                  </a:tcPr>
-                </a:tc>
-                <a:tc>
-                  <a:txBody>
-                    <a:bodyPr/>
-                    <a:lstStyle/>
-                    <a:p>
-                      <a:r>
-                        <a:rPr sz="1875" b="0">
-                          <a:solidFill>
-                            <a:srgbClr val="142839"/>
-                          </a:solidFill>
-                          <a:latin typeface="Arial"/>
-                          <a:ea typeface="Arial"/>
-                          <a:cs typeface="Arial"/>
-                        </a:rPr>
-                        <a:t>view / addtocart / transaction</a:t>
-                      </a:r>
-                    </a:p>
-                  </a:txBody>
-                  <a:tcPr marL="91440" marR="91440" marT="45720" marB="45720">
-                    <a:solidFill>
-                      <a:srgbClr val="FFFFFF"/>
-                    </a:solidFill>
-                  </a:tcPr>
-                </a:tc>
-                <a:tc>
-                  <a:txBody>
-                    <a:bodyPr/>
-                    <a:lstStyle/>
-                    <a:p>
-                      <a:r>
-                        <a:rPr sz="1875" b="0">
-                          <a:solidFill>
-                            <a:srgbClr val="142839"/>
-                          </a:solidFill>
-                          <a:latin typeface="Arial"/>
-                          <a:ea typeface="Arial"/>
-                          <a:cs typeface="Arial"/>
-                        </a:rPr>
-                        <a:t>Engagement weight</a:t>
-                      </a:r>
-                    </a:p>
-                  </a:txBody>
-                  <a:tcPr marL="91440" marR="91440" marT="45720" marB="45720">
-                    <a:solidFill>
-                      <a:srgbClr val="FFFFFF"/>
-                    </a:solidFill>
-                  </a:tcPr>
-                </a:tc>
-              </a:tr>
-              <a:tr h="603250">
-                <a:tc>
-                  <a:txBody>
-                    <a:bodyPr/>
-                    <a:lstStyle/>
-                    <a:p>
-                      <a:r>
-                        <a:rPr sz="1875" b="0">
-                          <a:solidFill>
-                            <a:srgbClr val="142839"/>
-                          </a:solidFill>
-                          <a:latin typeface="Arial"/>
-                          <a:ea typeface="Arial"/>
-                          <a:cs typeface="Arial"/>
-                        </a:rPr>
-                        <a:t>itemid</a:t>
-                      </a:r>
-                    </a:p>
-                  </a:txBody>
-                  <a:tcPr marL="91440" marR="91440" marT="45720" marB="45720">
-                    <a:solidFill>
-                      <a:srgbClr val="EDF2F4"/>
-                    </a:solidFill>
-                  </a:tcPr>
-                </a:tc>
-                <a:tc>
-                  <a:txBody>
-                    <a:bodyPr/>
-                    <a:lstStyle/>
-                    <a:p>
-                      <a:r>
-                        <a:rPr sz="1875" b="0">
-                          <a:solidFill>
-                            <a:srgbClr val="142839"/>
-                          </a:solidFill>
-                          <a:latin typeface="Arial"/>
-                          <a:ea typeface="Arial"/>
-                          <a:cs typeface="Arial"/>
-                        </a:rPr>
-                        <a:t>Integer</a:t>
-                      </a:r>
-                    </a:p>
-                  </a:txBody>
-                  <a:tcPr marL="91440" marR="91440" marT="45720" marB="45720">
-                    <a:solidFill>
-                      <a:srgbClr val="EDF2F4"/>
-                    </a:solidFill>
-                  </a:tcPr>
-                </a:tc>
-                <a:tc>
-                  <a:txBody>
-                    <a:bodyPr/>
-                    <a:lstStyle/>
-                    <a:p>
-                      <a:r>
-                        <a:rPr sz="1875" b="0">
-                          <a:solidFill>
-                            <a:srgbClr val="142839"/>
-                          </a:solidFill>
-                          <a:latin typeface="Arial"/>
-                          <a:ea typeface="Arial"/>
-                          <a:cs typeface="Arial"/>
-                        </a:rPr>
-                        <a:t>Product key</a:t>
-                      </a:r>
-                    </a:p>
-                  </a:txBody>
-                  <a:tcPr marL="91440" marR="91440" marT="45720" marB="45720">
-                    <a:solidFill>
-                      <a:srgbClr val="EDF2F4"/>
-                    </a:solidFill>
-                  </a:tcPr>
-                </a:tc>
-              </a:tr>
-              <a:tr h="603250">
-                <a:tc>
-                  <a:txBody>
-                    <a:bodyPr/>
-                    <a:lstStyle/>
-                    <a:p>
-                      <a:r>
-                        <a:rPr sz="1875" b="0">
-                          <a:solidFill>
-                            <a:srgbClr val="142839"/>
-                          </a:solidFill>
-                          <a:latin typeface="Arial"/>
-                          <a:ea typeface="Arial"/>
-                          <a:cs typeface="Arial"/>
-                        </a:rPr>
-                        <a:t>transactionid</a:t>
-                      </a:r>
-                    </a:p>
-                  </a:txBody>
-                  <a:tcPr marL="91440" marR="91440" marT="45720" marB="45720">
-                    <a:solidFill>
-                      <a:srgbClr val="FFFFFF"/>
-                    </a:solidFill>
-                  </a:tcPr>
-                </a:tc>
-                <a:tc>
-                  <a:txBody>
-                    <a:bodyPr/>
-                    <a:lstStyle/>
-                    <a:p>
-                      <a:r>
-                        <a:rPr sz="1875" b="0">
-                          <a:solidFill>
-                            <a:srgbClr val="142839"/>
-                          </a:solidFill>
-                          <a:latin typeface="Arial"/>
-                          <a:ea typeface="Arial"/>
-                          <a:cs typeface="Arial"/>
-                        </a:rPr>
-                        <a:t>Integer or null</a:t>
-                      </a:r>
-                    </a:p>
-                  </a:txBody>
-                  <a:tcPr marL="91440" marR="91440" marT="45720" marB="45720">
-                    <a:solidFill>
-                      <a:srgbClr val="FFFFFF"/>
-                    </a:solidFill>
-                  </a:tcPr>
-                </a:tc>
-                <a:tc>
-                  <a:txBody>
-                    <a:bodyPr/>
-                    <a:lstStyle/>
-                    <a:p>
-                      <a:r>
-                        <a:rPr sz="1875" b="0">
-                          <a:solidFill>
-                            <a:srgbClr val="142839"/>
-                          </a:solidFill>
-                          <a:latin typeface="Arial"/>
-                          <a:ea typeface="Arial"/>
-                          <a:cs typeface="Arial"/>
-                        </a:rPr>
-                        <a:t>Purchase evidence</a:t>
-                      </a:r>
-                    </a:p>
-                  </a:txBody>
-                  <a:tcPr marL="91440" marR="91440" marT="45720" marB="45720">
-                    <a:solidFill>
-                      <a:srgbClr val="FFFFFF"/>
-                    </a:solidFill>
-                  </a:tcPr>
-                </a:tc>
-              </a:tr>
-            </a:tbl>
-          </a:graphicData>
-        </a:graphic>
-      </p:graphicFrame>
-      <p:sp>
-        <p:nvSpPr>
-          <p:cNvPr id="3" name="">
-            <a:extLst xmlns:a="http://schemas.openxmlformats.org/drawingml/2006/main">
-              <a:ext uri="{FF2B5EF4-FFF2-40B4-BE49-F238E27FC236}">
-                <a16:creationId xmlns:a16="http://schemas.microsoft.com/office/drawing/2014/main" id="{F5B239DF-BAAC-4E2B-A989-DFAE031D999E}"/>
-              </a:ext>
-            </a:extLst>
-          </p:cNvPr>
-          <p:cNvSpPr>
-            <a:spLocks xmlns:a="http://schemas.openxmlformats.org/drawingml/2006/main" noGrp="1"/>
-          </p:cNvSpPr>
-          <p:nvPr/>
-        </p:nvSpPr>
-        <p:spPr>
-          <a:xfrm xmlns:a="http://schemas.openxmlformats.org/drawingml/2006/main">
-            <a:off x="666750" y="5638800"/>
-            <a:ext cx="10668000" cy="619125"/>
-          </a:xfrm>
-          <a:prstGeom xmlns:a="http://schemas.openxmlformats.org/drawingml/2006/main" prst="rect">
-            <a:avLst/>
-          </a:prstGeom>
-          <a:noFill xmlns:a="http://schemas.openxmlformats.org/drawingml/2006/main"/>
-          <a:ln xmlns:a="http://schemas.openxmlformats.org/drawingml/2006/main" w="0">
-            <a:noFill/>
-          </a:ln>
-        </p:spPr>
-        <p:txBody>
-          <a:bodyPr xmlns:a="http://schemas.openxmlformats.org/drawingml/2006/main" lIns="0" tIns="0" rIns="0" bIns="0"/>
-          <a:lstStyle xmlns:a="http://schemas.openxmlformats.org/drawingml/2006/main">
-            <a:defPPr>
-              <a:defRPr sz="2175" b="1">
-                <a:solidFill>
-                  <a:srgbClr val="176C75"/>
-                </a:solidFill>
-                <a:latin typeface="Arial"/>
-                <a:ea typeface="Arial"/>
-                <a:cs typeface="Arial"/>
-              </a:defRPr>
-            </a:defPPr>
-          </a:lstStyle>
-          <a:p xmlns:a="http://schemas.openxmlformats.org/drawingml/2006/main">
-            <a:pPr>
-              <a:defRPr sz="2175" b="1">
-                <a:solidFill>
-                  <a:srgbClr val="176C75"/>
-                </a:solidFill>
-                <a:latin typeface="Arial"/>
-                <a:ea typeface="Arial"/>
-                <a:cs typeface="Arial"/>
-              </a:defRPr>
-            </a:pPr>
-            <a:r>
-              <a:rPr sz="2175" b="1">
-                <a:solidFill>
-                  <a:srgbClr val="176C75"/>
-                </a:solidFill>
-                <a:latin typeface="Arial"/>
-                <a:ea typeface="Arial"/>
-                <a:cs typeface="Arial"/>
-              </a:rPr>
-              <a:t>A cart should change recommendations before the shopping interaction ends.</a:t>
-            </a:r>
-          </a:p>
-        </p:txBody>
-      </p:sp>
-    </p:spTree>
-    <p:extLst>
-      <p:ext uri="{BB962C8B-B14F-4D97-AF65-F5344CB8AC3E}">
-        <p14:creationId xmlns:p14="http://schemas.microsoft.com/office/powerpoint/2010/main" val="1574392227"/>
-      </p:ext>
-    </p:extLst>
-  </p:cSld>
-</p:sld>
-</file>
-
-<file path=ppt/slides/slide3.xml><?xml version="1.0" encoding="utf-8"?>
-<p:sld xmlns:p="http://schemas.openxmlformats.org/presentationml/2006/main">
-  <p:cSld>
-    <p:bg>
-      <p:bgPr>
-        <a:solidFill xmlns:a="http://schemas.openxmlformats.org/drawingml/2006/main">
-          <a:srgbClr val="FCFCFA"/>
-        </a:solidFill>
-      </p:bgPr>
-    </p:bg>
-    <p:spTree>
-      <p:nvGrpSpPr>
-        <p:cNvPr id="1" name=""/>
-        <p:cNvGrpSpPr/>
-        <p:nvPr/>
-      </p:nvGrpSpPr>
-      <p:grpSpPr>
-        <a:xfrm xmlns:a="http://schemas.openxmlformats.org/drawingml/2006/main"/>
-      </p:grpSpPr>
-      <p:sp>
-        <p:nvSpPr>
-          <p:cNvPr id="19" name="">
-            <a:extLst xmlns:a="http://schemas.openxmlformats.org/drawingml/2006/main">
-              <a:ext uri="{FF2B5EF4-FFF2-40B4-BE49-F238E27FC236}">
-                <a16:creationId xmlns:a16="http://schemas.microsoft.com/office/drawing/2014/main" id="{6A1A6530-D882-48AF-9D64-58D61E548DC4}"/>
-              </a:ext>
-            </a:extLst>
-          </p:cNvPr>
-          <p:cNvSpPr>
-            <a:spLocks xmlns:a="http://schemas.openxmlformats.org/drawingml/2006/main" noGrp="1"/>
-          </p:cNvSpPr>
-          <p:nvPr/>
-        </p:nvSpPr>
-        <p:spPr>
-          <a:xfrm xmlns:a="http://schemas.openxmlformats.org/drawingml/2006/main">
-            <a:off x="609600" y="476250"/>
-            <a:ext cx="10934700" cy="1028700"/>
-          </a:xfrm>
-          <a:prstGeom xmlns:a="http://schemas.openxmlformats.org/drawingml/2006/main" prst="rect">
-            <a:avLst/>
-          </a:prstGeom>
-          <a:noFill xmlns:a="http://schemas.openxmlformats.org/drawingml/2006/main"/>
-          <a:ln xmlns:a="http://schemas.openxmlformats.org/drawingml/2006/main" w="0">
-            <a:noFill/>
-          </a:ln>
-        </p:spPr>
-        <p:txBody>
-          <a:bodyPr xmlns:a="http://schemas.openxmlformats.org/drawingml/2006/main" lIns="0" tIns="0" rIns="0" bIns="0"/>
-          <a:lstStyle xmlns:a="http://schemas.openxmlformats.org/drawingml/2006/main">
-            <a:defPPr>
-              <a:defRPr sz="3300" b="1">
-                <a:solidFill>
-                  <a:srgbClr val="142839"/>
-                </a:solidFill>
-                <a:latin typeface="Arial"/>
-                <a:ea typeface="Arial"/>
-                <a:cs typeface="Arial"/>
-              </a:defRPr>
-            </a:defPPr>
-          </a:lstStyle>
-          <a:p xmlns:a="http://schemas.openxmlformats.org/drawingml/2006/main">
-            <a:pPr>
-              <a:defRPr sz="3300" b="1">
-                <a:solidFill>
-                  <a:srgbClr val="142839"/>
-                </a:solidFill>
-                <a:latin typeface="Arial"/>
-                <a:ea typeface="Arial"/>
-                <a:cs typeface="Arial"/>
-              </a:defRPr>
-            </a:pPr>
-            <a:r>
-              <a:rPr sz="3300" b="1">
-                <a:solidFill>
-                  <a:srgbClr val="142839"/>
-                </a:solidFill>
-                <a:latin typeface="Arial"/>
-                <a:ea typeface="Arial"/>
-                <a:cs typeface="Arial"/>
-              </a:rPr>
-              <a:t>Pipeline architecture</a:t>
-            </a:r>
-          </a:p>
-        </p:txBody>
-      </p:sp>
-      <p:sp>
-        <p:nvSpPr>
-          <p:cNvPr id="2" name="">
-            <a:extLst xmlns:a="http://schemas.openxmlformats.org/drawingml/2006/main">
-              <a:ext uri="{FF2B5EF4-FFF2-40B4-BE49-F238E27FC236}">
-                <a16:creationId xmlns:a16="http://schemas.microsoft.com/office/drawing/2014/main" id="{2B6C0985-F028-4545-951A-56414DAE8535}"/>
-              </a:ext>
-            </a:extLst>
-          </p:cNvPr>
-          <p:cNvSpPr>
-            <a:spLocks xmlns:a="http://schemas.openxmlformats.org/drawingml/2006/main" noGrp="1"/>
-          </p:cNvSpPr>
-          <p:nvPr/>
-        </p:nvSpPr>
-        <p:spPr>
-          <a:xfrm xmlns:a="http://schemas.openxmlformats.org/drawingml/2006/main">
-            <a:off x="609600" y="2095500"/>
-            <a:ext cx="2333625" cy="1123950"/>
-          </a:xfrm>
-          <a:prstGeom xmlns:a="http://schemas.openxmlformats.org/drawingml/2006/main" prst="rect">
-            <a:avLst/>
-          </a:prstGeom>
-          <a:solidFill xmlns:a="http://schemas.openxmlformats.org/drawingml/2006/main">
-            <a:srgbClr val="EDF2F4"/>
-          </a:solidFill>
-          <a:ln xmlns:a="http://schemas.openxmlformats.org/drawingml/2006/main" w="11430">
-            <a:solidFill>
-              <a:srgbClr val="8799A6"/>
-            </a:solidFill>
-          </a:ln>
-        </p:spPr>
-      </p:sp>
-      <p:sp>
-        <p:nvSpPr>
-          <p:cNvPr id="3" name="">
-            <a:extLst xmlns:a="http://schemas.openxmlformats.org/drawingml/2006/main">
-              <a:ext uri="{FF2B5EF4-FFF2-40B4-BE49-F238E27FC236}">
-                <a16:creationId xmlns:a16="http://schemas.microsoft.com/office/drawing/2014/main" id="{294A840D-A145-4C85-B69C-947FFB4CDB6C}"/>
-              </a:ext>
-            </a:extLst>
-          </p:cNvPr>
-          <p:cNvSpPr>
-            <a:spLocks xmlns:a="http://schemas.openxmlformats.org/drawingml/2006/main" noGrp="1"/>
-          </p:cNvSpPr>
-          <p:nvPr/>
-        </p:nvSpPr>
-        <p:spPr>
-          <a:xfrm xmlns:a="http://schemas.openxmlformats.org/drawingml/2006/main">
-            <a:off x="723900" y="2266950"/>
-            <a:ext cx="2105025" cy="419100"/>
-          </a:xfrm>
-          <a:prstGeom xmlns:a="http://schemas.openxmlformats.org/drawingml/2006/main" prst="rect">
-            <a:avLst/>
-          </a:prstGeom>
-          <a:noFill xmlns:a="http://schemas.openxmlformats.org/drawingml/2006/main"/>
-          <a:ln xmlns:a="http://schemas.openxmlformats.org/drawingml/2006/main" w="0">
-            <a:noFill/>
-          </a:ln>
-        </p:spPr>
-        <p:txBody>
-          <a:bodyPr xmlns:a="http://schemas.openxmlformats.org/drawingml/2006/main" lIns="0" tIns="0" rIns="0" bIns="0"/>
-          <a:lstStyle xmlns:a="http://schemas.openxmlformats.org/drawingml/2006/main">
-            <a:defPPr>
-              <a:defRPr sz="2025" b="1">
-                <a:solidFill>
-                  <a:srgbClr val="142839"/>
-                </a:solidFill>
-                <a:latin typeface="Arial"/>
-                <a:ea typeface="Arial"/>
-                <a:cs typeface="Arial"/>
-              </a:defRPr>
-            </a:defPPr>
-          </a:lstStyle>
-          <a:p xmlns:a="http://schemas.openxmlformats.org/drawingml/2006/main">
-            <a:pPr>
-              <a:defRPr sz="2025" b="1">
-                <a:solidFill>
-                  <a:srgbClr val="142839"/>
-                </a:solidFill>
-                <a:latin typeface="Arial"/>
-                <a:ea typeface="Arial"/>
-                <a:cs typeface="Arial"/>
-              </a:defRPr>
-            </a:pPr>
-            <a:r>
-              <a:rPr sz="2025" b="1">
-                <a:solidFill>
-                  <a:srgbClr val="142839"/>
-                </a:solidFill>
-                <a:latin typeface="Arial"/>
-                <a:ea typeface="Arial"/>
-                <a:cs typeface="Arial"/>
-              </a:rPr>
-              <a:t>CSV producer</a:t>
-            </a:r>
-          </a:p>
-        </p:txBody>
-      </p:sp>
-      <p:sp>
-        <p:nvSpPr>
-          <p:cNvPr id="4" name="">
-            <a:extLst xmlns:a="http://schemas.openxmlformats.org/drawingml/2006/main">
-              <a:ext uri="{FF2B5EF4-FFF2-40B4-BE49-F238E27FC236}">
-                <a16:creationId xmlns:a16="http://schemas.microsoft.com/office/drawing/2014/main" id="{D26951A0-7521-4317-84EC-15833F9B8F18}"/>
-              </a:ext>
-            </a:extLst>
-          </p:cNvPr>
-          <p:cNvSpPr>
-            <a:spLocks xmlns:a="http://schemas.openxmlformats.org/drawingml/2006/main" noGrp="1"/>
-          </p:cNvSpPr>
-          <p:nvPr/>
-        </p:nvSpPr>
-        <p:spPr>
-          <a:xfrm xmlns:a="http://schemas.openxmlformats.org/drawingml/2006/main">
-            <a:off x="723900" y="2714625"/>
-            <a:ext cx="2105025" cy="428625"/>
-          </a:xfrm>
-          <a:prstGeom xmlns:a="http://schemas.openxmlformats.org/drawingml/2006/main" prst="rect">
-            <a:avLst/>
-          </a:prstGeom>
-          <a:noFill xmlns:a="http://schemas.openxmlformats.org/drawingml/2006/main"/>
-          <a:ln xmlns:a="http://schemas.openxmlformats.org/drawingml/2006/main" w="0">
-            <a:noFill/>
-          </a:ln>
-        </p:spPr>
-        <p:txBody>
-          <a:bodyPr xmlns:a="http://schemas.openxmlformats.org/drawingml/2006/main" lIns="0" tIns="0" rIns="0" bIns="0"/>
-          <a:lstStyle xmlns:a="http://schemas.openxmlformats.org/drawingml/2006/main">
-            <a:defPPr>
-              <a:defRPr sz="1575" b="0">
-                <a:solidFill>
-                  <a:srgbClr val="42586A"/>
-                </a:solidFill>
-                <a:latin typeface="Arial"/>
-                <a:ea typeface="Arial"/>
-                <a:cs typeface="Arial"/>
-              </a:defRPr>
-            </a:defPPr>
-          </a:lstStyle>
-          <a:p xmlns:a="http://schemas.openxmlformats.org/drawingml/2006/main">
-            <a:pPr>
-              <a:defRPr sz="1575" b="0">
-                <a:solidFill>
-                  <a:srgbClr val="42586A"/>
-                </a:solidFill>
-                <a:latin typeface="Arial"/>
-                <a:ea typeface="Arial"/>
-                <a:cs typeface="Arial"/>
-              </a:defRPr>
-            </a:pPr>
-            <a:r>
-              <a:rPr sz="1575" b="0">
-                <a:solidFill>
-                  <a:srgbClr val="42586A"/>
-                </a:solidFill>
-                <a:latin typeface="Arial"/>
-                <a:ea typeface="Arial"/>
-                <a:cs typeface="Arial"/>
-              </a:rPr>
-              <a:t>Typed JSON and pacing</a:t>
-            </a:r>
-          </a:p>
-        </p:txBody>
-      </p:sp>
-      <p:sp>
-        <p:nvSpPr>
-          <p:cNvPr id="5" name="">
-            <a:extLst xmlns:a="http://schemas.openxmlformats.org/drawingml/2006/main">
-              <a:ext uri="{FF2B5EF4-FFF2-40B4-BE49-F238E27FC236}">
-                <a16:creationId xmlns:a16="http://schemas.microsoft.com/office/drawing/2014/main" id="{98C47A72-8C94-42D8-8DFE-7EA2BF853E61}"/>
-              </a:ext>
-            </a:extLst>
-          </p:cNvPr>
-          <p:cNvSpPr>
-            <a:spLocks xmlns:a="http://schemas.openxmlformats.org/drawingml/2006/main" noGrp="1"/>
-          </p:cNvSpPr>
-          <p:nvPr/>
-        </p:nvSpPr>
-        <p:spPr>
-          <a:xfrm xmlns:a="http://schemas.openxmlformats.org/drawingml/2006/main">
-            <a:off x="3028950" y="2524125"/>
-            <a:ext cx="381000" cy="238125"/>
-          </a:xfrm>
-          <a:prstGeom xmlns:a="http://schemas.openxmlformats.org/drawingml/2006/main" prst="rightArrow">
-            <a:avLst/>
-          </a:prstGeom>
-          <a:solidFill xmlns:a="http://schemas.openxmlformats.org/drawingml/2006/main">
-            <a:srgbClr val="176C75"/>
-          </a:solidFill>
-          <a:ln xmlns:a="http://schemas.openxmlformats.org/drawingml/2006/main" w="0">
-            <a:noFill/>
-          </a:ln>
-        </p:spPr>
-      </p:sp>
-      <p:sp>
-        <p:nvSpPr>
-          <p:cNvPr id="6" name="">
-            <a:extLst xmlns:a="http://schemas.openxmlformats.org/drawingml/2006/main">
-              <a:ext uri="{FF2B5EF4-FFF2-40B4-BE49-F238E27FC236}">
-                <a16:creationId xmlns:a16="http://schemas.microsoft.com/office/drawing/2014/main" id="{C44E47BE-68A7-4A10-8A23-042D1D4B3A97}"/>
-              </a:ext>
-            </a:extLst>
-          </p:cNvPr>
-          <p:cNvSpPr>
-            <a:spLocks xmlns:a="http://schemas.openxmlformats.org/drawingml/2006/main" noGrp="1"/>
-          </p:cNvSpPr>
-          <p:nvPr/>
-        </p:nvSpPr>
-        <p:spPr>
-          <a:xfrm xmlns:a="http://schemas.openxmlformats.org/drawingml/2006/main">
-            <a:off x="3505200" y="2095500"/>
-            <a:ext cx="2333625" cy="1123950"/>
-          </a:xfrm>
-          <a:prstGeom xmlns:a="http://schemas.openxmlformats.org/drawingml/2006/main" prst="rect">
-            <a:avLst/>
-          </a:prstGeom>
-          <a:solidFill xmlns:a="http://schemas.openxmlformats.org/drawingml/2006/main">
-            <a:srgbClr val="EDF2F4"/>
-          </a:solidFill>
-          <a:ln xmlns:a="http://schemas.openxmlformats.org/drawingml/2006/main" w="11430">
-            <a:solidFill>
-              <a:srgbClr val="8799A6"/>
-            </a:solidFill>
-          </a:ln>
-        </p:spPr>
-      </p:sp>
-      <p:sp>
-        <p:nvSpPr>
-          <p:cNvPr id="7" name="">
-            <a:extLst xmlns:a="http://schemas.openxmlformats.org/drawingml/2006/main">
-              <a:ext uri="{FF2B5EF4-FFF2-40B4-BE49-F238E27FC236}">
-                <a16:creationId xmlns:a16="http://schemas.microsoft.com/office/drawing/2014/main" id="{9999BA01-ED26-4159-88E1-948BAC7329C4}"/>
-              </a:ext>
-            </a:extLst>
-          </p:cNvPr>
-          <p:cNvSpPr>
-            <a:spLocks xmlns:a="http://schemas.openxmlformats.org/drawingml/2006/main" noGrp="1"/>
-          </p:cNvSpPr>
-          <p:nvPr/>
-        </p:nvSpPr>
-        <p:spPr>
-          <a:xfrm xmlns:a="http://schemas.openxmlformats.org/drawingml/2006/main">
-            <a:off x="3619500" y="2266950"/>
-            <a:ext cx="2105025" cy="419100"/>
-          </a:xfrm>
-          <a:prstGeom xmlns:a="http://schemas.openxmlformats.org/drawingml/2006/main" prst="rect">
-            <a:avLst/>
-          </a:prstGeom>
-          <a:noFill xmlns:a="http://schemas.openxmlformats.org/drawingml/2006/main"/>
-          <a:ln xmlns:a="http://schemas.openxmlformats.org/drawingml/2006/main" w="0">
-            <a:noFill/>
-          </a:ln>
-        </p:spPr>
-        <p:txBody>
-          <a:bodyPr xmlns:a="http://schemas.openxmlformats.org/drawingml/2006/main" lIns="0" tIns="0" rIns="0" bIns="0"/>
-          <a:lstStyle xmlns:a="http://schemas.openxmlformats.org/drawingml/2006/main">
-            <a:defPPr>
-              <a:defRPr sz="2025" b="1">
-                <a:solidFill>
-                  <a:srgbClr val="142839"/>
-                </a:solidFill>
-                <a:latin typeface="Arial"/>
-                <a:ea typeface="Arial"/>
-                <a:cs typeface="Arial"/>
-              </a:defRPr>
-            </a:defPPr>
-          </a:lstStyle>
-          <a:p xmlns:a="http://schemas.openxmlformats.org/drawingml/2006/main">
-            <a:pPr>
-              <a:defRPr sz="2025" b="1">
-                <a:solidFill>
-                  <a:srgbClr val="142839"/>
-                </a:solidFill>
-                <a:latin typeface="Arial"/>
-                <a:ea typeface="Arial"/>
-                <a:cs typeface="Arial"/>
-              </a:defRPr>
-            </a:pPr>
-            <a:r>
-              <a:rPr sz="2025" b="1">
-                <a:solidFill>
-                  <a:srgbClr val="142839"/>
-                </a:solidFill>
-                <a:latin typeface="Arial"/>
-                <a:ea typeface="Arial"/>
-                <a:cs typeface="Arial"/>
-              </a:rPr>
-              <a:t>Kafka KRaft</a:t>
-            </a:r>
-          </a:p>
-        </p:txBody>
-      </p:sp>
-      <p:sp>
-        <p:nvSpPr>
-          <p:cNvPr id="8" name="">
-            <a:extLst xmlns:a="http://schemas.openxmlformats.org/drawingml/2006/main">
-              <a:ext uri="{FF2B5EF4-FFF2-40B4-BE49-F238E27FC236}">
-                <a16:creationId xmlns:a16="http://schemas.microsoft.com/office/drawing/2014/main" id="{BEAFF392-6A52-4058-A6AB-529369532270}"/>
-              </a:ext>
-            </a:extLst>
-          </p:cNvPr>
-          <p:cNvSpPr>
-            <a:spLocks xmlns:a="http://schemas.openxmlformats.org/drawingml/2006/main" noGrp="1"/>
-          </p:cNvSpPr>
-          <p:nvPr/>
-        </p:nvSpPr>
-        <p:spPr>
-          <a:xfrm xmlns:a="http://schemas.openxmlformats.org/drawingml/2006/main">
-            <a:off x="3619500" y="2714625"/>
-            <a:ext cx="2105025" cy="428625"/>
-          </a:xfrm>
-          <a:prstGeom xmlns:a="http://schemas.openxmlformats.org/drawingml/2006/main" prst="rect">
-            <a:avLst/>
-          </a:prstGeom>
-          <a:noFill xmlns:a="http://schemas.openxmlformats.org/drawingml/2006/main"/>
-          <a:ln xmlns:a="http://schemas.openxmlformats.org/drawingml/2006/main" w="0">
-            <a:noFill/>
-          </a:ln>
-        </p:spPr>
-        <p:txBody>
-          <a:bodyPr xmlns:a="http://schemas.openxmlformats.org/drawingml/2006/main" lIns="0" tIns="0" rIns="0" bIns="0"/>
-          <a:lstStyle xmlns:a="http://schemas.openxmlformats.org/drawingml/2006/main">
-            <a:defPPr>
-              <a:defRPr sz="1575" b="0">
-                <a:solidFill>
-                  <a:srgbClr val="42586A"/>
-                </a:solidFill>
-                <a:latin typeface="Arial"/>
-                <a:ea typeface="Arial"/>
-                <a:cs typeface="Arial"/>
-              </a:defRPr>
-            </a:defPPr>
-          </a:lstStyle>
-          <a:p xmlns:a="http://schemas.openxmlformats.org/drawingml/2006/main">
-            <a:pPr>
-              <a:defRPr sz="1575" b="0">
-                <a:solidFill>
-                  <a:srgbClr val="42586A"/>
-                </a:solidFill>
-                <a:latin typeface="Arial"/>
-                <a:ea typeface="Arial"/>
-                <a:cs typeface="Arial"/>
-              </a:defRPr>
-            </a:pPr>
-            <a:r>
-              <a:rPr sz="1575" b="0">
-                <a:solidFill>
-                  <a:srgbClr val="42586A"/>
-                </a:solidFill>
-                <a:latin typeface="Arial"/>
-                <a:ea typeface="Arial"/>
-                <a:cs typeface="Arial"/>
-              </a:rPr>
-              <a:t>Two topic partitions</a:t>
-            </a:r>
-          </a:p>
-        </p:txBody>
-      </p:sp>
-      <p:sp>
-        <p:nvSpPr>
-          <p:cNvPr id="9" name="">
-            <a:extLst xmlns:a="http://schemas.openxmlformats.org/drawingml/2006/main">
-              <a:ext uri="{FF2B5EF4-FFF2-40B4-BE49-F238E27FC236}">
-                <a16:creationId xmlns:a16="http://schemas.microsoft.com/office/drawing/2014/main" id="{C5CFBA8B-7971-4701-B827-853F780CD3E2}"/>
-              </a:ext>
-            </a:extLst>
-          </p:cNvPr>
-          <p:cNvSpPr>
-            <a:spLocks xmlns:a="http://schemas.openxmlformats.org/drawingml/2006/main" noGrp="1"/>
-          </p:cNvSpPr>
-          <p:nvPr/>
-        </p:nvSpPr>
-        <p:spPr>
-          <a:xfrm xmlns:a="http://schemas.openxmlformats.org/drawingml/2006/main">
-            <a:off x="5924550" y="2524125"/>
-            <a:ext cx="381000" cy="238125"/>
-          </a:xfrm>
-          <a:prstGeom xmlns:a="http://schemas.openxmlformats.org/drawingml/2006/main" prst="rightArrow">
-            <a:avLst/>
-          </a:prstGeom>
-          <a:solidFill xmlns:a="http://schemas.openxmlformats.org/drawingml/2006/main">
-            <a:srgbClr val="176C75"/>
-          </a:solidFill>
-          <a:ln xmlns:a="http://schemas.openxmlformats.org/drawingml/2006/main" w="0">
-            <a:noFill/>
-          </a:ln>
-        </p:spPr>
-      </p:sp>
-      <p:sp>
-        <p:nvSpPr>
-          <p:cNvPr id="10" name="">
-            <a:extLst xmlns:a="http://schemas.openxmlformats.org/drawingml/2006/main">
-              <a:ext uri="{FF2B5EF4-FFF2-40B4-BE49-F238E27FC236}">
-                <a16:creationId xmlns:a16="http://schemas.microsoft.com/office/drawing/2014/main" id="{6A46CB96-37B0-4A8E-8906-F41604868CB9}"/>
-              </a:ext>
-            </a:extLst>
-          </p:cNvPr>
-          <p:cNvSpPr>
-            <a:spLocks xmlns:a="http://schemas.openxmlformats.org/drawingml/2006/main" noGrp="1"/>
-          </p:cNvSpPr>
-          <p:nvPr/>
-        </p:nvSpPr>
-        <p:spPr>
-          <a:xfrm xmlns:a="http://schemas.openxmlformats.org/drawingml/2006/main">
-            <a:off x="6400800" y="2095500"/>
-            <a:ext cx="2333625" cy="1123950"/>
-          </a:xfrm>
-          <a:prstGeom xmlns:a="http://schemas.openxmlformats.org/drawingml/2006/main" prst="rect">
-            <a:avLst/>
-          </a:prstGeom>
-          <a:solidFill xmlns:a="http://schemas.openxmlformats.org/drawingml/2006/main">
-            <a:srgbClr val="EDF2F4"/>
-          </a:solidFill>
-          <a:ln xmlns:a="http://schemas.openxmlformats.org/drawingml/2006/main" w="11430">
-            <a:solidFill>
-              <a:srgbClr val="8799A6"/>
-            </a:solidFill>
-          </a:ln>
-        </p:spPr>
-      </p:sp>
-      <p:sp>
-        <p:nvSpPr>
-          <p:cNvPr id="11" name="">
-            <a:extLst xmlns:a="http://schemas.openxmlformats.org/drawingml/2006/main">
-              <a:ext uri="{FF2B5EF4-FFF2-40B4-BE49-F238E27FC236}">
-                <a16:creationId xmlns:a16="http://schemas.microsoft.com/office/drawing/2014/main" id="{BEE03661-C0CF-4AF2-9042-0BD1C13C66B9}"/>
-              </a:ext>
-            </a:extLst>
-          </p:cNvPr>
-          <p:cNvSpPr>
-            <a:spLocks xmlns:a="http://schemas.openxmlformats.org/drawingml/2006/main" noGrp="1"/>
-          </p:cNvSpPr>
-          <p:nvPr/>
-        </p:nvSpPr>
-        <p:spPr>
-          <a:xfrm xmlns:a="http://schemas.openxmlformats.org/drawingml/2006/main">
-            <a:off x="6515100" y="2266950"/>
-            <a:ext cx="2105025" cy="419100"/>
-          </a:xfrm>
-          <a:prstGeom xmlns:a="http://schemas.openxmlformats.org/drawingml/2006/main" prst="rect">
-            <a:avLst/>
-          </a:prstGeom>
-          <a:noFill xmlns:a="http://schemas.openxmlformats.org/drawingml/2006/main"/>
-          <a:ln xmlns:a="http://schemas.openxmlformats.org/drawingml/2006/main" w="0">
-            <a:noFill/>
-          </a:ln>
-        </p:spPr>
-        <p:txBody>
-          <a:bodyPr xmlns:a="http://schemas.openxmlformats.org/drawingml/2006/main" lIns="0" tIns="0" rIns="0" bIns="0"/>
-          <a:lstStyle xmlns:a="http://schemas.openxmlformats.org/drawingml/2006/main">
-            <a:defPPr>
-              <a:defRPr sz="2025" b="1">
-                <a:solidFill>
-                  <a:srgbClr val="142839"/>
-                </a:solidFill>
-                <a:latin typeface="Arial"/>
-                <a:ea typeface="Arial"/>
-                <a:cs typeface="Arial"/>
-              </a:defRPr>
-            </a:defPPr>
-          </a:lstStyle>
-          <a:p xmlns:a="http://schemas.openxmlformats.org/drawingml/2006/main">
-            <a:pPr>
-              <a:defRPr sz="2025" b="1">
-                <a:solidFill>
-                  <a:srgbClr val="142839"/>
-                </a:solidFill>
-                <a:latin typeface="Arial"/>
-                <a:ea typeface="Arial"/>
-                <a:cs typeface="Arial"/>
-              </a:defRPr>
-            </a:pPr>
-            <a:r>
-              <a:rPr sz="2025" b="1">
-                <a:solidFill>
-                  <a:srgbClr val="142839"/>
-                </a:solidFill>
-                <a:latin typeface="Arial"/>
-                <a:ea typeface="Arial"/>
-                <a:cs typeface="Arial"/>
-              </a:rPr>
-              <a:t>Spark ETL</a:t>
-            </a:r>
-          </a:p>
-        </p:txBody>
-      </p:sp>
-      <p:sp>
-        <p:nvSpPr>
-          <p:cNvPr id="12" name="">
-            <a:extLst xmlns:a="http://schemas.openxmlformats.org/drawingml/2006/main">
-              <a:ext uri="{FF2B5EF4-FFF2-40B4-BE49-F238E27FC236}">
-                <a16:creationId xmlns:a16="http://schemas.microsoft.com/office/drawing/2014/main" id="{58477A4C-78D2-4D89-A31E-3C9B6308A816}"/>
-              </a:ext>
-            </a:extLst>
-          </p:cNvPr>
-          <p:cNvSpPr>
-            <a:spLocks xmlns:a="http://schemas.openxmlformats.org/drawingml/2006/main" noGrp="1"/>
-          </p:cNvSpPr>
-          <p:nvPr/>
-        </p:nvSpPr>
-        <p:spPr>
-          <a:xfrm xmlns:a="http://schemas.openxmlformats.org/drawingml/2006/main">
-            <a:off x="6515100" y="2714625"/>
-            <a:ext cx="2105025" cy="428625"/>
-          </a:xfrm>
-          <a:prstGeom xmlns:a="http://schemas.openxmlformats.org/drawingml/2006/main" prst="rect">
-            <a:avLst/>
-          </a:prstGeom>
-          <a:noFill xmlns:a="http://schemas.openxmlformats.org/drawingml/2006/main"/>
-          <a:ln xmlns:a="http://schemas.openxmlformats.org/drawingml/2006/main" w="0">
-            <a:noFill/>
-          </a:ln>
-        </p:spPr>
-        <p:txBody>
-          <a:bodyPr xmlns:a="http://schemas.openxmlformats.org/drawingml/2006/main" lIns="0" tIns="0" rIns="0" bIns="0"/>
-          <a:lstStyle xmlns:a="http://schemas.openxmlformats.org/drawingml/2006/main">
-            <a:defPPr>
-              <a:defRPr sz="1575" b="0">
-                <a:solidFill>
-                  <a:srgbClr val="42586A"/>
-                </a:solidFill>
-                <a:latin typeface="Arial"/>
-                <a:ea typeface="Arial"/>
-                <a:cs typeface="Arial"/>
-              </a:defRPr>
-            </a:defPPr>
-          </a:lstStyle>
-          <a:p xmlns:a="http://schemas.openxmlformats.org/drawingml/2006/main">
-            <a:pPr>
-              <a:defRPr sz="1575" b="0">
-                <a:solidFill>
-                  <a:srgbClr val="42586A"/>
-                </a:solidFill>
-                <a:latin typeface="Arial"/>
-                <a:ea typeface="Arial"/>
-                <a:cs typeface="Arial"/>
-              </a:defRPr>
-            </a:pPr>
-            <a:r>
-              <a:rPr sz="1575" b="0">
-                <a:solidFill>
-                  <a:srgbClr val="42586A"/>
-                </a:solidFill>
-                <a:latin typeface="Arial"/>
-                <a:ea typeface="Arial"/>
-                <a:cs typeface="Arial"/>
-              </a:rPr>
-              <a:t>Schema and event time</a:t>
-            </a:r>
-          </a:p>
-        </p:txBody>
-      </p:sp>
-      <p:sp>
-        <p:nvSpPr>
-          <p:cNvPr id="13" name="">
-            <a:extLst xmlns:a="http://schemas.openxmlformats.org/drawingml/2006/main">
-              <a:ext uri="{FF2B5EF4-FFF2-40B4-BE49-F238E27FC236}">
-                <a16:creationId xmlns:a16="http://schemas.microsoft.com/office/drawing/2014/main" id="{2A9556D7-E34F-4690-AE9B-589A05FBC7ED}"/>
-              </a:ext>
-            </a:extLst>
-          </p:cNvPr>
-          <p:cNvSpPr>
-            <a:spLocks xmlns:a="http://schemas.openxmlformats.org/drawingml/2006/main" noGrp="1"/>
-          </p:cNvSpPr>
-          <p:nvPr/>
-        </p:nvSpPr>
-        <p:spPr>
-          <a:xfrm xmlns:a="http://schemas.openxmlformats.org/drawingml/2006/main">
-            <a:off x="8820150" y="2524125"/>
-            <a:ext cx="381000" cy="238125"/>
-          </a:xfrm>
-          <a:prstGeom xmlns:a="http://schemas.openxmlformats.org/drawingml/2006/main" prst="rightArrow">
-            <a:avLst/>
-          </a:prstGeom>
-          <a:solidFill xmlns:a="http://schemas.openxmlformats.org/drawingml/2006/main">
-            <a:srgbClr val="176C75"/>
-          </a:solidFill>
-          <a:ln xmlns:a="http://schemas.openxmlformats.org/drawingml/2006/main" w="0">
-            <a:noFill/>
-          </a:ln>
-        </p:spPr>
-      </p:sp>
-      <p:sp>
-        <p:nvSpPr>
-          <p:cNvPr id="14" name="">
-            <a:extLst xmlns:a="http://schemas.openxmlformats.org/drawingml/2006/main">
-              <a:ext uri="{FF2B5EF4-FFF2-40B4-BE49-F238E27FC236}">
-                <a16:creationId xmlns:a16="http://schemas.microsoft.com/office/drawing/2014/main" id="{63AFEB9C-2A18-4793-9389-163C7FD87D73}"/>
-              </a:ext>
-            </a:extLst>
-          </p:cNvPr>
-          <p:cNvSpPr>
-            <a:spLocks xmlns:a="http://schemas.openxmlformats.org/drawingml/2006/main" noGrp="1"/>
-          </p:cNvSpPr>
-          <p:nvPr/>
-        </p:nvSpPr>
-        <p:spPr>
-          <a:xfrm xmlns:a="http://schemas.openxmlformats.org/drawingml/2006/main">
-            <a:off x="9296400" y="2095500"/>
-            <a:ext cx="2286000" cy="1123950"/>
-          </a:xfrm>
-          <a:prstGeom xmlns:a="http://schemas.openxmlformats.org/drawingml/2006/main" prst="rect">
-            <a:avLst/>
-          </a:prstGeom>
-          <a:solidFill xmlns:a="http://schemas.openxmlformats.org/drawingml/2006/main">
-            <a:srgbClr val="EDF2F4"/>
-          </a:solidFill>
-          <a:ln xmlns:a="http://schemas.openxmlformats.org/drawingml/2006/main" w="11430">
-            <a:solidFill>
-              <a:srgbClr val="8799A6"/>
-            </a:solidFill>
-          </a:ln>
-        </p:spPr>
-      </p:sp>
-      <p:sp>
-        <p:nvSpPr>
-          <p:cNvPr id="15" name="">
-            <a:extLst xmlns:a="http://schemas.openxmlformats.org/drawingml/2006/main">
-              <a:ext uri="{FF2B5EF4-FFF2-40B4-BE49-F238E27FC236}">
-                <a16:creationId xmlns:a16="http://schemas.microsoft.com/office/drawing/2014/main" id="{BD77813C-710D-46C5-A28A-E35B3386FFE2}"/>
-              </a:ext>
-            </a:extLst>
-          </p:cNvPr>
-          <p:cNvSpPr>
-            <a:spLocks xmlns:a="http://schemas.openxmlformats.org/drawingml/2006/main" noGrp="1"/>
-          </p:cNvSpPr>
-          <p:nvPr/>
-        </p:nvSpPr>
-        <p:spPr>
-          <a:xfrm xmlns:a="http://schemas.openxmlformats.org/drawingml/2006/main">
-            <a:off x="9410700" y="2266950"/>
-            <a:ext cx="2057400" cy="419100"/>
-          </a:xfrm>
-          <a:prstGeom xmlns:a="http://schemas.openxmlformats.org/drawingml/2006/main" prst="rect">
-            <a:avLst/>
-          </a:prstGeom>
-          <a:noFill xmlns:a="http://schemas.openxmlformats.org/drawingml/2006/main"/>
-          <a:ln xmlns:a="http://schemas.openxmlformats.org/drawingml/2006/main" w="0">
-            <a:noFill/>
-          </a:ln>
-        </p:spPr>
-        <p:txBody>
-          <a:bodyPr xmlns:a="http://schemas.openxmlformats.org/drawingml/2006/main" lIns="0" tIns="0" rIns="0" bIns="0"/>
-          <a:lstStyle xmlns:a="http://schemas.openxmlformats.org/drawingml/2006/main">
-            <a:defPPr>
-              <a:defRPr sz="2025" b="1">
-                <a:solidFill>
-                  <a:srgbClr val="142839"/>
-                </a:solidFill>
-                <a:latin typeface="Arial"/>
-                <a:ea typeface="Arial"/>
-                <a:cs typeface="Arial"/>
-              </a:defRPr>
-            </a:defPPr>
-          </a:lstStyle>
-          <a:p xmlns:a="http://schemas.openxmlformats.org/drawingml/2006/main">
-            <a:pPr>
-              <a:defRPr sz="2025" b="1">
-                <a:solidFill>
-                  <a:srgbClr val="142839"/>
-                </a:solidFill>
-                <a:latin typeface="Arial"/>
-                <a:ea typeface="Arial"/>
-                <a:cs typeface="Arial"/>
-              </a:defRPr>
-            </a:pPr>
-            <a:r>
-              <a:rPr sz="2025" b="1">
-                <a:solidFill>
-                  <a:srgbClr val="142839"/>
-                </a:solidFill>
-                <a:latin typeface="Arial"/>
-                <a:ea typeface="Arial"/>
-                <a:cs typeface="Arial"/>
-              </a:rPr>
-              <a:t>Intent output</a:t>
-            </a:r>
-          </a:p>
-        </p:txBody>
-      </p:sp>
-      <p:sp>
-        <p:nvSpPr>
-          <p:cNvPr id="16" name="">
-            <a:extLst xmlns:a="http://schemas.openxmlformats.org/drawingml/2006/main">
-              <a:ext uri="{FF2B5EF4-FFF2-40B4-BE49-F238E27FC236}">
-                <a16:creationId xmlns:a16="http://schemas.microsoft.com/office/drawing/2014/main" id="{4A0E4BD6-6E9C-4744-B10C-91ABB5F00884}"/>
-              </a:ext>
-            </a:extLst>
-          </p:cNvPr>
-          <p:cNvSpPr>
-            <a:spLocks xmlns:a="http://schemas.openxmlformats.org/drawingml/2006/main" noGrp="1"/>
-          </p:cNvSpPr>
-          <p:nvPr/>
-        </p:nvSpPr>
-        <p:spPr>
-          <a:xfrm xmlns:a="http://schemas.openxmlformats.org/drawingml/2006/main">
-            <a:off x="9410700" y="2714625"/>
-            <a:ext cx="2057400" cy="428625"/>
-          </a:xfrm>
-          <a:prstGeom xmlns:a="http://schemas.openxmlformats.org/drawingml/2006/main" prst="rect">
-            <a:avLst/>
-          </a:prstGeom>
-          <a:noFill xmlns:a="http://schemas.openxmlformats.org/drawingml/2006/main"/>
-          <a:ln xmlns:a="http://schemas.openxmlformats.org/drawingml/2006/main" w="0">
-            <a:noFill/>
-          </a:ln>
-        </p:spPr>
-        <p:txBody>
-          <a:bodyPr xmlns:a="http://schemas.openxmlformats.org/drawingml/2006/main" lIns="0" tIns="0" rIns="0" bIns="0"/>
-          <a:lstStyle xmlns:a="http://schemas.openxmlformats.org/drawingml/2006/main">
-            <a:defPPr>
-              <a:defRPr sz="1575" b="0">
-                <a:solidFill>
-                  <a:srgbClr val="42586A"/>
-                </a:solidFill>
-                <a:latin typeface="Arial"/>
-                <a:ea typeface="Arial"/>
-                <a:cs typeface="Arial"/>
-              </a:defRPr>
-            </a:defPPr>
-          </a:lstStyle>
-          <a:p xmlns:a="http://schemas.openxmlformats.org/drawingml/2006/main">
-            <a:pPr>
-              <a:defRPr sz="1575" b="0">
-                <a:solidFill>
-                  <a:srgbClr val="42586A"/>
-                </a:solidFill>
-                <a:latin typeface="Arial"/>
-                <a:ea typeface="Arial"/>
-                <a:cs typeface="Arial"/>
-              </a:defRPr>
-            </a:pPr>
-            <a:r>
-              <a:rPr sz="1575" b="0">
-                <a:solidFill>
-                  <a:srgbClr val="42586A"/>
-                </a:solidFill>
-                <a:latin typeface="Arial"/>
-                <a:ea typeface="Arial"/>
-                <a:cs typeface="Arial"/>
-              </a:rPr>
-              <a:t>Current recommendations</a:t>
-            </a:r>
-          </a:p>
-        </p:txBody>
-      </p:sp>
-      <p:sp>
-        <p:nvSpPr>
-          <p:cNvPr id="17" name="">
-            <a:extLst xmlns:a="http://schemas.openxmlformats.org/drawingml/2006/main">
-              <a:ext uri="{FF2B5EF4-FFF2-40B4-BE49-F238E27FC236}">
-                <a16:creationId xmlns:a16="http://schemas.microsoft.com/office/drawing/2014/main" id="{08B35B47-4478-4ADB-9042-F0BE843B8B7D}"/>
-              </a:ext>
-            </a:extLst>
-          </p:cNvPr>
-          <p:cNvSpPr>
-            <a:spLocks xmlns:a="http://schemas.openxmlformats.org/drawingml/2006/main" noGrp="1"/>
-          </p:cNvSpPr>
-          <p:nvPr/>
-        </p:nvSpPr>
-        <p:spPr>
-          <a:xfrm xmlns:a="http://schemas.openxmlformats.org/drawingml/2006/main">
-            <a:off x="704850" y="3829050"/>
-            <a:ext cx="10668000" cy="619125"/>
-          </a:xfrm>
-          <a:prstGeom xmlns:a="http://schemas.openxmlformats.org/drawingml/2006/main" prst="rect">
-            <a:avLst/>
-          </a:prstGeom>
-          <a:noFill xmlns:a="http://schemas.openxmlformats.org/drawingml/2006/main"/>
-          <a:ln xmlns:a="http://schemas.openxmlformats.org/drawingml/2006/main" w="0">
-            <a:noFill/>
-          </a:ln>
-        </p:spPr>
-        <p:txBody>
-          <a:bodyPr xmlns:a="http://schemas.openxmlformats.org/drawingml/2006/main" lIns="0" tIns="0" rIns="0" bIns="0"/>
-          <a:lstStyle xmlns:a="http://schemas.openxmlformats.org/drawingml/2006/main">
-            <a:defPPr>
-              <a:defRPr sz="2325" b="1">
-                <a:solidFill>
-                  <a:srgbClr val="142839"/>
-                </a:solidFill>
-                <a:latin typeface="Arial"/>
-                <a:ea typeface="Arial"/>
-                <a:cs typeface="Arial"/>
-              </a:defRPr>
-            </a:defPPr>
-          </a:lstStyle>
-          <a:p xmlns:a="http://schemas.openxmlformats.org/drawingml/2006/main">
-            <a:pPr>
-              <a:defRPr sz="2325" b="1">
-                <a:solidFill>
-                  <a:srgbClr val="142839"/>
-                </a:solidFill>
-                <a:latin typeface="Arial"/>
-                <a:ea typeface="Arial"/>
-                <a:cs typeface="Arial"/>
-              </a:defRPr>
-            </a:pPr>
-            <a:r>
-              <a:rPr sz="2325" b="1">
-                <a:solidFill>
-                  <a:srgbClr val="142839"/>
-                </a:solidFill>
-                <a:latin typeface="Arial"/>
-                <a:ea typeface="Arial"/>
-                <a:cs typeface="Arial"/>
-              </a:rPr>
-              <a:t>10-minute windows     1-minute slide     5-minute watermark</a:t>
-            </a:r>
-          </a:p>
-        </p:txBody>
-      </p:sp>
-      <p:sp>
-        <p:nvSpPr>
-          <p:cNvPr id="18" name="">
-            <a:extLst xmlns:a="http://schemas.openxmlformats.org/drawingml/2006/main">
-              <a:ext uri="{FF2B5EF4-FFF2-40B4-BE49-F238E27FC236}">
-                <a16:creationId xmlns:a16="http://schemas.microsoft.com/office/drawing/2014/main" id="{73E5BAAB-1F73-43FF-8D87-268F3A31CFFE}"/>
-              </a:ext>
-            </a:extLst>
-          </p:cNvPr>
-          <p:cNvSpPr>
-            <a:spLocks xmlns:a="http://schemas.openxmlformats.org/drawingml/2006/main" noGrp="1"/>
-          </p:cNvSpPr>
-          <p:nvPr/>
-        </p:nvSpPr>
-        <p:spPr>
-          <a:xfrm xmlns:a="http://schemas.openxmlformats.org/drawingml/2006/main">
-            <a:off x="704850" y="4810125"/>
-            <a:ext cx="10668000" cy="1047750"/>
-          </a:xfrm>
-          <a:prstGeom xmlns:a="http://schemas.openxmlformats.org/drawingml/2006/main" prst="rect">
-            <a:avLst/>
-          </a:prstGeom>
-          <a:noFill xmlns:a="http://schemas.openxmlformats.org/drawingml/2006/main"/>
-          <a:ln xmlns:a="http://schemas.openxmlformats.org/drawingml/2006/main" w="0">
-            <a:noFill/>
-          </a:ln>
-        </p:spPr>
-        <p:txBody>
-          <a:bodyPr xmlns:a="http://schemas.openxmlformats.org/drawingml/2006/main" lIns="0" tIns="0" rIns="0" bIns="0"/>
-          <a:lstStyle xmlns:a="http://schemas.openxmlformats.org/drawingml/2006/main">
-            <a:defPPr>
-              <a:defRPr sz="2250" b="0">
-                <a:solidFill>
-                  <a:srgbClr val="42586A"/>
-                </a:solidFill>
-                <a:latin typeface="Arial"/>
-                <a:ea typeface="Arial"/>
-                <a:cs typeface="Arial"/>
-              </a:defRPr>
-            </a:defPPr>
-          </a:lstStyle>
-          <a:p xmlns:a="http://schemas.openxmlformats.org/drawingml/2006/main">
-            <a:pPr>
-              <a:defRPr sz="2250" b="0">
-                <a:solidFill>
-                  <a:srgbClr val="42586A"/>
-                </a:solidFill>
-                <a:latin typeface="Arial"/>
-                <a:ea typeface="Arial"/>
-                <a:cs typeface="Arial"/>
-              </a:defRPr>
-            </a:pPr>
-            <a:r>
-              <a:rPr sz="2250" b="0">
-                <a:solidFill>
-                  <a:srgbClr val="42586A"/>
-                </a:solidFill>
-                <a:latin typeface="Arial"/>
-                <a:ea typeface="Arial"/>
-                <a:cs typeface="Arial"/>
-              </a:rPr>
-              <a:t>Partitioned Parquet audit and intent epochs</a:t>
-            </a:r>
-          </a:p>
-          <a:p xmlns:a="http://schemas.openxmlformats.org/drawingml/2006/main">
-            <a:pPr>
-              <a:defRPr sz="2250" b="0">
-                <a:solidFill>
-                  <a:srgbClr val="42586A"/>
-                </a:solidFill>
-                <a:latin typeface="Arial"/>
-                <a:ea typeface="Arial"/>
-                <a:cs typeface="Arial"/>
-              </a:defRPr>
-            </a:pPr>
-            <a:r>
-              <a:rPr sz="2250" b="0">
-                <a:solidFill>
-                  <a:srgbClr val="42586A"/>
-                </a:solidFill>
-                <a:latin typeface="Arial"/>
-                <a:ea typeface="Arial"/>
-                <a:cs typeface="Arial"/>
-              </a:rPr>
-              <a:t>Independent checkpoints and structured batch logs</a:t>
-            </a:r>
-          </a:p>
-        </p:txBody>
-      </p:sp>
-    </p:spTree>
-    <p:extLst>
-      <p:ext uri="{BB962C8B-B14F-4D97-AF65-F5344CB8AC3E}">
-        <p14:creationId xmlns:p14="http://schemas.microsoft.com/office/powerpoint/2010/main" val="1948615842"/>
-      </p:ext>
-    </p:extLst>
-  </p:cSld>
-</p:sld>
-</file>
-
-<file path=ppt/slides/slide4.xml><?xml version="1.0" encoding="utf-8"?>
-<p:sld xmlns:p="http://schemas.openxmlformats.org/presentationml/2006/main">
-  <p:cSld>
-    <p:bg>
-      <p:bgPr>
-        <a:solidFill xmlns:a="http://schemas.openxmlformats.org/drawingml/2006/main">
-          <a:srgbClr val="FCFCFA"/>
-        </a:solidFill>
-      </p:bgPr>
-    </p:bg>
-    <p:spTree>
-      <p:nvGrpSpPr>
-        <p:cNvPr id="1" name=""/>
-        <p:cNvGrpSpPr/>
-        <p:nvPr/>
-      </p:nvGrpSpPr>
-      <p:grpSpPr>
-        <a:xfrm xmlns:a="http://schemas.openxmlformats.org/drawingml/2006/main"/>
-      </p:grpSpPr>
-      <p:sp>
-        <p:nvSpPr>
-          <p:cNvPr id="3" name="">
-            <a:extLst xmlns:a="http://schemas.openxmlformats.org/drawingml/2006/main">
-              <a:ext uri="{FF2B5EF4-FFF2-40B4-BE49-F238E27FC236}">
-                <a16:creationId xmlns:a16="http://schemas.microsoft.com/office/drawing/2014/main" id="{0D926286-ACAA-4A96-A089-21ACBE4F9EA0}"/>
-              </a:ext>
-            </a:extLst>
-          </p:cNvPr>
-          <p:cNvSpPr>
-            <a:spLocks xmlns:a="http://schemas.openxmlformats.org/drawingml/2006/main" noGrp="1"/>
-          </p:cNvSpPr>
-          <p:nvPr/>
-        </p:nvSpPr>
-        <p:spPr>
-          <a:xfrm xmlns:a="http://schemas.openxmlformats.org/drawingml/2006/main">
-            <a:off x="609600" y="476250"/>
-            <a:ext cx="10934700" cy="1028700"/>
-          </a:xfrm>
-          <a:prstGeom xmlns:a="http://schemas.openxmlformats.org/drawingml/2006/main" prst="rect">
-            <a:avLst/>
-          </a:prstGeom>
-          <a:noFill xmlns:a="http://schemas.openxmlformats.org/drawingml/2006/main"/>
-          <a:ln xmlns:a="http://schemas.openxmlformats.org/drawingml/2006/main" w="0">
-            <a:noFill/>
-          </a:ln>
-        </p:spPr>
-        <p:txBody>
-          <a:bodyPr xmlns:a="http://schemas.openxmlformats.org/drawingml/2006/main" lIns="0" tIns="0" rIns="0" bIns="0"/>
-          <a:lstStyle xmlns:a="http://schemas.openxmlformats.org/drawingml/2006/main">
-            <a:defPPr>
-              <a:defRPr sz="3300" b="1">
-                <a:solidFill>
-                  <a:srgbClr val="142839"/>
-                </a:solidFill>
-                <a:latin typeface="Arial"/>
-                <a:ea typeface="Arial"/>
-                <a:cs typeface="Arial"/>
-              </a:defRPr>
-            </a:defPPr>
-          </a:lstStyle>
-          <a:p xmlns:a="http://schemas.openxmlformats.org/drawingml/2006/main">
-            <a:pPr>
-              <a:defRPr sz="3300" b="1">
-                <a:solidFill>
-                  <a:srgbClr val="142839"/>
-                </a:solidFill>
-                <a:latin typeface="Arial"/>
-                <a:ea typeface="Arial"/>
-                <a:cs typeface="Arial"/>
-              </a:defRPr>
-            </a:pPr>
-            <a:r>
-              <a:rPr sz="3300" b="1">
-                <a:solidFill>
-                  <a:srgbClr val="142839"/>
-                </a:solidFill>
-                <a:latin typeface="Arial"/>
-                <a:ea typeface="Arial"/>
-                <a:cs typeface="Arial"/>
-              </a:rPr>
-              <a:t>DStreams and Structured Streaming</a:t>
-            </a:r>
-          </a:p>
-        </p:txBody>
-      </p:sp>
-      <p:graphicFrame>
-        <p:nvGraphicFramePr>
-          <p:cNvPr id="2" name="">
-            <a:extLst xmlns:a="http://schemas.openxmlformats.org/drawingml/2006/main">
-              <a:ext uri="{FF2B5EF4-FFF2-40B4-BE49-F238E27FC236}">
-                <a16:creationId xmlns:a16="http://schemas.microsoft.com/office/drawing/2014/main" id="{867209A8-6E53-4869-A7B5-3FCBCEAE091F}"/>
+                <a16:creationId xmlns:a16="http://schemas.microsoft.com/office/drawing/2014/main" id="{C6D89043-A5E9-44B1-A88E-04758C00F458}"/>
               </a:ext>
             </a:extLst>
           </p:cNvPr>
@@ -8109,7 +6352,814 @@
     </p:spTree>
     <p:extLst>
       <p:ext uri="{BB962C8B-B14F-4D97-AF65-F5344CB8AC3E}">
-        <p14:creationId xmlns:p14="http://schemas.microsoft.com/office/powerpoint/2010/main" val="1123906517"/>
+        <p14:creationId xmlns:p14="http://schemas.microsoft.com/office/powerpoint/2010/main" val="1802768775"/>
+      </p:ext>
+    </p:extLst>
+  </p:cSld>
+</p:sld>
+</file>
+
+<file path=ppt/slides/slide3.xml><?xml version="1.0" encoding="utf-8"?>
+<p:sld xmlns:p="http://schemas.openxmlformats.org/presentationml/2006/main">
+  <p:cSld>
+    <p:bg>
+      <p:bgPr>
+        <a:solidFill xmlns:a="http://schemas.openxmlformats.org/drawingml/2006/main">
+          <a:srgbClr val="FCFCFA"/>
+        </a:solidFill>
+      </p:bgPr>
+    </p:bg>
+    <p:spTree>
+      <p:nvGrpSpPr>
+        <p:cNvPr id="1" name=""/>
+        <p:cNvGrpSpPr/>
+        <p:nvPr/>
+      </p:nvGrpSpPr>
+      <p:grpSpPr>
+        <a:xfrm xmlns:a="http://schemas.openxmlformats.org/drawingml/2006/main"/>
+      </p:grpSpPr>
+      <p:sp>
+        <p:nvSpPr>
+          <p:cNvPr id="6" name="">
+            <a:extLst xmlns:a="http://schemas.openxmlformats.org/drawingml/2006/main">
+              <a:ext uri="{FF2B5EF4-FFF2-40B4-BE49-F238E27FC236}">
+                <a16:creationId xmlns:a16="http://schemas.microsoft.com/office/drawing/2014/main" id="{C2C42AC7-C6D9-47C1-AA22-FF4B79A49BA9}"/>
+              </a:ext>
+            </a:extLst>
+          </p:cNvPr>
+          <p:cNvSpPr>
+            <a:spLocks xmlns:a="http://schemas.openxmlformats.org/drawingml/2006/main" noGrp="1"/>
+          </p:cNvSpPr>
+          <p:nvPr/>
+        </p:nvSpPr>
+        <p:spPr>
+          <a:xfrm xmlns:a="http://schemas.openxmlformats.org/drawingml/2006/main">
+            <a:off x="609600" y="476250"/>
+            <a:ext cx="10934700" cy="1028700"/>
+          </a:xfrm>
+          <a:prstGeom xmlns:a="http://schemas.openxmlformats.org/drawingml/2006/main" prst="rect">
+            <a:avLst/>
+          </a:prstGeom>
+          <a:noFill xmlns:a="http://schemas.openxmlformats.org/drawingml/2006/main"/>
+          <a:ln xmlns:a="http://schemas.openxmlformats.org/drawingml/2006/main" w="0">
+            <a:noFill/>
+          </a:ln>
+        </p:spPr>
+        <p:txBody>
+          <a:bodyPr xmlns:a="http://schemas.openxmlformats.org/drawingml/2006/main" lIns="0" tIns="0" rIns="0" bIns="0"/>
+          <a:lstStyle xmlns:a="http://schemas.openxmlformats.org/drawingml/2006/main">
+            <a:defPPr>
+              <a:defRPr sz="3300" b="1">
+                <a:solidFill>
+                  <a:srgbClr val="142839"/>
+                </a:solidFill>
+                <a:latin typeface="Arial"/>
+                <a:ea typeface="Arial"/>
+                <a:cs typeface="Arial"/>
+              </a:defRPr>
+            </a:defPPr>
+          </a:lstStyle>
+          <a:p xmlns:a="http://schemas.openxmlformats.org/drawingml/2006/main">
+            <a:pPr>
+              <a:defRPr sz="3300" b="1">
+                <a:solidFill>
+                  <a:srgbClr val="142839"/>
+                </a:solidFill>
+                <a:latin typeface="Arial"/>
+                <a:ea typeface="Arial"/>
+                <a:cs typeface="Arial"/>
+              </a:defRPr>
+            </a:pPr>
+            <a:r>
+              <a:rPr sz="3300" b="1">
+                <a:solidFill>
+                  <a:srgbClr val="142839"/>
+                </a:solidFill>
+                <a:latin typeface="Arial"/>
+                <a:ea typeface="Arial"/>
+                <a:cs typeface="Arial"/>
+              </a:rPr>
+              <a:t>Continuous ETL and optimization research</a:t>
+            </a:r>
+          </a:p>
+        </p:txBody>
+      </p:sp>
+      <p:sp>
+        <p:nvSpPr>
+          <p:cNvPr id="2" name="">
+            <a:extLst xmlns:a="http://schemas.openxmlformats.org/drawingml/2006/main">
+              <a:ext uri="{FF2B5EF4-FFF2-40B4-BE49-F238E27FC236}">
+                <a16:creationId xmlns:a16="http://schemas.microsoft.com/office/drawing/2014/main" id="{99A3FE20-3883-4765-9090-F5E538ED358F}"/>
+              </a:ext>
+            </a:extLst>
+          </p:cNvPr>
+          <p:cNvSpPr>
+            <a:spLocks xmlns:a="http://schemas.openxmlformats.org/drawingml/2006/main" noGrp="1"/>
+          </p:cNvSpPr>
+          <p:nvPr/>
+        </p:nvSpPr>
+        <p:spPr>
+          <a:xfrm xmlns:a="http://schemas.openxmlformats.org/drawingml/2006/main">
+            <a:off x="704850" y="1809750"/>
+            <a:ext cx="10668000" cy="714375"/>
+          </a:xfrm>
+          <a:prstGeom xmlns:a="http://schemas.openxmlformats.org/drawingml/2006/main" prst="rect">
+            <a:avLst/>
+          </a:prstGeom>
+          <a:noFill xmlns:a="http://schemas.openxmlformats.org/drawingml/2006/main"/>
+          <a:ln xmlns:a="http://schemas.openxmlformats.org/drawingml/2006/main" w="0">
+            <a:noFill/>
+          </a:ln>
+        </p:spPr>
+        <p:txBody>
+          <a:bodyPr xmlns:a="http://schemas.openxmlformats.org/drawingml/2006/main" lIns="0" tIns="0" rIns="0" bIns="0"/>
+          <a:lstStyle xmlns:a="http://schemas.openxmlformats.org/drawingml/2006/main">
+            <a:defPPr>
+              <a:defRPr sz="2250" b="0">
+                <a:solidFill>
+                  <a:srgbClr val="142839"/>
+                </a:solidFill>
+                <a:latin typeface="Arial"/>
+                <a:ea typeface="Arial"/>
+                <a:cs typeface="Arial"/>
+              </a:defRPr>
+            </a:defPPr>
+          </a:lstStyle>
+          <a:p xmlns:a="http://schemas.openxmlformats.org/drawingml/2006/main">
+            <a:pPr>
+              <a:defRPr sz="2250" b="0">
+                <a:solidFill>
+                  <a:srgbClr val="142839"/>
+                </a:solidFill>
+                <a:latin typeface="Arial"/>
+                <a:ea typeface="Arial"/>
+                <a:cs typeface="Arial"/>
+              </a:defRPr>
+            </a:pPr>
+            <a:r>
+              <a:rPr sz="2250" b="0">
+                <a:solidFill>
+                  <a:srgbClr val="142839"/>
+                </a:solidFill>
+                <a:latin typeface="Arial"/>
+                <a:ea typeface="Arial"/>
+                <a:cs typeface="Arial"/>
+              </a:rPr>
+              <a:t>Extract retains the Kafka topic, partition and offset.</a:t>
+            </a:r>
+          </a:p>
+        </p:txBody>
+      </p:sp>
+      <p:sp>
+        <p:nvSpPr>
+          <p:cNvPr id="3" name="">
+            <a:extLst xmlns:a="http://schemas.openxmlformats.org/drawingml/2006/main">
+              <a:ext uri="{FF2B5EF4-FFF2-40B4-BE49-F238E27FC236}">
+                <a16:creationId xmlns:a16="http://schemas.microsoft.com/office/drawing/2014/main" id="{D427F10E-B5D6-4272-82BD-E122948C142C}"/>
+              </a:ext>
+            </a:extLst>
+          </p:cNvPr>
+          <p:cNvSpPr>
+            <a:spLocks xmlns:a="http://schemas.openxmlformats.org/drawingml/2006/main" noGrp="1"/>
+          </p:cNvSpPr>
+          <p:nvPr/>
+        </p:nvSpPr>
+        <p:spPr>
+          <a:xfrm xmlns:a="http://schemas.openxmlformats.org/drawingml/2006/main">
+            <a:off x="704850" y="2705100"/>
+            <a:ext cx="10668000" cy="714375"/>
+          </a:xfrm>
+          <a:prstGeom xmlns:a="http://schemas.openxmlformats.org/drawingml/2006/main" prst="rect">
+            <a:avLst/>
+          </a:prstGeom>
+          <a:noFill xmlns:a="http://schemas.openxmlformats.org/drawingml/2006/main"/>
+          <a:ln xmlns:a="http://schemas.openxmlformats.org/drawingml/2006/main" w="0">
+            <a:noFill/>
+          </a:ln>
+        </p:spPr>
+        <p:txBody>
+          <a:bodyPr xmlns:a="http://schemas.openxmlformats.org/drawingml/2006/main" lIns="0" tIns="0" rIns="0" bIns="0"/>
+          <a:lstStyle xmlns:a="http://schemas.openxmlformats.org/drawingml/2006/main">
+            <a:defPPr>
+              <a:defRPr sz="2250" b="0">
+                <a:solidFill>
+                  <a:srgbClr val="142839"/>
+                </a:solidFill>
+                <a:latin typeface="Arial"/>
+                <a:ea typeface="Arial"/>
+                <a:cs typeface="Arial"/>
+              </a:defRPr>
+            </a:defPPr>
+          </a:lstStyle>
+          <a:p xmlns:a="http://schemas.openxmlformats.org/drawingml/2006/main">
+            <a:pPr>
+              <a:defRPr sz="2250" b="0">
+                <a:solidFill>
+                  <a:srgbClr val="142839"/>
+                </a:solidFill>
+                <a:latin typeface="Arial"/>
+                <a:ea typeface="Arial"/>
+                <a:cs typeface="Arial"/>
+              </a:defRPr>
+            </a:pPr>
+            <a:r>
+              <a:rPr sz="2250" b="0">
+                <a:solidFill>
+                  <a:srgbClr val="142839"/>
+                </a:solidFill>
+                <a:latin typeface="Arial"/>
+                <a:ea typeface="Arial"/>
+                <a:cs typeface="Arial"/>
+              </a:rPr>
+              <a:t>Transform validates JSON and maintains visitor-item window state.</a:t>
+            </a:r>
+          </a:p>
+        </p:txBody>
+      </p:sp>
+      <p:sp>
+        <p:nvSpPr>
+          <p:cNvPr id="4" name="">
+            <a:extLst xmlns:a="http://schemas.openxmlformats.org/drawingml/2006/main">
+              <a:ext uri="{FF2B5EF4-FFF2-40B4-BE49-F238E27FC236}">
+                <a16:creationId xmlns:a16="http://schemas.microsoft.com/office/drawing/2014/main" id="{49DAAAC3-44AB-4B5E-B01F-8558201C401A}"/>
+              </a:ext>
+            </a:extLst>
+          </p:cNvPr>
+          <p:cNvSpPr>
+            <a:spLocks xmlns:a="http://schemas.openxmlformats.org/drawingml/2006/main" noGrp="1"/>
+          </p:cNvSpPr>
+          <p:nvPr/>
+        </p:nvSpPr>
+        <p:spPr>
+          <a:xfrm xmlns:a="http://schemas.openxmlformats.org/drawingml/2006/main">
+            <a:off x="704850" y="3600450"/>
+            <a:ext cx="10668000" cy="714375"/>
+          </a:xfrm>
+          <a:prstGeom xmlns:a="http://schemas.openxmlformats.org/drawingml/2006/main" prst="rect">
+            <a:avLst/>
+          </a:prstGeom>
+          <a:noFill xmlns:a="http://schemas.openxmlformats.org/drawingml/2006/main"/>
+          <a:ln xmlns:a="http://schemas.openxmlformats.org/drawingml/2006/main" w="0">
+            <a:noFill/>
+          </a:ln>
+        </p:spPr>
+        <p:txBody>
+          <a:bodyPr xmlns:a="http://schemas.openxmlformats.org/drawingml/2006/main" lIns="0" tIns="0" rIns="0" bIns="0"/>
+          <a:lstStyle xmlns:a="http://schemas.openxmlformats.org/drawingml/2006/main">
+            <a:defPPr>
+              <a:defRPr sz="2250" b="0">
+                <a:solidFill>
+                  <a:srgbClr val="142839"/>
+                </a:solidFill>
+                <a:latin typeface="Arial"/>
+                <a:ea typeface="Arial"/>
+                <a:cs typeface="Arial"/>
+              </a:defRPr>
+            </a:defPPr>
+          </a:lstStyle>
+          <a:p xmlns:a="http://schemas.openxmlformats.org/drawingml/2006/main">
+            <a:pPr>
+              <a:defRPr sz="2250" b="0">
+                <a:solidFill>
+                  <a:srgbClr val="142839"/>
+                </a:solidFill>
+                <a:latin typeface="Arial"/>
+                <a:ea typeface="Arial"/>
+                <a:cs typeface="Arial"/>
+              </a:defRPr>
+            </a:pPr>
+            <a:r>
+              <a:rPr sz="2250" b="0">
+                <a:solidFill>
+                  <a:srgbClr val="142839"/>
+                </a:solidFill>
+                <a:latin typeface="Arial"/>
+                <a:ea typeface="Arial"/>
+                <a:cs typeface="Arial"/>
+              </a:rPr>
+              <a:t>Load publishes Parquet history and current recommendation snapshots.</a:t>
+            </a:r>
+          </a:p>
+        </p:txBody>
+      </p:sp>
+      <p:sp>
+        <p:nvSpPr>
+          <p:cNvPr id="5" name="">
+            <a:extLst xmlns:a="http://schemas.openxmlformats.org/drawingml/2006/main">
+              <a:ext uri="{FF2B5EF4-FFF2-40B4-BE49-F238E27FC236}">
+                <a16:creationId xmlns:a16="http://schemas.microsoft.com/office/drawing/2014/main" id="{5E4665F1-CFAE-4074-851E-0DCA25147F20}"/>
+              </a:ext>
+            </a:extLst>
+          </p:cNvPr>
+          <p:cNvSpPr>
+            <a:spLocks xmlns:a="http://schemas.openxmlformats.org/drawingml/2006/main" noGrp="1"/>
+          </p:cNvSpPr>
+          <p:nvPr/>
+        </p:nvSpPr>
+        <p:spPr>
+          <a:xfrm xmlns:a="http://schemas.openxmlformats.org/drawingml/2006/main">
+            <a:off x="704850" y="4762500"/>
+            <a:ext cx="10668000" cy="1143000"/>
+          </a:xfrm>
+          <a:prstGeom xmlns:a="http://schemas.openxmlformats.org/drawingml/2006/main" prst="rect">
+            <a:avLst/>
+          </a:prstGeom>
+          <a:noFill xmlns:a="http://schemas.openxmlformats.org/drawingml/2006/main"/>
+          <a:ln xmlns:a="http://schemas.openxmlformats.org/drawingml/2006/main" w="0">
+            <a:noFill/>
+          </a:ln>
+        </p:spPr>
+        <p:txBody>
+          <a:bodyPr xmlns:a="http://schemas.openxmlformats.org/drawingml/2006/main" lIns="0" tIns="0" rIns="0" bIns="0"/>
+          <a:lstStyle xmlns:a="http://schemas.openxmlformats.org/drawingml/2006/main">
+            <a:defPPr>
+              <a:defRPr sz="2325" b="1">
+                <a:solidFill>
+                  <a:srgbClr val="176C75"/>
+                </a:solidFill>
+                <a:latin typeface="Arial"/>
+                <a:ea typeface="Arial"/>
+                <a:cs typeface="Arial"/>
+              </a:defRPr>
+            </a:defPPr>
+          </a:lstStyle>
+          <a:p xmlns:a="http://schemas.openxmlformats.org/drawingml/2006/main">
+            <a:pPr>
+              <a:defRPr sz="2325" b="1">
+                <a:solidFill>
+                  <a:srgbClr val="176C75"/>
+                </a:solidFill>
+                <a:latin typeface="Arial"/>
+                <a:ea typeface="Arial"/>
+                <a:cs typeface="Arial"/>
+              </a:defRPr>
+            </a:pPr>
+            <a:r>
+              <a:rPr sz="2325" b="1">
+                <a:solidFill>
+                  <a:srgbClr val="176C75"/>
+                </a:solidFill>
+                <a:latin typeface="Arial"/>
+                <a:ea typeface="Arial"/>
+                <a:cs typeface="Arial"/>
+              </a:rPr>
+              <a:t>Spark SQL research supports declarative transformations</a:t>
+            </a:r>
+          </a:p>
+          <a:p xmlns:a="http://schemas.openxmlformats.org/drawingml/2006/main">
+            <a:pPr>
+              <a:defRPr sz="2325" b="1">
+                <a:solidFill>
+                  <a:srgbClr val="176C75"/>
+                </a:solidFill>
+                <a:latin typeface="Arial"/>
+                <a:ea typeface="Arial"/>
+                <a:cs typeface="Arial"/>
+              </a:defRPr>
+            </a:pPr>
+            <a:r>
+              <a:rPr sz="2325" b="1">
+                <a:solidFill>
+                  <a:srgbClr val="176C75"/>
+                </a:solidFill>
+                <a:latin typeface="Arial"/>
+                <a:ea typeface="Arial"/>
+                <a:cs typeface="Arial"/>
+              </a:rPr>
+              <a:t>and optimizer-visible expressions without Python UDFs.</a:t>
+            </a:r>
+          </a:p>
+        </p:txBody>
+      </p:sp>
+    </p:spTree>
+    <p:extLst>
+      <p:ext uri="{BB962C8B-B14F-4D97-AF65-F5344CB8AC3E}">
+        <p14:creationId xmlns:p14="http://schemas.microsoft.com/office/powerpoint/2010/main" val="1254093010"/>
+      </p:ext>
+    </p:extLst>
+  </p:cSld>
+</p:sld>
+</file>
+
+<file path=ppt/slides/slide4.xml><?xml version="1.0" encoding="utf-8"?>
+<p:sld xmlns:p="http://schemas.openxmlformats.org/presentationml/2006/main">
+  <p:cSld>
+    <p:bg>
+      <p:bgPr>
+        <a:solidFill xmlns:a="http://schemas.openxmlformats.org/drawingml/2006/main">
+          <a:srgbClr val="FCFCFA"/>
+        </a:solidFill>
+      </p:bgPr>
+    </p:bg>
+    <p:spTree>
+      <p:nvGrpSpPr>
+        <p:cNvPr id="1" name=""/>
+        <p:cNvGrpSpPr/>
+        <p:nvPr/>
+      </p:nvGrpSpPr>
+      <p:grpSpPr>
+        <a:xfrm xmlns:a="http://schemas.openxmlformats.org/drawingml/2006/main"/>
+      </p:grpSpPr>
+      <p:sp>
+        <p:nvSpPr>
+          <p:cNvPr id="7" name="">
+            <a:extLst xmlns:a="http://schemas.openxmlformats.org/drawingml/2006/main">
+              <a:ext uri="{FF2B5EF4-FFF2-40B4-BE49-F238E27FC236}">
+                <a16:creationId xmlns:a16="http://schemas.microsoft.com/office/drawing/2014/main" id="{E89D8AD0-B8D5-470F-B8CD-7E6465EFAD9E}"/>
+              </a:ext>
+            </a:extLst>
+          </p:cNvPr>
+          <p:cNvSpPr>
+            <a:spLocks xmlns:a="http://schemas.openxmlformats.org/drawingml/2006/main" noGrp="1"/>
+          </p:cNvSpPr>
+          <p:nvPr/>
+        </p:nvSpPr>
+        <p:spPr>
+          <a:xfrm xmlns:a="http://schemas.openxmlformats.org/drawingml/2006/main">
+            <a:off x="609600" y="476250"/>
+            <a:ext cx="10934700" cy="1028700"/>
+          </a:xfrm>
+          <a:prstGeom xmlns:a="http://schemas.openxmlformats.org/drawingml/2006/main" prst="rect">
+            <a:avLst/>
+          </a:prstGeom>
+          <a:noFill xmlns:a="http://schemas.openxmlformats.org/drawingml/2006/main"/>
+          <a:ln xmlns:a="http://schemas.openxmlformats.org/drawingml/2006/main" w="0">
+            <a:noFill/>
+          </a:ln>
+        </p:spPr>
+        <p:txBody>
+          <a:bodyPr xmlns:a="http://schemas.openxmlformats.org/drawingml/2006/main" lIns="0" tIns="0" rIns="0" bIns="0"/>
+          <a:lstStyle xmlns:a="http://schemas.openxmlformats.org/drawingml/2006/main">
+            <a:defPPr>
+              <a:defRPr sz="3300" b="1">
+                <a:solidFill>
+                  <a:srgbClr val="142839"/>
+                </a:solidFill>
+                <a:latin typeface="Arial"/>
+                <a:ea typeface="Arial"/>
+                <a:cs typeface="Arial"/>
+              </a:defRPr>
+            </a:defPPr>
+          </a:lstStyle>
+          <a:p xmlns:a="http://schemas.openxmlformats.org/drawingml/2006/main">
+            <a:pPr>
+              <a:defRPr sz="3300" b="1">
+                <a:solidFill>
+                  <a:srgbClr val="142839"/>
+                </a:solidFill>
+                <a:latin typeface="Arial"/>
+                <a:ea typeface="Arial"/>
+                <a:cs typeface="Arial"/>
+              </a:defRPr>
+            </a:pPr>
+            <a:r>
+              <a:rPr sz="3300" b="1">
+                <a:solidFill>
+                  <a:srgbClr val="142839"/>
+                </a:solidFill>
+                <a:latin typeface="Arial"/>
+                <a:ea typeface="Arial"/>
+                <a:cs typeface="Arial"/>
+              </a:rPr>
+              <a:t>Real-time recommendation engines</a:t>
+            </a:r>
+          </a:p>
+        </p:txBody>
+      </p:sp>
+      <p:sp>
+        <p:nvSpPr>
+          <p:cNvPr id="2" name="">
+            <a:extLst xmlns:a="http://schemas.openxmlformats.org/drawingml/2006/main">
+              <a:ext uri="{FF2B5EF4-FFF2-40B4-BE49-F238E27FC236}">
+                <a16:creationId xmlns:a16="http://schemas.microsoft.com/office/drawing/2014/main" id="{F0B8C652-CDDF-4920-A8A3-442F4DDF3061}"/>
+              </a:ext>
+            </a:extLst>
+          </p:cNvPr>
+          <p:cNvSpPr>
+            <a:spLocks xmlns:a="http://schemas.openxmlformats.org/drawingml/2006/main" noGrp="1"/>
+          </p:cNvSpPr>
+          <p:nvPr/>
+        </p:nvSpPr>
+        <p:spPr>
+          <a:xfrm xmlns:a="http://schemas.openxmlformats.org/drawingml/2006/main">
+            <a:off x="704850" y="1714500"/>
+            <a:ext cx="10668000" cy="714375"/>
+          </a:xfrm>
+          <a:prstGeom xmlns:a="http://schemas.openxmlformats.org/drawingml/2006/main" prst="rect">
+            <a:avLst/>
+          </a:prstGeom>
+          <a:noFill xmlns:a="http://schemas.openxmlformats.org/drawingml/2006/main"/>
+          <a:ln xmlns:a="http://schemas.openxmlformats.org/drawingml/2006/main" w="0">
+            <a:noFill/>
+          </a:ln>
+        </p:spPr>
+        <p:txBody>
+          <a:bodyPr xmlns:a="http://schemas.openxmlformats.org/drawingml/2006/main" lIns="0" tIns="0" rIns="0" bIns="0"/>
+          <a:lstStyle xmlns:a="http://schemas.openxmlformats.org/drawingml/2006/main">
+            <a:defPPr>
+              <a:defRPr sz="2250" b="0">
+                <a:solidFill>
+                  <a:srgbClr val="142839"/>
+                </a:solidFill>
+                <a:latin typeface="Arial"/>
+                <a:ea typeface="Arial"/>
+                <a:cs typeface="Arial"/>
+              </a:defRPr>
+            </a:defPPr>
+          </a:lstStyle>
+          <a:p xmlns:a="http://schemas.openxmlformats.org/drawingml/2006/main">
+            <a:pPr>
+              <a:defRPr sz="2250" b="0">
+                <a:solidFill>
+                  <a:srgbClr val="142839"/>
+                </a:solidFill>
+                <a:latin typeface="Arial"/>
+                <a:ea typeface="Arial"/>
+                <a:cs typeface="Arial"/>
+              </a:defRPr>
+            </a:pPr>
+            <a:r>
+              <a:rPr sz="2250" b="0">
+                <a:solidFill>
+                  <a:srgbClr val="142839"/>
+                </a:solidFill>
+                <a:latin typeface="Arial"/>
+                <a:ea typeface="Arial"/>
+                <a:cs typeface="Arial"/>
+              </a:rPr>
+              <a:t>1   Select the strongest eligible visitor-item cart.</a:t>
+            </a:r>
+          </a:p>
+        </p:txBody>
+      </p:sp>
+      <p:sp>
+        <p:nvSpPr>
+          <p:cNvPr id="3" name="">
+            <a:extLst xmlns:a="http://schemas.openxmlformats.org/drawingml/2006/main">
+              <a:ext uri="{FF2B5EF4-FFF2-40B4-BE49-F238E27FC236}">
+                <a16:creationId xmlns:a16="http://schemas.microsoft.com/office/drawing/2014/main" id="{4DB107E6-1DB6-4BAB-B127-027833309515}"/>
+              </a:ext>
+            </a:extLst>
+          </p:cNvPr>
+          <p:cNvSpPr>
+            <a:spLocks xmlns:a="http://schemas.openxmlformats.org/drawingml/2006/main" noGrp="1"/>
+          </p:cNvSpPr>
+          <p:nvPr/>
+        </p:nvSpPr>
+        <p:spPr>
+          <a:xfrm xmlns:a="http://schemas.openxmlformats.org/drawingml/2006/main">
+            <a:off x="704850" y="2609850"/>
+            <a:ext cx="10668000" cy="714375"/>
+          </a:xfrm>
+          <a:prstGeom xmlns:a="http://schemas.openxmlformats.org/drawingml/2006/main" prst="rect">
+            <a:avLst/>
+          </a:prstGeom>
+          <a:noFill xmlns:a="http://schemas.openxmlformats.org/drawingml/2006/main"/>
+          <a:ln xmlns:a="http://schemas.openxmlformats.org/drawingml/2006/main" w="0">
+            <a:noFill/>
+          </a:ln>
+        </p:spPr>
+        <p:txBody>
+          <a:bodyPr xmlns:a="http://schemas.openxmlformats.org/drawingml/2006/main" lIns="0" tIns="0" rIns="0" bIns="0"/>
+          <a:lstStyle xmlns:a="http://schemas.openxmlformats.org/drawingml/2006/main">
+            <a:defPPr>
+              <a:defRPr sz="2250" b="0">
+                <a:solidFill>
+                  <a:srgbClr val="142839"/>
+                </a:solidFill>
+                <a:latin typeface="Arial"/>
+                <a:ea typeface="Arial"/>
+                <a:cs typeface="Arial"/>
+              </a:defRPr>
+            </a:defPPr>
+          </a:lstStyle>
+          <a:p xmlns:a="http://schemas.openxmlformats.org/drawingml/2006/main">
+            <a:pPr>
+              <a:defRPr sz="2250" b="0">
+                <a:solidFill>
+                  <a:srgbClr val="142839"/>
+                </a:solidFill>
+                <a:latin typeface="Arial"/>
+                <a:ea typeface="Arial"/>
+                <a:cs typeface="Arial"/>
+              </a:defRPr>
+            </a:pPr>
+            <a:r>
+              <a:rPr sz="2250" b="0">
+                <a:solidFill>
+                  <a:srgbClr val="142839"/>
+                </a:solidFill>
+                <a:latin typeface="Arial"/>
+                <a:ea typeface="Arial"/>
+                <a:cs typeface="Arial"/>
+              </a:rPr>
+              <a:t>2   Rank products using popularity in the current live window.</a:t>
+            </a:r>
+          </a:p>
+        </p:txBody>
+      </p:sp>
+      <p:sp>
+        <p:nvSpPr>
+          <p:cNvPr id="4" name="">
+            <a:extLst xmlns:a="http://schemas.openxmlformats.org/drawingml/2006/main">
+              <a:ext uri="{FF2B5EF4-FFF2-40B4-BE49-F238E27FC236}">
+                <a16:creationId xmlns:a16="http://schemas.microsoft.com/office/drawing/2014/main" id="{26025B80-D4DA-4A97-BFAF-0428415B9AB8}"/>
+              </a:ext>
+            </a:extLst>
+          </p:cNvPr>
+          <p:cNvSpPr>
+            <a:spLocks xmlns:a="http://schemas.openxmlformats.org/drawingml/2006/main" noGrp="1"/>
+          </p:cNvSpPr>
+          <p:nvPr/>
+        </p:nvSpPr>
+        <p:spPr>
+          <a:xfrm xmlns:a="http://schemas.openxmlformats.org/drawingml/2006/main">
+            <a:off x="704850" y="3505200"/>
+            <a:ext cx="10668000" cy="714375"/>
+          </a:xfrm>
+          <a:prstGeom xmlns:a="http://schemas.openxmlformats.org/drawingml/2006/main" prst="rect">
+            <a:avLst/>
+          </a:prstGeom>
+          <a:noFill xmlns:a="http://schemas.openxmlformats.org/drawingml/2006/main"/>
+          <a:ln xmlns:a="http://schemas.openxmlformats.org/drawingml/2006/main" w="0">
+            <a:noFill/>
+          </a:ln>
+        </p:spPr>
+        <p:txBody>
+          <a:bodyPr xmlns:a="http://schemas.openxmlformats.org/drawingml/2006/main" lIns="0" tIns="0" rIns="0" bIns="0"/>
+          <a:lstStyle xmlns:a="http://schemas.openxmlformats.org/drawingml/2006/main">
+            <a:defPPr>
+              <a:defRPr sz="2250" b="0">
+                <a:solidFill>
+                  <a:srgbClr val="142839"/>
+                </a:solidFill>
+                <a:latin typeface="Arial"/>
+                <a:ea typeface="Arial"/>
+                <a:cs typeface="Arial"/>
+              </a:defRPr>
+            </a:defPPr>
+          </a:lstStyle>
+          <a:p xmlns:a="http://schemas.openxmlformats.org/drawingml/2006/main">
+            <a:pPr>
+              <a:defRPr sz="2250" b="0">
+                <a:solidFill>
+                  <a:srgbClr val="142839"/>
+                </a:solidFill>
+                <a:latin typeface="Arial"/>
+                <a:ea typeface="Arial"/>
+                <a:cs typeface="Arial"/>
+              </a:defRPr>
+            </a:pPr>
+            <a:r>
+              <a:rPr sz="2250" b="0">
+                <a:solidFill>
+                  <a:srgbClr val="142839"/>
+                </a:solidFill>
+                <a:latin typeface="Arial"/>
+                <a:ea typeface="Arial"/>
+                <a:cs typeface="Arial"/>
+              </a:rPr>
+              <a:t>3   Exclude every product the visitor has already seen in that window.</a:t>
+            </a:r>
+          </a:p>
+        </p:txBody>
+      </p:sp>
+      <p:sp>
+        <p:nvSpPr>
+          <p:cNvPr id="5" name="">
+            <a:extLst xmlns:a="http://schemas.openxmlformats.org/drawingml/2006/main">
+              <a:ext uri="{FF2B5EF4-FFF2-40B4-BE49-F238E27FC236}">
+                <a16:creationId xmlns:a16="http://schemas.microsoft.com/office/drawing/2014/main" id="{36D9E2F3-AAE8-48A6-ADF3-1CB481DEFED1}"/>
+              </a:ext>
+            </a:extLst>
+          </p:cNvPr>
+          <p:cNvSpPr>
+            <a:spLocks xmlns:a="http://schemas.openxmlformats.org/drawingml/2006/main" noGrp="1"/>
+          </p:cNvSpPr>
+          <p:nvPr/>
+        </p:nvSpPr>
+        <p:spPr>
+          <a:xfrm xmlns:a="http://schemas.openxmlformats.org/drawingml/2006/main">
+            <a:off x="704850" y="4400550"/>
+            <a:ext cx="10668000" cy="714375"/>
+          </a:xfrm>
+          <a:prstGeom xmlns:a="http://schemas.openxmlformats.org/drawingml/2006/main" prst="rect">
+            <a:avLst/>
+          </a:prstGeom>
+          <a:noFill xmlns:a="http://schemas.openxmlformats.org/drawingml/2006/main"/>
+          <a:ln xmlns:a="http://schemas.openxmlformats.org/drawingml/2006/main" w="0">
+            <a:noFill/>
+          </a:ln>
+        </p:spPr>
+        <p:txBody>
+          <a:bodyPr xmlns:a="http://schemas.openxmlformats.org/drawingml/2006/main" lIns="0" tIns="0" rIns="0" bIns="0"/>
+          <a:lstStyle xmlns:a="http://schemas.openxmlformats.org/drawingml/2006/main">
+            <a:defPPr>
+              <a:defRPr sz="2250" b="0">
+                <a:solidFill>
+                  <a:srgbClr val="142839"/>
+                </a:solidFill>
+                <a:latin typeface="Arial"/>
+                <a:ea typeface="Arial"/>
+                <a:cs typeface="Arial"/>
+              </a:defRPr>
+            </a:defPPr>
+          </a:lstStyle>
+          <a:p xmlns:a="http://schemas.openxmlformats.org/drawingml/2006/main">
+            <a:pPr>
+              <a:defRPr sz="2250" b="0">
+                <a:solidFill>
+                  <a:srgbClr val="142839"/>
+                </a:solidFill>
+                <a:latin typeface="Arial"/>
+                <a:ea typeface="Arial"/>
+                <a:cs typeface="Arial"/>
+              </a:defRPr>
+            </a:pPr>
+            <a:r>
+              <a:rPr sz="2250" b="0">
+                <a:solidFill>
+                  <a:srgbClr val="142839"/>
+                </a:solidFill>
+                <a:latin typeface="Arial"/>
+                <a:ea typeface="Arial"/>
+                <a:cs typeface="Arial"/>
+              </a:rPr>
+              <a:t>4   Publish up to three unseen items with rank and reason.</a:t>
+            </a:r>
+          </a:p>
+        </p:txBody>
+      </p:sp>
+      <p:sp>
+        <p:nvSpPr>
+          <p:cNvPr id="6" name="">
+            <a:extLst xmlns:a="http://schemas.openxmlformats.org/drawingml/2006/main">
+              <a:ext uri="{FF2B5EF4-FFF2-40B4-BE49-F238E27FC236}">
+                <a16:creationId xmlns:a16="http://schemas.microsoft.com/office/drawing/2014/main" id="{1D27DAC3-8999-460C-BD62-41D7ACF092F8}"/>
+              </a:ext>
+            </a:extLst>
+          </p:cNvPr>
+          <p:cNvSpPr>
+            <a:spLocks xmlns:a="http://schemas.openxmlformats.org/drawingml/2006/main" noGrp="1"/>
+          </p:cNvSpPr>
+          <p:nvPr/>
+        </p:nvSpPr>
+        <p:spPr>
+          <a:xfrm xmlns:a="http://schemas.openxmlformats.org/drawingml/2006/main">
+            <a:off x="704850" y="5762625"/>
+            <a:ext cx="10668000" cy="428625"/>
+          </a:xfrm>
+          <a:prstGeom xmlns:a="http://schemas.openxmlformats.org/drawingml/2006/main" prst="rect">
+            <a:avLst/>
+          </a:prstGeom>
+          <a:noFill xmlns:a="http://schemas.openxmlformats.org/drawingml/2006/main"/>
+          <a:ln xmlns:a="http://schemas.openxmlformats.org/drawingml/2006/main" w="0">
+            <a:noFill/>
+          </a:ln>
+        </p:spPr>
+        <p:txBody>
+          <a:bodyPr xmlns:a="http://schemas.openxmlformats.org/drawingml/2006/main" lIns="0" tIns="0" rIns="0" bIns="0"/>
+          <a:lstStyle xmlns:a="http://schemas.openxmlformats.org/drawingml/2006/main">
+            <a:defPPr>
+              <a:defRPr sz="2100" b="1">
+                <a:solidFill>
+                  <a:srgbClr val="176C75"/>
+                </a:solidFill>
+                <a:latin typeface="Arial"/>
+                <a:ea typeface="Arial"/>
+                <a:cs typeface="Arial"/>
+              </a:defRPr>
+            </a:defPPr>
+          </a:lstStyle>
+          <a:p xmlns:a="http://schemas.openxmlformats.org/drawingml/2006/main">
+            <a:pPr>
+              <a:defRPr sz="2100" b="1">
+                <a:solidFill>
+                  <a:srgbClr val="176C75"/>
+                </a:solidFill>
+                <a:latin typeface="Arial"/>
+                <a:ea typeface="Arial"/>
+                <a:cs typeface="Arial"/>
+              </a:defRPr>
+            </a:pPr>
+            <a:r>
+              <a:rPr sz="2100" b="1">
+                <a:solidFill>
+                  <a:srgbClr val="176C75"/>
+                </a:solidFill>
+                <a:latin typeface="Arial"/>
+                <a:ea typeface="Arial"/>
+                <a:cs typeface="Arial"/>
+              </a:rPr>
+              <a:t>Sparse traffic may produce no unseen candidates.</a:t>
+            </a:r>
+          </a:p>
+        </p:txBody>
+      </p:sp>
+    </p:spTree>
+    <p:extLst>
+      <p:ext uri="{BB962C8B-B14F-4D97-AF65-F5344CB8AC3E}">
+        <p14:creationId xmlns:p14="http://schemas.microsoft.com/office/powerpoint/2010/main" val="57349445"/>
       </p:ext>
     </p:extLst>
   </p:cSld>
@@ -8140,7 +7190,7 @@
           <p:cNvPr id="4" name="">
             <a:extLst xmlns:a="http://schemas.openxmlformats.org/drawingml/2006/main">
               <a:ext uri="{FF2B5EF4-FFF2-40B4-BE49-F238E27FC236}">
-                <a16:creationId xmlns:a16="http://schemas.microsoft.com/office/drawing/2014/main" id="{27589026-B94E-4A1E-856C-2EB27B4F27C0}"/>
+                <a16:creationId xmlns:a16="http://schemas.microsoft.com/office/drawing/2014/main" id="{0A38A484-CC8C-4071-BB73-D9C16E1FB624}"/>
               </a:ext>
             </a:extLst>
           </p:cNvPr>
@@ -8206,7 +7256,7 @@
           <p:cNvPr id="2" name="">
             <a:extLst xmlns:a="http://schemas.openxmlformats.org/drawingml/2006/main">
               <a:ext uri="{FF2B5EF4-FFF2-40B4-BE49-F238E27FC236}">
-                <a16:creationId xmlns:a16="http://schemas.microsoft.com/office/drawing/2014/main" id="{D8A49223-16C1-4152-9E58-83262C75CD74}"/>
+                <a16:creationId xmlns:a16="http://schemas.microsoft.com/office/drawing/2014/main" id="{87BD9CF4-D392-48C7-879C-6A0B3EAE8566}"/>
               </a:ext>
             </a:extLst>
           </p:cNvPr>
@@ -8679,7 +7729,7 @@
           <p:cNvPr id="3" name="">
             <a:extLst xmlns:a="http://schemas.openxmlformats.org/drawingml/2006/main">
               <a:ext uri="{FF2B5EF4-FFF2-40B4-BE49-F238E27FC236}">
-                <a16:creationId xmlns:a16="http://schemas.microsoft.com/office/drawing/2014/main" id="{87791F5F-F62C-460F-B838-EAEFC069D42A}"/>
+                <a16:creationId xmlns:a16="http://schemas.microsoft.com/office/drawing/2014/main" id="{5D8C5624-84F5-4BBE-BDF4-2861CB1E816E}"/>
               </a:ext>
             </a:extLst>
           </p:cNvPr>
@@ -8743,7 +7793,7 @@
     </p:spTree>
     <p:extLst>
       <p:ext uri="{BB962C8B-B14F-4D97-AF65-F5344CB8AC3E}">
-        <p14:creationId xmlns:p14="http://schemas.microsoft.com/office/powerpoint/2010/main" val="1559160275"/>
+        <p14:creationId xmlns:p14="http://schemas.microsoft.com/office/powerpoint/2010/main" val="1034842088"/>
       </p:ext>
     </p:extLst>
   </p:cSld>
@@ -8771,10 +7821,10 @@
       </p:grpSpPr>
       <p:sp>
         <p:nvSpPr>
-          <p:cNvPr id="6" name="">
+          <p:cNvPr id="15" name="">
             <a:extLst xmlns:a="http://schemas.openxmlformats.org/drawingml/2006/main">
               <a:ext uri="{FF2B5EF4-FFF2-40B4-BE49-F238E27FC236}">
-                <a16:creationId xmlns:a16="http://schemas.microsoft.com/office/drawing/2014/main" id="{166C6DD7-6C47-4579-BBBA-F9CA8FE867CA}"/>
+                <a16:creationId xmlns:a16="http://schemas.microsoft.com/office/drawing/2014/main" id="{580A2040-D287-496B-9000-DE975F1D7BD0}"/>
               </a:ext>
             </a:extLst>
           </p:cNvPr>
@@ -8830,7 +7880,7 @@
                 <a:ea typeface="Arial"/>
                 <a:cs typeface="Arial"/>
               </a:rPr>
-              <a:t>Continuous ETL and optimization research</a:t>
+              <a:t>Checkpoint recovery and atomic epochs</a:t>
             </a:r>
           </a:p>
         </p:txBody>
@@ -8840,7 +7890,7 @@
           <p:cNvPr id="2" name="">
             <a:extLst xmlns:a="http://schemas.openxmlformats.org/drawingml/2006/main">
               <a:ext uri="{FF2B5EF4-FFF2-40B4-BE49-F238E27FC236}">
-                <a16:creationId xmlns:a16="http://schemas.microsoft.com/office/drawing/2014/main" id="{DF2E7CD3-1EDE-4EC4-B9DE-4387EA116A8E}"/>
+                <a16:creationId xmlns:a16="http://schemas.microsoft.com/office/drawing/2014/main" id="{D0BB4559-A564-480F-A4E6-62C25D7E852A}"/>
               </a:ext>
             </a:extLst>
           </p:cNvPr>
@@ -8851,8 +7901,40 @@
         </p:nvSpPr>
         <p:spPr>
           <a:xfrm xmlns:a="http://schemas.openxmlformats.org/drawingml/2006/main">
-            <a:off x="704850" y="1809750"/>
-            <a:ext cx="10668000" cy="714375"/>
+            <a:off x="609600" y="2047875"/>
+            <a:ext cx="2952750" cy="1123950"/>
+          </a:xfrm>
+          <a:prstGeom xmlns:a="http://schemas.openxmlformats.org/drawingml/2006/main" prst="rect">
+            <a:avLst/>
+          </a:prstGeom>
+          <a:solidFill xmlns:a="http://schemas.openxmlformats.org/drawingml/2006/main">
+            <a:srgbClr val="EDF2F4"/>
+          </a:solidFill>
+          <a:ln xmlns:a="http://schemas.openxmlformats.org/drawingml/2006/main" w="11430">
+            <a:solidFill>
+              <a:srgbClr val="8799A6"/>
+            </a:solidFill>
+          </a:ln>
+        </p:spPr>
+      </p:sp>
+      <p:sp>
+        <p:nvSpPr>
+          <p:cNvPr id="3" name="">
+            <a:extLst xmlns:a="http://schemas.openxmlformats.org/drawingml/2006/main">
+              <a:ext uri="{FF2B5EF4-FFF2-40B4-BE49-F238E27FC236}">
+                <a16:creationId xmlns:a16="http://schemas.microsoft.com/office/drawing/2014/main" id="{4BDBBEEC-3EF2-47F2-A27F-0CD0170448F4}"/>
+              </a:ext>
+            </a:extLst>
+          </p:cNvPr>
+          <p:cNvSpPr>
+            <a:spLocks xmlns:a="http://schemas.openxmlformats.org/drawingml/2006/main" noGrp="1"/>
+          </p:cNvSpPr>
+          <p:nvPr/>
+        </p:nvSpPr>
+        <p:spPr>
+          <a:xfrm xmlns:a="http://schemas.openxmlformats.org/drawingml/2006/main">
+            <a:off x="723900" y="2219325"/>
+            <a:ext cx="2724150" cy="419100"/>
           </a:xfrm>
           <a:prstGeom xmlns:a="http://schemas.openxmlformats.org/drawingml/2006/main" prst="rect">
             <a:avLst/>
@@ -8866,7 +7948,7 @@
           <a:bodyPr xmlns:a="http://schemas.openxmlformats.org/drawingml/2006/main" lIns="0" tIns="0" rIns="0" bIns="0"/>
           <a:lstStyle xmlns:a="http://schemas.openxmlformats.org/drawingml/2006/main">
             <a:defPPr>
-              <a:defRPr sz="2250" b="0">
+              <a:defRPr sz="2025" b="1">
                 <a:solidFill>
                   <a:srgbClr val="142839"/>
                 </a:solidFill>
@@ -8878,7 +7960,7 @@
           </a:lstStyle>
           <a:p xmlns:a="http://schemas.openxmlformats.org/drawingml/2006/main">
             <a:pPr>
-              <a:defRPr sz="2250" b="0">
+              <a:defRPr sz="2025" b="1">
                 <a:solidFill>
                   <a:srgbClr val="142839"/>
                 </a:solidFill>
@@ -8888,7 +7970,7 @@
               </a:defRPr>
             </a:pPr>
             <a:r>
-              <a:rPr sz="2250" b="0">
+              <a:rPr sz="2025" b="1">
                 <a:solidFill>
                   <a:srgbClr val="142839"/>
                 </a:solidFill>
@@ -8896,17 +7978,17 @@
                 <a:ea typeface="Arial"/>
                 <a:cs typeface="Arial"/>
               </a:rPr>
-              <a:t>Extract retains the Kafka topic, partition and offset.</a:t>
+              <a:t>Write staging epoch</a:t>
             </a:r>
           </a:p>
         </p:txBody>
       </p:sp>
       <p:sp>
         <p:nvSpPr>
-          <p:cNvPr id="3" name="">
+          <p:cNvPr id="4" name="">
             <a:extLst xmlns:a="http://schemas.openxmlformats.org/drawingml/2006/main">
               <a:ext uri="{FF2B5EF4-FFF2-40B4-BE49-F238E27FC236}">
-                <a16:creationId xmlns:a16="http://schemas.microsoft.com/office/drawing/2014/main" id="{7F6EECDD-53EB-4BF4-AFC8-C3C7B2DB6653}"/>
+                <a16:creationId xmlns:a16="http://schemas.microsoft.com/office/drawing/2014/main" id="{9CF81F1F-5D43-416C-8723-9F49E3A85335}"/>
               </a:ext>
             </a:extLst>
           </p:cNvPr>
@@ -8917,8 +7999,8 @@
         </p:nvSpPr>
         <p:spPr>
           <a:xfrm xmlns:a="http://schemas.openxmlformats.org/drawingml/2006/main">
-            <a:off x="704850" y="2705100"/>
-            <a:ext cx="10668000" cy="714375"/>
+            <a:off x="723900" y="2667000"/>
+            <a:ext cx="2724150" cy="428625"/>
           </a:xfrm>
           <a:prstGeom xmlns:a="http://schemas.openxmlformats.org/drawingml/2006/main" prst="rect">
             <a:avLst/>
@@ -8932,9 +8014,9 @@
           <a:bodyPr xmlns:a="http://schemas.openxmlformats.org/drawingml/2006/main" lIns="0" tIns="0" rIns="0" bIns="0"/>
           <a:lstStyle xmlns:a="http://schemas.openxmlformats.org/drawingml/2006/main">
             <a:defPPr>
-              <a:defRPr sz="2250" b="0">
-                <a:solidFill>
-                  <a:srgbClr val="142839"/>
+              <a:defRPr sz="1575" b="0">
+                <a:solidFill>
+                  <a:srgbClr val="42586A"/>
                 </a:solidFill>
                 <a:latin typeface="Arial"/>
                 <a:ea typeface="Arial"/>
@@ -8944,9 +8026,9 @@
           </a:lstStyle>
           <a:p xmlns:a="http://schemas.openxmlformats.org/drawingml/2006/main">
             <a:pPr>
-              <a:defRPr sz="2250" b="0">
-                <a:solidFill>
-                  <a:srgbClr val="142839"/>
+              <a:defRPr sz="1575" b="0">
+                <a:solidFill>
+                  <a:srgbClr val="42586A"/>
                 </a:solidFill>
                 <a:latin typeface="Arial"/>
                 <a:ea typeface="Arial"/>
@@ -8954,25 +8036,25 @@
               </a:defRPr>
             </a:pPr>
             <a:r>
-              <a:rPr sz="2250" b="0">
-                <a:solidFill>
-                  <a:srgbClr val="142839"/>
+              <a:rPr sz="1575" b="0">
+                <a:solidFill>
+                  <a:srgbClr val="42586A"/>
                 </a:solidFill>
                 <a:latin typeface="Arial"/>
                 <a:ea typeface="Arial"/>
                 <a:cs typeface="Arial"/>
               </a:rPr>
-              <a:t>Transform validates JSON and maintains visitor-item window state.</a:t>
+              <a:t>State and recommendations</a:t>
             </a:r>
           </a:p>
         </p:txBody>
       </p:sp>
       <p:sp>
         <p:nvSpPr>
-          <p:cNvPr id="4" name="">
+          <p:cNvPr id="5" name="">
             <a:extLst xmlns:a="http://schemas.openxmlformats.org/drawingml/2006/main">
               <a:ext uri="{FF2B5EF4-FFF2-40B4-BE49-F238E27FC236}">
-                <a16:creationId xmlns:a16="http://schemas.microsoft.com/office/drawing/2014/main" id="{BB55EF92-D499-4A53-B61E-58EA98ADADE7}"/>
+                <a16:creationId xmlns:a16="http://schemas.microsoft.com/office/drawing/2014/main" id="{F58B9E3F-7EEB-4B0A-B4F7-52F8C20B5E5F}"/>
               </a:ext>
             </a:extLst>
           </p:cNvPr>
@@ -8983,8 +8065,70 @@
         </p:nvSpPr>
         <p:spPr>
           <a:xfrm xmlns:a="http://schemas.openxmlformats.org/drawingml/2006/main">
-            <a:off x="704850" y="3600450"/>
-            <a:ext cx="10668000" cy="714375"/>
+            <a:off x="3686175" y="2457450"/>
+            <a:ext cx="419100" cy="238125"/>
+          </a:xfrm>
+          <a:prstGeom xmlns:a="http://schemas.openxmlformats.org/drawingml/2006/main" prst="rightArrow">
+            <a:avLst/>
+          </a:prstGeom>
+          <a:solidFill xmlns:a="http://schemas.openxmlformats.org/drawingml/2006/main">
+            <a:srgbClr val="176C75"/>
+          </a:solidFill>
+          <a:ln xmlns:a="http://schemas.openxmlformats.org/drawingml/2006/main" w="0">
+            <a:noFill/>
+          </a:ln>
+        </p:spPr>
+      </p:sp>
+      <p:sp>
+        <p:nvSpPr>
+          <p:cNvPr id="6" name="">
+            <a:extLst xmlns:a="http://schemas.openxmlformats.org/drawingml/2006/main">
+              <a:ext uri="{FF2B5EF4-FFF2-40B4-BE49-F238E27FC236}">
+                <a16:creationId xmlns:a16="http://schemas.microsoft.com/office/drawing/2014/main" id="{9A978792-B47E-420A-B02C-42B9980E16A8}"/>
+              </a:ext>
+            </a:extLst>
+          </p:cNvPr>
+          <p:cNvSpPr>
+            <a:spLocks xmlns:a="http://schemas.openxmlformats.org/drawingml/2006/main" noGrp="1"/>
+          </p:cNvSpPr>
+          <p:nvPr/>
+        </p:nvSpPr>
+        <p:spPr>
+          <a:xfrm xmlns:a="http://schemas.openxmlformats.org/drawingml/2006/main">
+            <a:off x="4286250" y="2047875"/>
+            <a:ext cx="2952750" cy="1123950"/>
+          </a:xfrm>
+          <a:prstGeom xmlns:a="http://schemas.openxmlformats.org/drawingml/2006/main" prst="rect">
+            <a:avLst/>
+          </a:prstGeom>
+          <a:solidFill xmlns:a="http://schemas.openxmlformats.org/drawingml/2006/main">
+            <a:srgbClr val="EDF2F4"/>
+          </a:solidFill>
+          <a:ln xmlns:a="http://schemas.openxmlformats.org/drawingml/2006/main" w="11430">
+            <a:solidFill>
+              <a:srgbClr val="8799A6"/>
+            </a:solidFill>
+          </a:ln>
+        </p:spPr>
+      </p:sp>
+      <p:sp>
+        <p:nvSpPr>
+          <p:cNvPr id="7" name="">
+            <a:extLst xmlns:a="http://schemas.openxmlformats.org/drawingml/2006/main">
+              <a:ext uri="{FF2B5EF4-FFF2-40B4-BE49-F238E27FC236}">
+                <a16:creationId xmlns:a16="http://schemas.microsoft.com/office/drawing/2014/main" id="{D4ABA4B0-3B3E-46D9-A359-1163EAE563BD}"/>
+              </a:ext>
+            </a:extLst>
+          </p:cNvPr>
+          <p:cNvSpPr>
+            <a:spLocks xmlns:a="http://schemas.openxmlformats.org/drawingml/2006/main" noGrp="1"/>
+          </p:cNvSpPr>
+          <p:nvPr/>
+        </p:nvSpPr>
+        <p:spPr>
+          <a:xfrm xmlns:a="http://schemas.openxmlformats.org/drawingml/2006/main">
+            <a:off x="4400550" y="2219325"/>
+            <a:ext cx="2724150" cy="419100"/>
           </a:xfrm>
           <a:prstGeom xmlns:a="http://schemas.openxmlformats.org/drawingml/2006/main" prst="rect">
             <a:avLst/>
@@ -8998,7 +8142,7 @@
           <a:bodyPr xmlns:a="http://schemas.openxmlformats.org/drawingml/2006/main" lIns="0" tIns="0" rIns="0" bIns="0"/>
           <a:lstStyle xmlns:a="http://schemas.openxmlformats.org/drawingml/2006/main">
             <a:defPPr>
-              <a:defRPr sz="2250" b="0">
+              <a:defRPr sz="2025" b="1">
                 <a:solidFill>
                   <a:srgbClr val="142839"/>
                 </a:solidFill>
@@ -9010,7 +8154,7 @@
           </a:lstStyle>
           <a:p xmlns:a="http://schemas.openxmlformats.org/drawingml/2006/main">
             <a:pPr>
-              <a:defRPr sz="2250" b="0">
+              <a:defRPr sz="2025" b="1">
                 <a:solidFill>
                   <a:srgbClr val="142839"/>
                 </a:solidFill>
@@ -9020,7 +8164,7 @@
               </a:defRPr>
             </a:pPr>
             <a:r>
-              <a:rPr sz="2250" b="0">
+              <a:rPr sz="2025" b="1">
                 <a:solidFill>
                   <a:srgbClr val="142839"/>
                 </a:solidFill>
@@ -9028,17 +8172,17 @@
                 <a:ea typeface="Arial"/>
                 <a:cs typeface="Arial"/>
               </a:rPr>
-              <a:t>Load publishes Parquet history and current recommendation snapshots.</a:t>
+              <a:t>Publish epoch</a:t>
             </a:r>
           </a:p>
         </p:txBody>
       </p:sp>
       <p:sp>
         <p:nvSpPr>
-          <p:cNvPr id="5" name="">
+          <p:cNvPr id="8" name="">
             <a:extLst xmlns:a="http://schemas.openxmlformats.org/drawingml/2006/main">
               <a:ext uri="{FF2B5EF4-FFF2-40B4-BE49-F238E27FC236}">
-                <a16:creationId xmlns:a16="http://schemas.microsoft.com/office/drawing/2014/main" id="{270B62BE-CF93-46AA-A111-986C29F182EC}"/>
+                <a16:creationId xmlns:a16="http://schemas.microsoft.com/office/drawing/2014/main" id="{3249D734-22B6-4124-AADC-80F3C6AE1140}"/>
               </a:ext>
             </a:extLst>
           </p:cNvPr>
@@ -9049,8 +8193,8 @@
         </p:nvSpPr>
         <p:spPr>
           <a:xfrm xmlns:a="http://schemas.openxmlformats.org/drawingml/2006/main">
-            <a:off x="704850" y="4762500"/>
-            <a:ext cx="10668000" cy="1143000"/>
+            <a:off x="4400550" y="2667000"/>
+            <a:ext cx="2724150" cy="428625"/>
           </a:xfrm>
           <a:prstGeom xmlns:a="http://schemas.openxmlformats.org/drawingml/2006/main" prst="rect">
             <a:avLst/>
@@ -9064,9 +8208,9 @@
           <a:bodyPr xmlns:a="http://schemas.openxmlformats.org/drawingml/2006/main" lIns="0" tIns="0" rIns="0" bIns="0"/>
           <a:lstStyle xmlns:a="http://schemas.openxmlformats.org/drawingml/2006/main">
             <a:defPPr>
-              <a:defRPr sz="2325" b="1">
-                <a:solidFill>
-                  <a:srgbClr val="176C75"/>
+              <a:defRPr sz="1575" b="0">
+                <a:solidFill>
+                  <a:srgbClr val="42586A"/>
                 </a:solidFill>
                 <a:latin typeface="Arial"/>
                 <a:ea typeface="Arial"/>
@@ -9076,9 +8220,9 @@
           </a:lstStyle>
           <a:p xmlns:a="http://schemas.openxmlformats.org/drawingml/2006/main">
             <a:pPr>
-              <a:defRPr sz="2325" b="1">
-                <a:solidFill>
-                  <a:srgbClr val="176C75"/>
+              <a:defRPr sz="1575" b="0">
+                <a:solidFill>
+                  <a:srgbClr val="42586A"/>
                 </a:solidFill>
                 <a:latin typeface="Arial"/>
                 <a:ea typeface="Arial"/>
@@ -9086,22 +8230,348 @@
               </a:defRPr>
             </a:pPr>
             <a:r>
-              <a:rPr sz="2325" b="1">
+              <a:rPr sz="1575" b="0">
+                <a:solidFill>
+                  <a:srgbClr val="42586A"/>
+                </a:solidFill>
+                <a:latin typeface="Arial"/>
+                <a:ea typeface="Arial"/>
+                <a:cs typeface="Arial"/>
+              </a:rPr>
+              <a:t>Same-filesystem rename</a:t>
+            </a:r>
+          </a:p>
+        </p:txBody>
+      </p:sp>
+      <p:sp>
+        <p:nvSpPr>
+          <p:cNvPr id="9" name="">
+            <a:extLst xmlns:a="http://schemas.openxmlformats.org/drawingml/2006/main">
+              <a:ext uri="{FF2B5EF4-FFF2-40B4-BE49-F238E27FC236}">
+                <a16:creationId xmlns:a16="http://schemas.microsoft.com/office/drawing/2014/main" id="{B5B3E2E3-2F90-47ED-8008-E22C7000FD74}"/>
+              </a:ext>
+            </a:extLst>
+          </p:cNvPr>
+          <p:cNvSpPr>
+            <a:spLocks xmlns:a="http://schemas.openxmlformats.org/drawingml/2006/main" noGrp="1"/>
+          </p:cNvSpPr>
+          <p:nvPr/>
+        </p:nvSpPr>
+        <p:spPr>
+          <a:xfrm xmlns:a="http://schemas.openxmlformats.org/drawingml/2006/main">
+            <a:off x="7362825" y="2457450"/>
+            <a:ext cx="419100" cy="238125"/>
+          </a:xfrm>
+          <a:prstGeom xmlns:a="http://schemas.openxmlformats.org/drawingml/2006/main" prst="rightArrow">
+            <a:avLst/>
+          </a:prstGeom>
+          <a:solidFill xmlns:a="http://schemas.openxmlformats.org/drawingml/2006/main">
+            <a:srgbClr val="176C75"/>
+          </a:solidFill>
+          <a:ln xmlns:a="http://schemas.openxmlformats.org/drawingml/2006/main" w="0">
+            <a:noFill/>
+          </a:ln>
+        </p:spPr>
+      </p:sp>
+      <p:sp>
+        <p:nvSpPr>
+          <p:cNvPr id="10" name="">
+            <a:extLst xmlns:a="http://schemas.openxmlformats.org/drawingml/2006/main">
+              <a:ext uri="{FF2B5EF4-FFF2-40B4-BE49-F238E27FC236}">
+                <a16:creationId xmlns:a16="http://schemas.microsoft.com/office/drawing/2014/main" id="{2972FD5C-6C9F-47EE-9702-E66726F95600}"/>
+              </a:ext>
+            </a:extLst>
+          </p:cNvPr>
+          <p:cNvSpPr>
+            <a:spLocks xmlns:a="http://schemas.openxmlformats.org/drawingml/2006/main" noGrp="1"/>
+          </p:cNvSpPr>
+          <p:nvPr/>
+        </p:nvSpPr>
+        <p:spPr>
+          <a:xfrm xmlns:a="http://schemas.openxmlformats.org/drawingml/2006/main">
+            <a:off x="7962900" y="2047875"/>
+            <a:ext cx="3619500" cy="1123950"/>
+          </a:xfrm>
+          <a:prstGeom xmlns:a="http://schemas.openxmlformats.org/drawingml/2006/main" prst="rect">
+            <a:avLst/>
+          </a:prstGeom>
+          <a:solidFill xmlns:a="http://schemas.openxmlformats.org/drawingml/2006/main">
+            <a:srgbClr val="EDF2F4"/>
+          </a:solidFill>
+          <a:ln xmlns:a="http://schemas.openxmlformats.org/drawingml/2006/main" w="11430">
+            <a:solidFill>
+              <a:srgbClr val="8799A6"/>
+            </a:solidFill>
+          </a:ln>
+        </p:spPr>
+      </p:sp>
+      <p:sp>
+        <p:nvSpPr>
+          <p:cNvPr id="11" name="">
+            <a:extLst xmlns:a="http://schemas.openxmlformats.org/drawingml/2006/main">
+              <a:ext uri="{FF2B5EF4-FFF2-40B4-BE49-F238E27FC236}">
+                <a16:creationId xmlns:a16="http://schemas.microsoft.com/office/drawing/2014/main" id="{35BF0247-00DC-45DE-A880-1286DBE9E921}"/>
+              </a:ext>
+            </a:extLst>
+          </p:cNvPr>
+          <p:cNvSpPr>
+            <a:spLocks xmlns:a="http://schemas.openxmlformats.org/drawingml/2006/main" noGrp="1"/>
+          </p:cNvSpPr>
+          <p:nvPr/>
+        </p:nvSpPr>
+        <p:spPr>
+          <a:xfrm xmlns:a="http://schemas.openxmlformats.org/drawingml/2006/main">
+            <a:off x="8077200" y="2219325"/>
+            <a:ext cx="3390900" cy="419100"/>
+          </a:xfrm>
+          <a:prstGeom xmlns:a="http://schemas.openxmlformats.org/drawingml/2006/main" prst="rect">
+            <a:avLst/>
+          </a:prstGeom>
+          <a:noFill xmlns:a="http://schemas.openxmlformats.org/drawingml/2006/main"/>
+          <a:ln xmlns:a="http://schemas.openxmlformats.org/drawingml/2006/main" w="0">
+            <a:noFill/>
+          </a:ln>
+        </p:spPr>
+        <p:txBody>
+          <a:bodyPr xmlns:a="http://schemas.openxmlformats.org/drawingml/2006/main" lIns="0" tIns="0" rIns="0" bIns="0"/>
+          <a:lstStyle xmlns:a="http://schemas.openxmlformats.org/drawingml/2006/main">
+            <a:defPPr>
+              <a:defRPr sz="2025" b="1">
+                <a:solidFill>
+                  <a:srgbClr val="142839"/>
+                </a:solidFill>
+                <a:latin typeface="Arial"/>
+                <a:ea typeface="Arial"/>
+                <a:cs typeface="Arial"/>
+              </a:defRPr>
+            </a:defPPr>
+          </a:lstStyle>
+          <a:p xmlns:a="http://schemas.openxmlformats.org/drawingml/2006/main">
+            <a:pPr>
+              <a:defRPr sz="2025" b="1">
+                <a:solidFill>
+                  <a:srgbClr val="142839"/>
+                </a:solidFill>
+                <a:latin typeface="Arial"/>
+                <a:ea typeface="Arial"/>
+                <a:cs typeface="Arial"/>
+              </a:defRPr>
+            </a:pPr>
+            <a:r>
+              <a:rPr sz="2025" b="1">
+                <a:solidFill>
+                  <a:srgbClr val="142839"/>
+                </a:solidFill>
+                <a:latin typeface="Arial"/>
+                <a:ea typeface="Arial"/>
+                <a:cs typeface="Arial"/>
+              </a:rPr>
+              <a:t>Spark checkpoint</a:t>
+            </a:r>
+          </a:p>
+        </p:txBody>
+      </p:sp>
+      <p:sp>
+        <p:nvSpPr>
+          <p:cNvPr id="12" name="">
+            <a:extLst xmlns:a="http://schemas.openxmlformats.org/drawingml/2006/main">
+              <a:ext uri="{FF2B5EF4-FFF2-40B4-BE49-F238E27FC236}">
+                <a16:creationId xmlns:a16="http://schemas.microsoft.com/office/drawing/2014/main" id="{3A6C8B1C-7D49-497B-B5E3-8C756AC320C3}"/>
+              </a:ext>
+            </a:extLst>
+          </p:cNvPr>
+          <p:cNvSpPr>
+            <a:spLocks xmlns:a="http://schemas.openxmlformats.org/drawingml/2006/main" noGrp="1"/>
+          </p:cNvSpPr>
+          <p:nvPr/>
+        </p:nvSpPr>
+        <p:spPr>
+          <a:xfrm xmlns:a="http://schemas.openxmlformats.org/drawingml/2006/main">
+            <a:off x="8077200" y="2667000"/>
+            <a:ext cx="3390900" cy="428625"/>
+          </a:xfrm>
+          <a:prstGeom xmlns:a="http://schemas.openxmlformats.org/drawingml/2006/main" prst="rect">
+            <a:avLst/>
+          </a:prstGeom>
+          <a:noFill xmlns:a="http://schemas.openxmlformats.org/drawingml/2006/main"/>
+          <a:ln xmlns:a="http://schemas.openxmlformats.org/drawingml/2006/main" w="0">
+            <a:noFill/>
+          </a:ln>
+        </p:spPr>
+        <p:txBody>
+          <a:bodyPr xmlns:a="http://schemas.openxmlformats.org/drawingml/2006/main" lIns="0" tIns="0" rIns="0" bIns="0"/>
+          <a:lstStyle xmlns:a="http://schemas.openxmlformats.org/drawingml/2006/main">
+            <a:defPPr>
+              <a:defRPr sz="1575" b="0">
+                <a:solidFill>
+                  <a:srgbClr val="42586A"/>
+                </a:solidFill>
+                <a:latin typeface="Arial"/>
+                <a:ea typeface="Arial"/>
+                <a:cs typeface="Arial"/>
+              </a:defRPr>
+            </a:defPPr>
+          </a:lstStyle>
+          <a:p xmlns:a="http://schemas.openxmlformats.org/drawingml/2006/main">
+            <a:pPr>
+              <a:defRPr sz="1575" b="0">
+                <a:solidFill>
+                  <a:srgbClr val="42586A"/>
+                </a:solidFill>
+                <a:latin typeface="Arial"/>
+                <a:ea typeface="Arial"/>
+                <a:cs typeface="Arial"/>
+              </a:defRPr>
+            </a:pPr>
+            <a:r>
+              <a:rPr sz="1575" b="0">
+                <a:solidFill>
+                  <a:srgbClr val="42586A"/>
+                </a:solidFill>
+                <a:latin typeface="Arial"/>
+                <a:ea typeface="Arial"/>
+                <a:cs typeface="Arial"/>
+              </a:rPr>
+              <a:t>Commit source progress</a:t>
+            </a:r>
+          </a:p>
+        </p:txBody>
+      </p:sp>
+      <p:sp>
+        <p:nvSpPr>
+          <p:cNvPr id="13" name="">
+            <a:extLst xmlns:a="http://schemas.openxmlformats.org/drawingml/2006/main">
+              <a:ext uri="{FF2B5EF4-FFF2-40B4-BE49-F238E27FC236}">
+                <a16:creationId xmlns:a16="http://schemas.microsoft.com/office/drawing/2014/main" id="{2FE09970-4927-4EFE-9CC4-F2AA36A2E476}"/>
+              </a:ext>
+            </a:extLst>
+          </p:cNvPr>
+          <p:cNvSpPr>
+            <a:spLocks xmlns:a="http://schemas.openxmlformats.org/drawingml/2006/main" noGrp="1"/>
+          </p:cNvSpPr>
+          <p:nvPr/>
+        </p:nvSpPr>
+        <p:spPr>
+          <a:xfrm xmlns:a="http://schemas.openxmlformats.org/drawingml/2006/main">
+            <a:off x="704850" y="3952875"/>
+            <a:ext cx="10668000" cy="809625"/>
+          </a:xfrm>
+          <a:prstGeom xmlns:a="http://schemas.openxmlformats.org/drawingml/2006/main" prst="rect">
+            <a:avLst/>
+          </a:prstGeom>
+          <a:noFill xmlns:a="http://schemas.openxmlformats.org/drawingml/2006/main"/>
+          <a:ln xmlns:a="http://schemas.openxmlformats.org/drawingml/2006/main" w="0">
+            <a:noFill/>
+          </a:ln>
+        </p:spPr>
+        <p:txBody>
+          <a:bodyPr xmlns:a="http://schemas.openxmlformats.org/drawingml/2006/main" lIns="0" tIns="0" rIns="0" bIns="0"/>
+          <a:lstStyle xmlns:a="http://schemas.openxmlformats.org/drawingml/2006/main">
+            <a:defPPr>
+              <a:defRPr sz="2550" b="1">
                 <a:solidFill>
                   <a:srgbClr val="176C75"/>
                 </a:solidFill>
                 <a:latin typeface="Arial"/>
                 <a:ea typeface="Arial"/>
                 <a:cs typeface="Arial"/>
+              </a:defRPr>
+            </a:defPPr>
+          </a:lstStyle>
+          <a:p xmlns:a="http://schemas.openxmlformats.org/drawingml/2006/main">
+            <a:pPr>
+              <a:defRPr sz="2550" b="1">
+                <a:solidFill>
+                  <a:srgbClr val="176C75"/>
+                </a:solidFill>
+                <a:latin typeface="Arial"/>
+                <a:ea typeface="Arial"/>
+                <a:cs typeface="Arial"/>
+              </a:defRPr>
+            </a:pPr>
+            <a:r>
+              <a:rPr sz="2550" b="1">
+                <a:solidFill>
+                  <a:srgbClr val="176C75"/>
+                </a:solidFill>
+                <a:latin typeface="Arial"/>
+                <a:ea typeface="Arial"/>
+                <a:cs typeface="Arial"/>
               </a:rPr>
-              <a:t>Spark SQL research supports declarative transformations</a:t>
+              <a:t>A retry consumes the batch and skips an already-published epoch.</a:t>
+            </a:r>
+          </a:p>
+        </p:txBody>
+      </p:sp>
+      <p:sp>
+        <p:nvSpPr>
+          <p:cNvPr id="14" name="">
+            <a:extLst xmlns:a="http://schemas.openxmlformats.org/drawingml/2006/main">
+              <a:ext uri="{FF2B5EF4-FFF2-40B4-BE49-F238E27FC236}">
+                <a16:creationId xmlns:a16="http://schemas.microsoft.com/office/drawing/2014/main" id="{737ED5E8-001F-4A69-B3D2-898BB77C7D14}"/>
+              </a:ext>
+            </a:extLst>
+          </p:cNvPr>
+          <p:cNvSpPr>
+            <a:spLocks xmlns:a="http://schemas.openxmlformats.org/drawingml/2006/main" noGrp="1"/>
+          </p:cNvSpPr>
+          <p:nvPr/>
+        </p:nvSpPr>
+        <p:spPr>
+          <a:xfrm xmlns:a="http://schemas.openxmlformats.org/drawingml/2006/main">
+            <a:off x="704850" y="5143500"/>
+            <a:ext cx="10668000" cy="1047750"/>
+          </a:xfrm>
+          <a:prstGeom xmlns:a="http://schemas.openxmlformats.org/drawingml/2006/main" prst="rect">
+            <a:avLst/>
+          </a:prstGeom>
+          <a:noFill xmlns:a="http://schemas.openxmlformats.org/drawingml/2006/main"/>
+          <a:ln xmlns:a="http://schemas.openxmlformats.org/drawingml/2006/main" w="0">
+            <a:noFill/>
+          </a:ln>
+        </p:spPr>
+        <p:txBody>
+          <a:bodyPr xmlns:a="http://schemas.openxmlformats.org/drawingml/2006/main" lIns="0" tIns="0" rIns="0" bIns="0"/>
+          <a:lstStyle xmlns:a="http://schemas.openxmlformats.org/drawingml/2006/main">
+            <a:defPPr>
+              <a:defRPr sz="2175" b="0">
+                <a:solidFill>
+                  <a:srgbClr val="42586A"/>
+                </a:solidFill>
+                <a:latin typeface="Arial"/>
+                <a:ea typeface="Arial"/>
+                <a:cs typeface="Arial"/>
+              </a:defRPr>
+            </a:defPPr>
+          </a:lstStyle>
+          <a:p xmlns:a="http://schemas.openxmlformats.org/drawingml/2006/main">
+            <a:pPr>
+              <a:defRPr sz="2175" b="0">
+                <a:solidFill>
+                  <a:srgbClr val="42586A"/>
+                </a:solidFill>
+                <a:latin typeface="Arial"/>
+                <a:ea typeface="Arial"/>
+                <a:cs typeface="Arial"/>
+              </a:defRPr>
+            </a:pPr>
+            <a:r>
+              <a:rPr sz="2175" b="0">
+                <a:solidFill>
+                  <a:srgbClr val="42586A"/>
+                </a:solidFill>
+                <a:latin typeface="Arial"/>
+                <a:ea typeface="Arial"/>
+                <a:cs typeface="Arial"/>
+              </a:rPr>
+              <a:t>Console logs can repeat. Independent queries commit separately.</a:t>
             </a:r>
           </a:p>
           <a:p xmlns:a="http://schemas.openxmlformats.org/drawingml/2006/main">
             <a:pPr>
-              <a:defRPr sz="2325" b="1">
-                <a:solidFill>
-                  <a:srgbClr val="176C75"/>
+              <a:defRPr sz="2175" b="0">
+                <a:solidFill>
+                  <a:srgbClr val="42586A"/>
                 </a:solidFill>
                 <a:latin typeface="Arial"/>
                 <a:ea typeface="Arial"/>
@@ -9109,15 +8579,15 @@
               </a:defRPr>
             </a:pPr>
             <a:r>
-              <a:rPr sz="2325" b="1">
-                <a:solidFill>
-                  <a:srgbClr val="176C75"/>
+              <a:rPr sz="2175" b="0">
+                <a:solidFill>
+                  <a:srgbClr val="42586A"/>
                 </a:solidFill>
                 <a:latin typeface="Arial"/>
                 <a:ea typeface="Arial"/>
                 <a:cs typeface="Arial"/>
               </a:rPr>
-              <a:t>and optimizer-visible expressions without Python UDFs.</a:t>
+              <a:t>Keep Kafka storage, checkpoints and epochs together.</a:t>
             </a:r>
           </a:p>
         </p:txBody>
@@ -9125,7 +8595,7 @@
     </p:spTree>
     <p:extLst>
       <p:ext uri="{BB962C8B-B14F-4D97-AF65-F5344CB8AC3E}">
-        <p14:creationId xmlns:p14="http://schemas.microsoft.com/office/powerpoint/2010/main" val="702609775"/>
+        <p14:creationId xmlns:p14="http://schemas.microsoft.com/office/powerpoint/2010/main" val="347361876"/>
       </p:ext>
     </p:extLst>
   </p:cSld>
@@ -9153,10 +8623,10 @@
       </p:grpSpPr>
       <p:sp>
         <p:nvSpPr>
-          <p:cNvPr id="5" name="">
+          <p:cNvPr id="4" name="">
             <a:extLst xmlns:a="http://schemas.openxmlformats.org/drawingml/2006/main">
               <a:ext uri="{FF2B5EF4-FFF2-40B4-BE49-F238E27FC236}">
-                <a16:creationId xmlns:a16="http://schemas.microsoft.com/office/drawing/2014/main" id="{F6D8BD7F-C6A1-4798-958C-108761A4D2B0}"/>
+                <a16:creationId xmlns:a16="http://schemas.microsoft.com/office/drawing/2014/main" id="{01049BB4-3A1C-446A-9B20-B8BB9CFED6BB}"/>
               </a:ext>
             </a:extLst>
           </p:cNvPr>
@@ -9212,6 +8682,1659 @@
                 <a:ea typeface="Arial"/>
                 <a:cs typeface="Arial"/>
               </a:rPr>
+              <a:t>Part B: full Retail Rocket dataset</a:t>
+            </a:r>
+          </a:p>
+        </p:txBody>
+      </p:sp>
+      <p:graphicFrame>
+        <p:nvGraphicFramePr>
+          <p:cNvPr id="2" name="">
+            <a:extLst xmlns:a="http://schemas.openxmlformats.org/drawingml/2006/main">
+              <a:ext uri="{FF2B5EF4-FFF2-40B4-BE49-F238E27FC236}">
+                <a16:creationId xmlns:a16="http://schemas.microsoft.com/office/drawing/2014/main" id="{45BD435D-105E-44E5-BCF7-D7C37F8A26A6}"/>
+              </a:ext>
+            </a:extLst>
+          </p:cNvPr>
+          <p:cNvGraphicFramePr/>
+          <p:nvPr/>
+        </p:nvGraphicFramePr>
+        <p:xfrm>
+          <a:off xmlns:a="http://schemas.openxmlformats.org/drawingml/2006/main" x="609600" y="1714500"/>
+          <a:ext xmlns:a="http://schemas.openxmlformats.org/drawingml/2006/main" cx="10972800" cy="3619500"/>
+        </p:xfrm>
+        <a:graphic xmlns:a="http://schemas.openxmlformats.org/drawingml/2006/main">
+          <a:graphicData uri="http://schemas.openxmlformats.org/drawingml/2006/table">
+            <a:tbl>
+              <a:tblPr/>
+              <a:tblGrid>
+                <a:gridCol w="2571750"/>
+                <a:gridCol w="4286250"/>
+                <a:gridCol w="4114800"/>
+              </a:tblGrid>
+              <a:tr h="603250">
+                <a:tc>
+                  <a:txBody>
+                    <a:bodyPr/>
+                    <a:lstStyle/>
+                    <a:p>
+                      <a:r>
+                        <a:rPr sz="1875" b="1">
+                          <a:solidFill>
+                            <a:srgbClr val="FFFFFF"/>
+                          </a:solidFill>
+                          <a:latin typeface="Arial"/>
+                          <a:ea typeface="Arial"/>
+                          <a:cs typeface="Arial"/>
+                        </a:rPr>
+                        <a:t>Field</a:t>
+                      </a:r>
+                    </a:p>
+                  </a:txBody>
+                  <a:tcPr marL="91440" marR="91440" marT="45720" marB="45720">
+                    <a:solidFill>
+                      <a:srgbClr val="142839"/>
+                    </a:solidFill>
+                  </a:tcPr>
+                </a:tc>
+                <a:tc>
+                  <a:txBody>
+                    <a:bodyPr/>
+                    <a:lstStyle/>
+                    <a:p>
+                      <a:r>
+                        <a:rPr sz="1875" b="1">
+                          <a:solidFill>
+                            <a:srgbClr val="FFFFFF"/>
+                          </a:solidFill>
+                          <a:latin typeface="Arial"/>
+                          <a:ea typeface="Arial"/>
+                          <a:cs typeface="Arial"/>
+                        </a:rPr>
+                        <a:t>Representation</a:t>
+                      </a:r>
+                    </a:p>
+                  </a:txBody>
+                  <a:tcPr marL="91440" marR="91440" marT="45720" marB="45720">
+                    <a:solidFill>
+                      <a:srgbClr val="142839"/>
+                    </a:solidFill>
+                  </a:tcPr>
+                </a:tc>
+                <a:tc>
+                  <a:txBody>
+                    <a:bodyPr/>
+                    <a:lstStyle/>
+                    <a:p>
+                      <a:r>
+                        <a:rPr sz="1875" b="1">
+                          <a:solidFill>
+                            <a:srgbClr val="FFFFFF"/>
+                          </a:solidFill>
+                          <a:latin typeface="Arial"/>
+                          <a:ea typeface="Arial"/>
+                          <a:cs typeface="Arial"/>
+                        </a:rPr>
+                        <a:t>Purpose</a:t>
+                      </a:r>
+                    </a:p>
+                  </a:txBody>
+                  <a:tcPr marL="91440" marR="91440" marT="45720" marB="45720">
+                    <a:solidFill>
+                      <a:srgbClr val="142839"/>
+                    </a:solidFill>
+                  </a:tcPr>
+                </a:tc>
+              </a:tr>
+              <a:tr h="603250">
+                <a:tc>
+                  <a:txBody>
+                    <a:bodyPr/>
+                    <a:lstStyle/>
+                    <a:p>
+                      <a:r>
+                        <a:rPr sz="1875" b="0">
+                          <a:solidFill>
+                            <a:srgbClr val="142839"/>
+                          </a:solidFill>
+                          <a:latin typeface="Arial"/>
+                          <a:ea typeface="Arial"/>
+                          <a:cs typeface="Arial"/>
+                        </a:rPr>
+                        <a:t>timestamp</a:t>
+                      </a:r>
+                    </a:p>
+                  </a:txBody>
+                  <a:tcPr marL="91440" marR="91440" marT="45720" marB="45720">
+                    <a:solidFill>
+                      <a:srgbClr val="FFFFFF"/>
+                    </a:solidFill>
+                  </a:tcPr>
+                </a:tc>
+                <a:tc>
+                  <a:txBody>
+                    <a:bodyPr/>
+                    <a:lstStyle/>
+                    <a:p>
+                      <a:r>
+                        <a:rPr sz="1875" b="0">
+                          <a:solidFill>
+                            <a:srgbClr val="142839"/>
+                          </a:solidFill>
+                          <a:latin typeface="Arial"/>
+                          <a:ea typeface="Arial"/>
+                          <a:cs typeface="Arial"/>
+                        </a:rPr>
+                        <a:t>Epoch milliseconds</a:t>
+                      </a:r>
+                    </a:p>
+                  </a:txBody>
+                  <a:tcPr marL="91440" marR="91440" marT="45720" marB="45720">
+                    <a:solidFill>
+                      <a:srgbClr val="FFFFFF"/>
+                    </a:solidFill>
+                  </a:tcPr>
+                </a:tc>
+                <a:tc>
+                  <a:txBody>
+                    <a:bodyPr/>
+                    <a:lstStyle/>
+                    <a:p>
+                      <a:r>
+                        <a:rPr sz="1875" b="0">
+                          <a:solidFill>
+                            <a:srgbClr val="142839"/>
+                          </a:solidFill>
+                          <a:latin typeface="Arial"/>
+                          <a:ea typeface="Arial"/>
+                          <a:cs typeface="Arial"/>
+                        </a:rPr>
+                        <a:t>Event-time windows</a:t>
+                      </a:r>
+                    </a:p>
+                  </a:txBody>
+                  <a:tcPr marL="91440" marR="91440" marT="45720" marB="45720">
+                    <a:solidFill>
+                      <a:srgbClr val="FFFFFF"/>
+                    </a:solidFill>
+                  </a:tcPr>
+                </a:tc>
+              </a:tr>
+              <a:tr h="603250">
+                <a:tc>
+                  <a:txBody>
+                    <a:bodyPr/>
+                    <a:lstStyle/>
+                    <a:p>
+                      <a:r>
+                        <a:rPr sz="1875" b="0">
+                          <a:solidFill>
+                            <a:srgbClr val="142839"/>
+                          </a:solidFill>
+                          <a:latin typeface="Arial"/>
+                          <a:ea typeface="Arial"/>
+                          <a:cs typeface="Arial"/>
+                        </a:rPr>
+                        <a:t>visitorid</a:t>
+                      </a:r>
+                    </a:p>
+                  </a:txBody>
+                  <a:tcPr marL="91440" marR="91440" marT="45720" marB="45720">
+                    <a:solidFill>
+                      <a:srgbClr val="EDF2F4"/>
+                    </a:solidFill>
+                  </a:tcPr>
+                </a:tc>
+                <a:tc>
+                  <a:txBody>
+                    <a:bodyPr/>
+                    <a:lstStyle/>
+                    <a:p>
+                      <a:r>
+                        <a:rPr sz="1875" b="0">
+                          <a:solidFill>
+                            <a:srgbClr val="142839"/>
+                          </a:solidFill>
+                          <a:latin typeface="Arial"/>
+                          <a:ea typeface="Arial"/>
+                          <a:cs typeface="Arial"/>
+                        </a:rPr>
+                        <a:t>Integer</a:t>
+                      </a:r>
+                    </a:p>
+                  </a:txBody>
+                  <a:tcPr marL="91440" marR="91440" marT="45720" marB="45720">
+                    <a:solidFill>
+                      <a:srgbClr val="EDF2F4"/>
+                    </a:solidFill>
+                  </a:tcPr>
+                </a:tc>
+                <a:tc>
+                  <a:txBody>
+                    <a:bodyPr/>
+                    <a:lstStyle/>
+                    <a:p>
+                      <a:r>
+                        <a:rPr sz="1875" b="0">
+                          <a:solidFill>
+                            <a:srgbClr val="142839"/>
+                          </a:solidFill>
+                          <a:latin typeface="Arial"/>
+                          <a:ea typeface="Arial"/>
+                          <a:cs typeface="Arial"/>
+                        </a:rPr>
+                        <a:t>Visitor key</a:t>
+                      </a:r>
+                    </a:p>
+                  </a:txBody>
+                  <a:tcPr marL="91440" marR="91440" marT="45720" marB="45720">
+                    <a:solidFill>
+                      <a:srgbClr val="EDF2F4"/>
+                    </a:solidFill>
+                  </a:tcPr>
+                </a:tc>
+              </a:tr>
+              <a:tr h="603250">
+                <a:tc>
+                  <a:txBody>
+                    <a:bodyPr/>
+                    <a:lstStyle/>
+                    <a:p>
+                      <a:r>
+                        <a:rPr sz="1875" b="0">
+                          <a:solidFill>
+                            <a:srgbClr val="142839"/>
+                          </a:solidFill>
+                          <a:latin typeface="Arial"/>
+                          <a:ea typeface="Arial"/>
+                          <a:cs typeface="Arial"/>
+                        </a:rPr>
+                        <a:t>event</a:t>
+                      </a:r>
+                    </a:p>
+                  </a:txBody>
+                  <a:tcPr marL="91440" marR="91440" marT="45720" marB="45720">
+                    <a:solidFill>
+                      <a:srgbClr val="FFFFFF"/>
+                    </a:solidFill>
+                  </a:tcPr>
+                </a:tc>
+                <a:tc>
+                  <a:txBody>
+                    <a:bodyPr/>
+                    <a:lstStyle/>
+                    <a:p>
+                      <a:r>
+                        <a:rPr sz="1875" b="0">
+                          <a:solidFill>
+                            <a:srgbClr val="142839"/>
+                          </a:solidFill>
+                          <a:latin typeface="Arial"/>
+                          <a:ea typeface="Arial"/>
+                          <a:cs typeface="Arial"/>
+                        </a:rPr>
+                        <a:t>view / addtocart / transaction</a:t>
+                      </a:r>
+                    </a:p>
+                  </a:txBody>
+                  <a:tcPr marL="91440" marR="91440" marT="45720" marB="45720">
+                    <a:solidFill>
+                      <a:srgbClr val="FFFFFF"/>
+                    </a:solidFill>
+                  </a:tcPr>
+                </a:tc>
+                <a:tc>
+                  <a:txBody>
+                    <a:bodyPr/>
+                    <a:lstStyle/>
+                    <a:p>
+                      <a:r>
+                        <a:rPr sz="1875" b="0">
+                          <a:solidFill>
+                            <a:srgbClr val="142839"/>
+                          </a:solidFill>
+                          <a:latin typeface="Arial"/>
+                          <a:ea typeface="Arial"/>
+                          <a:cs typeface="Arial"/>
+                        </a:rPr>
+                        <a:t>Engagement weight</a:t>
+                      </a:r>
+                    </a:p>
+                  </a:txBody>
+                  <a:tcPr marL="91440" marR="91440" marT="45720" marB="45720">
+                    <a:solidFill>
+                      <a:srgbClr val="FFFFFF"/>
+                    </a:solidFill>
+                  </a:tcPr>
+                </a:tc>
+              </a:tr>
+              <a:tr h="603250">
+                <a:tc>
+                  <a:txBody>
+                    <a:bodyPr/>
+                    <a:lstStyle/>
+                    <a:p>
+                      <a:r>
+                        <a:rPr sz="1875" b="0">
+                          <a:solidFill>
+                            <a:srgbClr val="142839"/>
+                          </a:solidFill>
+                          <a:latin typeface="Arial"/>
+                          <a:ea typeface="Arial"/>
+                          <a:cs typeface="Arial"/>
+                        </a:rPr>
+                        <a:t>itemid</a:t>
+                      </a:r>
+                    </a:p>
+                  </a:txBody>
+                  <a:tcPr marL="91440" marR="91440" marT="45720" marB="45720">
+                    <a:solidFill>
+                      <a:srgbClr val="EDF2F4"/>
+                    </a:solidFill>
+                  </a:tcPr>
+                </a:tc>
+                <a:tc>
+                  <a:txBody>
+                    <a:bodyPr/>
+                    <a:lstStyle/>
+                    <a:p>
+                      <a:r>
+                        <a:rPr sz="1875" b="0">
+                          <a:solidFill>
+                            <a:srgbClr val="142839"/>
+                          </a:solidFill>
+                          <a:latin typeface="Arial"/>
+                          <a:ea typeface="Arial"/>
+                          <a:cs typeface="Arial"/>
+                        </a:rPr>
+                        <a:t>Integer</a:t>
+                      </a:r>
+                    </a:p>
+                  </a:txBody>
+                  <a:tcPr marL="91440" marR="91440" marT="45720" marB="45720">
+                    <a:solidFill>
+                      <a:srgbClr val="EDF2F4"/>
+                    </a:solidFill>
+                  </a:tcPr>
+                </a:tc>
+                <a:tc>
+                  <a:txBody>
+                    <a:bodyPr/>
+                    <a:lstStyle/>
+                    <a:p>
+                      <a:r>
+                        <a:rPr sz="1875" b="0">
+                          <a:solidFill>
+                            <a:srgbClr val="142839"/>
+                          </a:solidFill>
+                          <a:latin typeface="Arial"/>
+                          <a:ea typeface="Arial"/>
+                          <a:cs typeface="Arial"/>
+                        </a:rPr>
+                        <a:t>Product key</a:t>
+                      </a:r>
+                    </a:p>
+                  </a:txBody>
+                  <a:tcPr marL="91440" marR="91440" marT="45720" marB="45720">
+                    <a:solidFill>
+                      <a:srgbClr val="EDF2F4"/>
+                    </a:solidFill>
+                  </a:tcPr>
+                </a:tc>
+              </a:tr>
+              <a:tr h="603250">
+                <a:tc>
+                  <a:txBody>
+                    <a:bodyPr/>
+                    <a:lstStyle/>
+                    <a:p>
+                      <a:r>
+                        <a:rPr sz="1875" b="0">
+                          <a:solidFill>
+                            <a:srgbClr val="142839"/>
+                          </a:solidFill>
+                          <a:latin typeface="Arial"/>
+                          <a:ea typeface="Arial"/>
+                          <a:cs typeface="Arial"/>
+                        </a:rPr>
+                        <a:t>transactionid</a:t>
+                      </a:r>
+                    </a:p>
+                  </a:txBody>
+                  <a:tcPr marL="91440" marR="91440" marT="45720" marB="45720">
+                    <a:solidFill>
+                      <a:srgbClr val="FFFFFF"/>
+                    </a:solidFill>
+                  </a:tcPr>
+                </a:tc>
+                <a:tc>
+                  <a:txBody>
+                    <a:bodyPr/>
+                    <a:lstStyle/>
+                    <a:p>
+                      <a:r>
+                        <a:rPr sz="1875" b="0">
+                          <a:solidFill>
+                            <a:srgbClr val="142839"/>
+                          </a:solidFill>
+                          <a:latin typeface="Arial"/>
+                          <a:ea typeface="Arial"/>
+                          <a:cs typeface="Arial"/>
+                        </a:rPr>
+                        <a:t>Integer or null</a:t>
+                      </a:r>
+                    </a:p>
+                  </a:txBody>
+                  <a:tcPr marL="91440" marR="91440" marT="45720" marB="45720">
+                    <a:solidFill>
+                      <a:srgbClr val="FFFFFF"/>
+                    </a:solidFill>
+                  </a:tcPr>
+                </a:tc>
+                <a:tc>
+                  <a:txBody>
+                    <a:bodyPr/>
+                    <a:lstStyle/>
+                    <a:p>
+                      <a:r>
+                        <a:rPr sz="1875" b="0">
+                          <a:solidFill>
+                            <a:srgbClr val="142839"/>
+                          </a:solidFill>
+                          <a:latin typeface="Arial"/>
+                          <a:ea typeface="Arial"/>
+                          <a:cs typeface="Arial"/>
+                        </a:rPr>
+                        <a:t>Purchase evidence</a:t>
+                      </a:r>
+                    </a:p>
+                  </a:txBody>
+                  <a:tcPr marL="91440" marR="91440" marT="45720" marB="45720">
+                    <a:solidFill>
+                      <a:srgbClr val="FFFFFF"/>
+                    </a:solidFill>
+                  </a:tcPr>
+                </a:tc>
+              </a:tr>
+            </a:tbl>
+          </a:graphicData>
+        </a:graphic>
+      </p:graphicFrame>
+      <p:sp>
+        <p:nvSpPr>
+          <p:cNvPr id="3" name="">
+            <a:extLst xmlns:a="http://schemas.openxmlformats.org/drawingml/2006/main">
+              <a:ext uri="{FF2B5EF4-FFF2-40B4-BE49-F238E27FC236}">
+                <a16:creationId xmlns:a16="http://schemas.microsoft.com/office/drawing/2014/main" id="{A38A5171-5CD8-411F-A257-834EA54620A8}"/>
+              </a:ext>
+            </a:extLst>
+          </p:cNvPr>
+          <p:cNvSpPr>
+            <a:spLocks xmlns:a="http://schemas.openxmlformats.org/drawingml/2006/main" noGrp="1"/>
+          </p:cNvSpPr>
+          <p:nvPr/>
+        </p:nvSpPr>
+        <p:spPr>
+          <a:xfrm xmlns:a="http://schemas.openxmlformats.org/drawingml/2006/main">
+            <a:off x="666750" y="5638800"/>
+            <a:ext cx="10668000" cy="857250"/>
+          </a:xfrm>
+          <a:prstGeom xmlns:a="http://schemas.openxmlformats.org/drawingml/2006/main" prst="rect">
+            <a:avLst/>
+          </a:prstGeom>
+          <a:noFill xmlns:a="http://schemas.openxmlformats.org/drawingml/2006/main"/>
+          <a:ln xmlns:a="http://schemas.openxmlformats.org/drawingml/2006/main" w="0">
+            <a:noFill/>
+          </a:ln>
+        </p:spPr>
+        <p:txBody>
+          <a:bodyPr xmlns:a="http://schemas.openxmlformats.org/drawingml/2006/main" lIns="0" tIns="0" rIns="0" bIns="0"/>
+          <a:lstStyle xmlns:a="http://schemas.openxmlformats.org/drawingml/2006/main">
+            <a:defPPr>
+              <a:defRPr sz="1950" b="1">
+                <a:solidFill>
+                  <a:srgbClr val="176C75"/>
+                </a:solidFill>
+                <a:latin typeface="Arial"/>
+                <a:ea typeface="Arial"/>
+                <a:cs typeface="Arial"/>
+              </a:defRPr>
+            </a:defPPr>
+          </a:lstStyle>
+          <a:p xmlns:a="http://schemas.openxmlformats.org/drawingml/2006/main">
+            <a:pPr>
+              <a:defRPr sz="1950" b="1">
+                <a:solidFill>
+                  <a:srgbClr val="176C75"/>
+                </a:solidFill>
+                <a:latin typeface="Arial"/>
+                <a:ea typeface="Arial"/>
+                <a:cs typeface="Arial"/>
+              </a:defRPr>
+            </a:pPr>
+            <a:r>
+              <a:rPr sz="1950" b="1">
+                <a:solidFill>
+                  <a:srgbClr val="176C75"/>
+                </a:solidFill>
+                <a:latin typeface="Arial"/>
+                <a:ea typeface="Arial"/>
+                <a:cs typeface="Arial"/>
+              </a:rPr>
+              <a:t>Full source: 2,756,101 events</a:t>
+            </a:r>
+          </a:p>
+          <a:p xmlns:a="http://schemas.openxmlformats.org/drawingml/2006/main">
+            <a:pPr>
+              <a:defRPr sz="1950" b="1">
+                <a:solidFill>
+                  <a:srgbClr val="176C75"/>
+                </a:solidFill>
+                <a:latin typeface="Arial"/>
+                <a:ea typeface="Arial"/>
+                <a:cs typeface="Arial"/>
+              </a:defRPr>
+            </a:pPr>
+            <a:r>
+              <a:rPr sz="1950" b="1">
+                <a:solidFill>
+                  <a:srgbClr val="176C75"/>
+                </a:solidFill>
+                <a:latin typeface="Arial"/>
+                <a:ea typeface="Arial"/>
+                <a:cs typeface="Arial"/>
+              </a:rPr>
+              <a:t>2,664,312 views   69,332 carts   22,457 transactions</a:t>
+            </a:r>
+          </a:p>
+        </p:txBody>
+      </p:sp>
+    </p:spTree>
+    <p:extLst>
+      <p:ext uri="{BB962C8B-B14F-4D97-AF65-F5344CB8AC3E}">
+        <p14:creationId xmlns:p14="http://schemas.microsoft.com/office/powerpoint/2010/main" val="321181556"/>
+      </p:ext>
+    </p:extLst>
+  </p:cSld>
+</p:sld>
+</file>
+
+<file path=ppt/slides/slide8.xml><?xml version="1.0" encoding="utf-8"?>
+<p:sld xmlns:p="http://schemas.openxmlformats.org/presentationml/2006/main">
+  <p:cSld>
+    <p:bg>
+      <p:bgPr>
+        <a:solidFill xmlns:a="http://schemas.openxmlformats.org/drawingml/2006/main">
+          <a:srgbClr val="FCFCFA"/>
+        </a:solidFill>
+      </p:bgPr>
+    </p:bg>
+    <p:spTree>
+      <p:nvGrpSpPr>
+        <p:cNvPr id="1" name=""/>
+        <p:cNvGrpSpPr/>
+        <p:nvPr/>
+      </p:nvGrpSpPr>
+      <p:grpSpPr>
+        <a:xfrm xmlns:a="http://schemas.openxmlformats.org/drawingml/2006/main"/>
+      </p:grpSpPr>
+      <p:sp>
+        <p:nvSpPr>
+          <p:cNvPr id="19" name="">
+            <a:extLst xmlns:a="http://schemas.openxmlformats.org/drawingml/2006/main">
+              <a:ext uri="{FF2B5EF4-FFF2-40B4-BE49-F238E27FC236}">
+                <a16:creationId xmlns:a16="http://schemas.microsoft.com/office/drawing/2014/main" id="{03935919-54DC-4E67-9B4E-172C853BA77F}"/>
+              </a:ext>
+            </a:extLst>
+          </p:cNvPr>
+          <p:cNvSpPr>
+            <a:spLocks xmlns:a="http://schemas.openxmlformats.org/drawingml/2006/main" noGrp="1"/>
+          </p:cNvSpPr>
+          <p:nvPr/>
+        </p:nvSpPr>
+        <p:spPr>
+          <a:xfrm xmlns:a="http://schemas.openxmlformats.org/drawingml/2006/main">
+            <a:off x="609600" y="476250"/>
+            <a:ext cx="10934700" cy="1028700"/>
+          </a:xfrm>
+          <a:prstGeom xmlns:a="http://schemas.openxmlformats.org/drawingml/2006/main" prst="rect">
+            <a:avLst/>
+          </a:prstGeom>
+          <a:noFill xmlns:a="http://schemas.openxmlformats.org/drawingml/2006/main"/>
+          <a:ln xmlns:a="http://schemas.openxmlformats.org/drawingml/2006/main" w="0">
+            <a:noFill/>
+          </a:ln>
+        </p:spPr>
+        <p:txBody>
+          <a:bodyPr xmlns:a="http://schemas.openxmlformats.org/drawingml/2006/main" lIns="0" tIns="0" rIns="0" bIns="0"/>
+          <a:lstStyle xmlns:a="http://schemas.openxmlformats.org/drawingml/2006/main">
+            <a:defPPr>
+              <a:defRPr sz="3300" b="1">
+                <a:solidFill>
+                  <a:srgbClr val="142839"/>
+                </a:solidFill>
+                <a:latin typeface="Arial"/>
+                <a:ea typeface="Arial"/>
+                <a:cs typeface="Arial"/>
+              </a:defRPr>
+            </a:defPPr>
+          </a:lstStyle>
+          <a:p xmlns:a="http://schemas.openxmlformats.org/drawingml/2006/main">
+            <a:pPr>
+              <a:defRPr sz="3300" b="1">
+                <a:solidFill>
+                  <a:srgbClr val="142839"/>
+                </a:solidFill>
+                <a:latin typeface="Arial"/>
+                <a:ea typeface="Arial"/>
+                <a:cs typeface="Arial"/>
+              </a:defRPr>
+            </a:pPr>
+            <a:r>
+              <a:rPr sz="3300" b="1">
+                <a:solidFill>
+                  <a:srgbClr val="142839"/>
+                </a:solidFill>
+                <a:latin typeface="Arial"/>
+                <a:ea typeface="Arial"/>
+                <a:cs typeface="Arial"/>
+              </a:rPr>
+              <a:t>Pipeline architecture</a:t>
+            </a:r>
+          </a:p>
+        </p:txBody>
+      </p:sp>
+      <p:sp>
+        <p:nvSpPr>
+          <p:cNvPr id="2" name="">
+            <a:extLst xmlns:a="http://schemas.openxmlformats.org/drawingml/2006/main">
+              <a:ext uri="{FF2B5EF4-FFF2-40B4-BE49-F238E27FC236}">
+                <a16:creationId xmlns:a16="http://schemas.microsoft.com/office/drawing/2014/main" id="{8C7331F6-75EF-4A1A-B455-A66D89BFC432}"/>
+              </a:ext>
+            </a:extLst>
+          </p:cNvPr>
+          <p:cNvSpPr>
+            <a:spLocks xmlns:a="http://schemas.openxmlformats.org/drawingml/2006/main" noGrp="1"/>
+          </p:cNvSpPr>
+          <p:nvPr/>
+        </p:nvSpPr>
+        <p:spPr>
+          <a:xfrm xmlns:a="http://schemas.openxmlformats.org/drawingml/2006/main">
+            <a:off x="609600" y="2095500"/>
+            <a:ext cx="2333625" cy="1123950"/>
+          </a:xfrm>
+          <a:prstGeom xmlns:a="http://schemas.openxmlformats.org/drawingml/2006/main" prst="rect">
+            <a:avLst/>
+          </a:prstGeom>
+          <a:solidFill xmlns:a="http://schemas.openxmlformats.org/drawingml/2006/main">
+            <a:srgbClr val="EDF2F4"/>
+          </a:solidFill>
+          <a:ln xmlns:a="http://schemas.openxmlformats.org/drawingml/2006/main" w="11430">
+            <a:solidFill>
+              <a:srgbClr val="8799A6"/>
+            </a:solidFill>
+          </a:ln>
+        </p:spPr>
+      </p:sp>
+      <p:sp>
+        <p:nvSpPr>
+          <p:cNvPr id="3" name="">
+            <a:extLst xmlns:a="http://schemas.openxmlformats.org/drawingml/2006/main">
+              <a:ext uri="{FF2B5EF4-FFF2-40B4-BE49-F238E27FC236}">
+                <a16:creationId xmlns:a16="http://schemas.microsoft.com/office/drawing/2014/main" id="{41EFD2E4-2B7A-413A-A5F5-281BA5B0175F}"/>
+              </a:ext>
+            </a:extLst>
+          </p:cNvPr>
+          <p:cNvSpPr>
+            <a:spLocks xmlns:a="http://schemas.openxmlformats.org/drawingml/2006/main" noGrp="1"/>
+          </p:cNvSpPr>
+          <p:nvPr/>
+        </p:nvSpPr>
+        <p:spPr>
+          <a:xfrm xmlns:a="http://schemas.openxmlformats.org/drawingml/2006/main">
+            <a:off x="723900" y="2266950"/>
+            <a:ext cx="2105025" cy="419100"/>
+          </a:xfrm>
+          <a:prstGeom xmlns:a="http://schemas.openxmlformats.org/drawingml/2006/main" prst="rect">
+            <a:avLst/>
+          </a:prstGeom>
+          <a:noFill xmlns:a="http://schemas.openxmlformats.org/drawingml/2006/main"/>
+          <a:ln xmlns:a="http://schemas.openxmlformats.org/drawingml/2006/main" w="0">
+            <a:noFill/>
+          </a:ln>
+        </p:spPr>
+        <p:txBody>
+          <a:bodyPr xmlns:a="http://schemas.openxmlformats.org/drawingml/2006/main" lIns="0" tIns="0" rIns="0" bIns="0"/>
+          <a:lstStyle xmlns:a="http://schemas.openxmlformats.org/drawingml/2006/main">
+            <a:defPPr>
+              <a:defRPr sz="2025" b="1">
+                <a:solidFill>
+                  <a:srgbClr val="142839"/>
+                </a:solidFill>
+                <a:latin typeface="Arial"/>
+                <a:ea typeface="Arial"/>
+                <a:cs typeface="Arial"/>
+              </a:defRPr>
+            </a:defPPr>
+          </a:lstStyle>
+          <a:p xmlns:a="http://schemas.openxmlformats.org/drawingml/2006/main">
+            <a:pPr>
+              <a:defRPr sz="2025" b="1">
+                <a:solidFill>
+                  <a:srgbClr val="142839"/>
+                </a:solidFill>
+                <a:latin typeface="Arial"/>
+                <a:ea typeface="Arial"/>
+                <a:cs typeface="Arial"/>
+              </a:defRPr>
+            </a:pPr>
+            <a:r>
+              <a:rPr sz="2025" b="1">
+                <a:solidFill>
+                  <a:srgbClr val="142839"/>
+                </a:solidFill>
+                <a:latin typeface="Arial"/>
+                <a:ea typeface="Arial"/>
+                <a:cs typeface="Arial"/>
+              </a:rPr>
+              <a:t>CSV producer</a:t>
+            </a:r>
+          </a:p>
+        </p:txBody>
+      </p:sp>
+      <p:sp>
+        <p:nvSpPr>
+          <p:cNvPr id="4" name="">
+            <a:extLst xmlns:a="http://schemas.openxmlformats.org/drawingml/2006/main">
+              <a:ext uri="{FF2B5EF4-FFF2-40B4-BE49-F238E27FC236}">
+                <a16:creationId xmlns:a16="http://schemas.microsoft.com/office/drawing/2014/main" id="{E94C42C0-8442-4395-AA9F-D222251859B1}"/>
+              </a:ext>
+            </a:extLst>
+          </p:cNvPr>
+          <p:cNvSpPr>
+            <a:spLocks xmlns:a="http://schemas.openxmlformats.org/drawingml/2006/main" noGrp="1"/>
+          </p:cNvSpPr>
+          <p:nvPr/>
+        </p:nvSpPr>
+        <p:spPr>
+          <a:xfrm xmlns:a="http://schemas.openxmlformats.org/drawingml/2006/main">
+            <a:off x="723900" y="2714625"/>
+            <a:ext cx="2105025" cy="428625"/>
+          </a:xfrm>
+          <a:prstGeom xmlns:a="http://schemas.openxmlformats.org/drawingml/2006/main" prst="rect">
+            <a:avLst/>
+          </a:prstGeom>
+          <a:noFill xmlns:a="http://schemas.openxmlformats.org/drawingml/2006/main"/>
+          <a:ln xmlns:a="http://schemas.openxmlformats.org/drawingml/2006/main" w="0">
+            <a:noFill/>
+          </a:ln>
+        </p:spPr>
+        <p:txBody>
+          <a:bodyPr xmlns:a="http://schemas.openxmlformats.org/drawingml/2006/main" lIns="0" tIns="0" rIns="0" bIns="0"/>
+          <a:lstStyle xmlns:a="http://schemas.openxmlformats.org/drawingml/2006/main">
+            <a:defPPr>
+              <a:defRPr sz="1575" b="0">
+                <a:solidFill>
+                  <a:srgbClr val="42586A"/>
+                </a:solidFill>
+                <a:latin typeface="Arial"/>
+                <a:ea typeface="Arial"/>
+                <a:cs typeface="Arial"/>
+              </a:defRPr>
+            </a:defPPr>
+          </a:lstStyle>
+          <a:p xmlns:a="http://schemas.openxmlformats.org/drawingml/2006/main">
+            <a:pPr>
+              <a:defRPr sz="1575" b="0">
+                <a:solidFill>
+                  <a:srgbClr val="42586A"/>
+                </a:solidFill>
+                <a:latin typeface="Arial"/>
+                <a:ea typeface="Arial"/>
+                <a:cs typeface="Arial"/>
+              </a:defRPr>
+            </a:pPr>
+            <a:r>
+              <a:rPr sz="1575" b="0">
+                <a:solidFill>
+                  <a:srgbClr val="42586A"/>
+                </a:solidFill>
+                <a:latin typeface="Arial"/>
+                <a:ea typeface="Arial"/>
+                <a:cs typeface="Arial"/>
+              </a:rPr>
+              <a:t>Typed JSON and pacing</a:t>
+            </a:r>
+          </a:p>
+        </p:txBody>
+      </p:sp>
+      <p:sp>
+        <p:nvSpPr>
+          <p:cNvPr id="5" name="">
+            <a:extLst xmlns:a="http://schemas.openxmlformats.org/drawingml/2006/main">
+              <a:ext uri="{FF2B5EF4-FFF2-40B4-BE49-F238E27FC236}">
+                <a16:creationId xmlns:a16="http://schemas.microsoft.com/office/drawing/2014/main" id="{E6859D97-E414-4B98-80FA-4B9EF26BC1CD}"/>
+              </a:ext>
+            </a:extLst>
+          </p:cNvPr>
+          <p:cNvSpPr>
+            <a:spLocks xmlns:a="http://schemas.openxmlformats.org/drawingml/2006/main" noGrp="1"/>
+          </p:cNvSpPr>
+          <p:nvPr/>
+        </p:nvSpPr>
+        <p:spPr>
+          <a:xfrm xmlns:a="http://schemas.openxmlformats.org/drawingml/2006/main">
+            <a:off x="3028950" y="2524125"/>
+            <a:ext cx="381000" cy="238125"/>
+          </a:xfrm>
+          <a:prstGeom xmlns:a="http://schemas.openxmlformats.org/drawingml/2006/main" prst="rightArrow">
+            <a:avLst/>
+          </a:prstGeom>
+          <a:solidFill xmlns:a="http://schemas.openxmlformats.org/drawingml/2006/main">
+            <a:srgbClr val="176C75"/>
+          </a:solidFill>
+          <a:ln xmlns:a="http://schemas.openxmlformats.org/drawingml/2006/main" w="0">
+            <a:noFill/>
+          </a:ln>
+        </p:spPr>
+      </p:sp>
+      <p:sp>
+        <p:nvSpPr>
+          <p:cNvPr id="6" name="">
+            <a:extLst xmlns:a="http://schemas.openxmlformats.org/drawingml/2006/main">
+              <a:ext uri="{FF2B5EF4-FFF2-40B4-BE49-F238E27FC236}">
+                <a16:creationId xmlns:a16="http://schemas.microsoft.com/office/drawing/2014/main" id="{F7E8E21B-C806-4D0A-9983-A852E3CE4B68}"/>
+              </a:ext>
+            </a:extLst>
+          </p:cNvPr>
+          <p:cNvSpPr>
+            <a:spLocks xmlns:a="http://schemas.openxmlformats.org/drawingml/2006/main" noGrp="1"/>
+          </p:cNvSpPr>
+          <p:nvPr/>
+        </p:nvSpPr>
+        <p:spPr>
+          <a:xfrm xmlns:a="http://schemas.openxmlformats.org/drawingml/2006/main">
+            <a:off x="3505200" y="2095500"/>
+            <a:ext cx="2333625" cy="1123950"/>
+          </a:xfrm>
+          <a:prstGeom xmlns:a="http://schemas.openxmlformats.org/drawingml/2006/main" prst="rect">
+            <a:avLst/>
+          </a:prstGeom>
+          <a:solidFill xmlns:a="http://schemas.openxmlformats.org/drawingml/2006/main">
+            <a:srgbClr val="EDF2F4"/>
+          </a:solidFill>
+          <a:ln xmlns:a="http://schemas.openxmlformats.org/drawingml/2006/main" w="11430">
+            <a:solidFill>
+              <a:srgbClr val="8799A6"/>
+            </a:solidFill>
+          </a:ln>
+        </p:spPr>
+      </p:sp>
+      <p:sp>
+        <p:nvSpPr>
+          <p:cNvPr id="7" name="">
+            <a:extLst xmlns:a="http://schemas.openxmlformats.org/drawingml/2006/main">
+              <a:ext uri="{FF2B5EF4-FFF2-40B4-BE49-F238E27FC236}">
+                <a16:creationId xmlns:a16="http://schemas.microsoft.com/office/drawing/2014/main" id="{FD65B0BD-C140-4015-A3A3-712E5E8E4CE7}"/>
+              </a:ext>
+            </a:extLst>
+          </p:cNvPr>
+          <p:cNvSpPr>
+            <a:spLocks xmlns:a="http://schemas.openxmlformats.org/drawingml/2006/main" noGrp="1"/>
+          </p:cNvSpPr>
+          <p:nvPr/>
+        </p:nvSpPr>
+        <p:spPr>
+          <a:xfrm xmlns:a="http://schemas.openxmlformats.org/drawingml/2006/main">
+            <a:off x="3619500" y="2266950"/>
+            <a:ext cx="2105025" cy="419100"/>
+          </a:xfrm>
+          <a:prstGeom xmlns:a="http://schemas.openxmlformats.org/drawingml/2006/main" prst="rect">
+            <a:avLst/>
+          </a:prstGeom>
+          <a:noFill xmlns:a="http://schemas.openxmlformats.org/drawingml/2006/main"/>
+          <a:ln xmlns:a="http://schemas.openxmlformats.org/drawingml/2006/main" w="0">
+            <a:noFill/>
+          </a:ln>
+        </p:spPr>
+        <p:txBody>
+          <a:bodyPr xmlns:a="http://schemas.openxmlformats.org/drawingml/2006/main" lIns="0" tIns="0" rIns="0" bIns="0"/>
+          <a:lstStyle xmlns:a="http://schemas.openxmlformats.org/drawingml/2006/main">
+            <a:defPPr>
+              <a:defRPr sz="2025" b="1">
+                <a:solidFill>
+                  <a:srgbClr val="142839"/>
+                </a:solidFill>
+                <a:latin typeface="Arial"/>
+                <a:ea typeface="Arial"/>
+                <a:cs typeface="Arial"/>
+              </a:defRPr>
+            </a:defPPr>
+          </a:lstStyle>
+          <a:p xmlns:a="http://schemas.openxmlformats.org/drawingml/2006/main">
+            <a:pPr>
+              <a:defRPr sz="2025" b="1">
+                <a:solidFill>
+                  <a:srgbClr val="142839"/>
+                </a:solidFill>
+                <a:latin typeface="Arial"/>
+                <a:ea typeface="Arial"/>
+                <a:cs typeface="Arial"/>
+              </a:defRPr>
+            </a:pPr>
+            <a:r>
+              <a:rPr sz="2025" b="1">
+                <a:solidFill>
+                  <a:srgbClr val="142839"/>
+                </a:solidFill>
+                <a:latin typeface="Arial"/>
+                <a:ea typeface="Arial"/>
+                <a:cs typeface="Arial"/>
+              </a:rPr>
+              <a:t>Kafka KRaft</a:t>
+            </a:r>
+          </a:p>
+        </p:txBody>
+      </p:sp>
+      <p:sp>
+        <p:nvSpPr>
+          <p:cNvPr id="8" name="">
+            <a:extLst xmlns:a="http://schemas.openxmlformats.org/drawingml/2006/main">
+              <a:ext uri="{FF2B5EF4-FFF2-40B4-BE49-F238E27FC236}">
+                <a16:creationId xmlns:a16="http://schemas.microsoft.com/office/drawing/2014/main" id="{663C578F-9ACA-4AB9-B9C6-ECC7D72276DA}"/>
+              </a:ext>
+            </a:extLst>
+          </p:cNvPr>
+          <p:cNvSpPr>
+            <a:spLocks xmlns:a="http://schemas.openxmlformats.org/drawingml/2006/main" noGrp="1"/>
+          </p:cNvSpPr>
+          <p:nvPr/>
+        </p:nvSpPr>
+        <p:spPr>
+          <a:xfrm xmlns:a="http://schemas.openxmlformats.org/drawingml/2006/main">
+            <a:off x="3619500" y="2714625"/>
+            <a:ext cx="2105025" cy="428625"/>
+          </a:xfrm>
+          <a:prstGeom xmlns:a="http://schemas.openxmlformats.org/drawingml/2006/main" prst="rect">
+            <a:avLst/>
+          </a:prstGeom>
+          <a:noFill xmlns:a="http://schemas.openxmlformats.org/drawingml/2006/main"/>
+          <a:ln xmlns:a="http://schemas.openxmlformats.org/drawingml/2006/main" w="0">
+            <a:noFill/>
+          </a:ln>
+        </p:spPr>
+        <p:txBody>
+          <a:bodyPr xmlns:a="http://schemas.openxmlformats.org/drawingml/2006/main" lIns="0" tIns="0" rIns="0" bIns="0"/>
+          <a:lstStyle xmlns:a="http://schemas.openxmlformats.org/drawingml/2006/main">
+            <a:defPPr>
+              <a:defRPr sz="1575" b="0">
+                <a:solidFill>
+                  <a:srgbClr val="42586A"/>
+                </a:solidFill>
+                <a:latin typeface="Arial"/>
+                <a:ea typeface="Arial"/>
+                <a:cs typeface="Arial"/>
+              </a:defRPr>
+            </a:defPPr>
+          </a:lstStyle>
+          <a:p xmlns:a="http://schemas.openxmlformats.org/drawingml/2006/main">
+            <a:pPr>
+              <a:defRPr sz="1575" b="0">
+                <a:solidFill>
+                  <a:srgbClr val="42586A"/>
+                </a:solidFill>
+                <a:latin typeface="Arial"/>
+                <a:ea typeface="Arial"/>
+                <a:cs typeface="Arial"/>
+              </a:defRPr>
+            </a:pPr>
+            <a:r>
+              <a:rPr sz="1575" b="0">
+                <a:solidFill>
+                  <a:srgbClr val="42586A"/>
+                </a:solidFill>
+                <a:latin typeface="Arial"/>
+                <a:ea typeface="Arial"/>
+                <a:cs typeface="Arial"/>
+              </a:rPr>
+              <a:t>Two topic partitions</a:t>
+            </a:r>
+          </a:p>
+        </p:txBody>
+      </p:sp>
+      <p:sp>
+        <p:nvSpPr>
+          <p:cNvPr id="9" name="">
+            <a:extLst xmlns:a="http://schemas.openxmlformats.org/drawingml/2006/main">
+              <a:ext uri="{FF2B5EF4-FFF2-40B4-BE49-F238E27FC236}">
+                <a16:creationId xmlns:a16="http://schemas.microsoft.com/office/drawing/2014/main" id="{92FA604F-1E87-47BB-A26F-1911E5D36097}"/>
+              </a:ext>
+            </a:extLst>
+          </p:cNvPr>
+          <p:cNvSpPr>
+            <a:spLocks xmlns:a="http://schemas.openxmlformats.org/drawingml/2006/main" noGrp="1"/>
+          </p:cNvSpPr>
+          <p:nvPr/>
+        </p:nvSpPr>
+        <p:spPr>
+          <a:xfrm xmlns:a="http://schemas.openxmlformats.org/drawingml/2006/main">
+            <a:off x="5924550" y="2524125"/>
+            <a:ext cx="381000" cy="238125"/>
+          </a:xfrm>
+          <a:prstGeom xmlns:a="http://schemas.openxmlformats.org/drawingml/2006/main" prst="rightArrow">
+            <a:avLst/>
+          </a:prstGeom>
+          <a:solidFill xmlns:a="http://schemas.openxmlformats.org/drawingml/2006/main">
+            <a:srgbClr val="176C75"/>
+          </a:solidFill>
+          <a:ln xmlns:a="http://schemas.openxmlformats.org/drawingml/2006/main" w="0">
+            <a:noFill/>
+          </a:ln>
+        </p:spPr>
+      </p:sp>
+      <p:sp>
+        <p:nvSpPr>
+          <p:cNvPr id="10" name="">
+            <a:extLst xmlns:a="http://schemas.openxmlformats.org/drawingml/2006/main">
+              <a:ext uri="{FF2B5EF4-FFF2-40B4-BE49-F238E27FC236}">
+                <a16:creationId xmlns:a16="http://schemas.microsoft.com/office/drawing/2014/main" id="{EFA1CF88-65D2-4ADB-9ADA-B7748B7D07F7}"/>
+              </a:ext>
+            </a:extLst>
+          </p:cNvPr>
+          <p:cNvSpPr>
+            <a:spLocks xmlns:a="http://schemas.openxmlformats.org/drawingml/2006/main" noGrp="1"/>
+          </p:cNvSpPr>
+          <p:nvPr/>
+        </p:nvSpPr>
+        <p:spPr>
+          <a:xfrm xmlns:a="http://schemas.openxmlformats.org/drawingml/2006/main">
+            <a:off x="6400800" y="2095500"/>
+            <a:ext cx="2333625" cy="1123950"/>
+          </a:xfrm>
+          <a:prstGeom xmlns:a="http://schemas.openxmlformats.org/drawingml/2006/main" prst="rect">
+            <a:avLst/>
+          </a:prstGeom>
+          <a:solidFill xmlns:a="http://schemas.openxmlformats.org/drawingml/2006/main">
+            <a:srgbClr val="EDF2F4"/>
+          </a:solidFill>
+          <a:ln xmlns:a="http://schemas.openxmlformats.org/drawingml/2006/main" w="11430">
+            <a:solidFill>
+              <a:srgbClr val="8799A6"/>
+            </a:solidFill>
+          </a:ln>
+        </p:spPr>
+      </p:sp>
+      <p:sp>
+        <p:nvSpPr>
+          <p:cNvPr id="11" name="">
+            <a:extLst xmlns:a="http://schemas.openxmlformats.org/drawingml/2006/main">
+              <a:ext uri="{FF2B5EF4-FFF2-40B4-BE49-F238E27FC236}">
+                <a16:creationId xmlns:a16="http://schemas.microsoft.com/office/drawing/2014/main" id="{AE008A74-06CA-4CAF-B3D5-9D05E6B732A3}"/>
+              </a:ext>
+            </a:extLst>
+          </p:cNvPr>
+          <p:cNvSpPr>
+            <a:spLocks xmlns:a="http://schemas.openxmlformats.org/drawingml/2006/main" noGrp="1"/>
+          </p:cNvSpPr>
+          <p:nvPr/>
+        </p:nvSpPr>
+        <p:spPr>
+          <a:xfrm xmlns:a="http://schemas.openxmlformats.org/drawingml/2006/main">
+            <a:off x="6515100" y="2266950"/>
+            <a:ext cx="2105025" cy="419100"/>
+          </a:xfrm>
+          <a:prstGeom xmlns:a="http://schemas.openxmlformats.org/drawingml/2006/main" prst="rect">
+            <a:avLst/>
+          </a:prstGeom>
+          <a:noFill xmlns:a="http://schemas.openxmlformats.org/drawingml/2006/main"/>
+          <a:ln xmlns:a="http://schemas.openxmlformats.org/drawingml/2006/main" w="0">
+            <a:noFill/>
+          </a:ln>
+        </p:spPr>
+        <p:txBody>
+          <a:bodyPr xmlns:a="http://schemas.openxmlformats.org/drawingml/2006/main" lIns="0" tIns="0" rIns="0" bIns="0"/>
+          <a:lstStyle xmlns:a="http://schemas.openxmlformats.org/drawingml/2006/main">
+            <a:defPPr>
+              <a:defRPr sz="2025" b="1">
+                <a:solidFill>
+                  <a:srgbClr val="142839"/>
+                </a:solidFill>
+                <a:latin typeface="Arial"/>
+                <a:ea typeface="Arial"/>
+                <a:cs typeface="Arial"/>
+              </a:defRPr>
+            </a:defPPr>
+          </a:lstStyle>
+          <a:p xmlns:a="http://schemas.openxmlformats.org/drawingml/2006/main">
+            <a:pPr>
+              <a:defRPr sz="2025" b="1">
+                <a:solidFill>
+                  <a:srgbClr val="142839"/>
+                </a:solidFill>
+                <a:latin typeface="Arial"/>
+                <a:ea typeface="Arial"/>
+                <a:cs typeface="Arial"/>
+              </a:defRPr>
+            </a:pPr>
+            <a:r>
+              <a:rPr sz="2025" b="1">
+                <a:solidFill>
+                  <a:srgbClr val="142839"/>
+                </a:solidFill>
+                <a:latin typeface="Arial"/>
+                <a:ea typeface="Arial"/>
+                <a:cs typeface="Arial"/>
+              </a:rPr>
+              <a:t>Spark ETL</a:t>
+            </a:r>
+          </a:p>
+        </p:txBody>
+      </p:sp>
+      <p:sp>
+        <p:nvSpPr>
+          <p:cNvPr id="12" name="">
+            <a:extLst xmlns:a="http://schemas.openxmlformats.org/drawingml/2006/main">
+              <a:ext uri="{FF2B5EF4-FFF2-40B4-BE49-F238E27FC236}">
+                <a16:creationId xmlns:a16="http://schemas.microsoft.com/office/drawing/2014/main" id="{E9E9E6A5-642F-4855-BFE1-C1D31BF4BFA0}"/>
+              </a:ext>
+            </a:extLst>
+          </p:cNvPr>
+          <p:cNvSpPr>
+            <a:spLocks xmlns:a="http://schemas.openxmlformats.org/drawingml/2006/main" noGrp="1"/>
+          </p:cNvSpPr>
+          <p:nvPr/>
+        </p:nvSpPr>
+        <p:spPr>
+          <a:xfrm xmlns:a="http://schemas.openxmlformats.org/drawingml/2006/main">
+            <a:off x="6515100" y="2714625"/>
+            <a:ext cx="2105025" cy="428625"/>
+          </a:xfrm>
+          <a:prstGeom xmlns:a="http://schemas.openxmlformats.org/drawingml/2006/main" prst="rect">
+            <a:avLst/>
+          </a:prstGeom>
+          <a:noFill xmlns:a="http://schemas.openxmlformats.org/drawingml/2006/main"/>
+          <a:ln xmlns:a="http://schemas.openxmlformats.org/drawingml/2006/main" w="0">
+            <a:noFill/>
+          </a:ln>
+        </p:spPr>
+        <p:txBody>
+          <a:bodyPr xmlns:a="http://schemas.openxmlformats.org/drawingml/2006/main" lIns="0" tIns="0" rIns="0" bIns="0"/>
+          <a:lstStyle xmlns:a="http://schemas.openxmlformats.org/drawingml/2006/main">
+            <a:defPPr>
+              <a:defRPr sz="1575" b="0">
+                <a:solidFill>
+                  <a:srgbClr val="42586A"/>
+                </a:solidFill>
+                <a:latin typeface="Arial"/>
+                <a:ea typeface="Arial"/>
+                <a:cs typeface="Arial"/>
+              </a:defRPr>
+            </a:defPPr>
+          </a:lstStyle>
+          <a:p xmlns:a="http://schemas.openxmlformats.org/drawingml/2006/main">
+            <a:pPr>
+              <a:defRPr sz="1575" b="0">
+                <a:solidFill>
+                  <a:srgbClr val="42586A"/>
+                </a:solidFill>
+                <a:latin typeface="Arial"/>
+                <a:ea typeface="Arial"/>
+                <a:cs typeface="Arial"/>
+              </a:defRPr>
+            </a:pPr>
+            <a:r>
+              <a:rPr sz="1575" b="0">
+                <a:solidFill>
+                  <a:srgbClr val="42586A"/>
+                </a:solidFill>
+                <a:latin typeface="Arial"/>
+                <a:ea typeface="Arial"/>
+                <a:cs typeface="Arial"/>
+              </a:rPr>
+              <a:t>Schema and event time</a:t>
+            </a:r>
+          </a:p>
+        </p:txBody>
+      </p:sp>
+      <p:sp>
+        <p:nvSpPr>
+          <p:cNvPr id="13" name="">
+            <a:extLst xmlns:a="http://schemas.openxmlformats.org/drawingml/2006/main">
+              <a:ext uri="{FF2B5EF4-FFF2-40B4-BE49-F238E27FC236}">
+                <a16:creationId xmlns:a16="http://schemas.microsoft.com/office/drawing/2014/main" id="{4933A084-808A-4604-9246-18F7A422A20E}"/>
+              </a:ext>
+            </a:extLst>
+          </p:cNvPr>
+          <p:cNvSpPr>
+            <a:spLocks xmlns:a="http://schemas.openxmlformats.org/drawingml/2006/main" noGrp="1"/>
+          </p:cNvSpPr>
+          <p:nvPr/>
+        </p:nvSpPr>
+        <p:spPr>
+          <a:xfrm xmlns:a="http://schemas.openxmlformats.org/drawingml/2006/main">
+            <a:off x="8820150" y="2524125"/>
+            <a:ext cx="381000" cy="238125"/>
+          </a:xfrm>
+          <a:prstGeom xmlns:a="http://schemas.openxmlformats.org/drawingml/2006/main" prst="rightArrow">
+            <a:avLst/>
+          </a:prstGeom>
+          <a:solidFill xmlns:a="http://schemas.openxmlformats.org/drawingml/2006/main">
+            <a:srgbClr val="176C75"/>
+          </a:solidFill>
+          <a:ln xmlns:a="http://schemas.openxmlformats.org/drawingml/2006/main" w="0">
+            <a:noFill/>
+          </a:ln>
+        </p:spPr>
+      </p:sp>
+      <p:sp>
+        <p:nvSpPr>
+          <p:cNvPr id="14" name="">
+            <a:extLst xmlns:a="http://schemas.openxmlformats.org/drawingml/2006/main">
+              <a:ext uri="{FF2B5EF4-FFF2-40B4-BE49-F238E27FC236}">
+                <a16:creationId xmlns:a16="http://schemas.microsoft.com/office/drawing/2014/main" id="{93367394-76EB-42B4-865C-A32FF6C3FFFB}"/>
+              </a:ext>
+            </a:extLst>
+          </p:cNvPr>
+          <p:cNvSpPr>
+            <a:spLocks xmlns:a="http://schemas.openxmlformats.org/drawingml/2006/main" noGrp="1"/>
+          </p:cNvSpPr>
+          <p:nvPr/>
+        </p:nvSpPr>
+        <p:spPr>
+          <a:xfrm xmlns:a="http://schemas.openxmlformats.org/drawingml/2006/main">
+            <a:off x="9296400" y="2095500"/>
+            <a:ext cx="2286000" cy="1123950"/>
+          </a:xfrm>
+          <a:prstGeom xmlns:a="http://schemas.openxmlformats.org/drawingml/2006/main" prst="rect">
+            <a:avLst/>
+          </a:prstGeom>
+          <a:solidFill xmlns:a="http://schemas.openxmlformats.org/drawingml/2006/main">
+            <a:srgbClr val="EDF2F4"/>
+          </a:solidFill>
+          <a:ln xmlns:a="http://schemas.openxmlformats.org/drawingml/2006/main" w="11430">
+            <a:solidFill>
+              <a:srgbClr val="8799A6"/>
+            </a:solidFill>
+          </a:ln>
+        </p:spPr>
+      </p:sp>
+      <p:sp>
+        <p:nvSpPr>
+          <p:cNvPr id="15" name="">
+            <a:extLst xmlns:a="http://schemas.openxmlformats.org/drawingml/2006/main">
+              <a:ext uri="{FF2B5EF4-FFF2-40B4-BE49-F238E27FC236}">
+                <a16:creationId xmlns:a16="http://schemas.microsoft.com/office/drawing/2014/main" id="{A0A0CE9D-FA5E-477A-864B-04388E918DDB}"/>
+              </a:ext>
+            </a:extLst>
+          </p:cNvPr>
+          <p:cNvSpPr>
+            <a:spLocks xmlns:a="http://schemas.openxmlformats.org/drawingml/2006/main" noGrp="1"/>
+          </p:cNvSpPr>
+          <p:nvPr/>
+        </p:nvSpPr>
+        <p:spPr>
+          <a:xfrm xmlns:a="http://schemas.openxmlformats.org/drawingml/2006/main">
+            <a:off x="9410700" y="2266950"/>
+            <a:ext cx="2057400" cy="419100"/>
+          </a:xfrm>
+          <a:prstGeom xmlns:a="http://schemas.openxmlformats.org/drawingml/2006/main" prst="rect">
+            <a:avLst/>
+          </a:prstGeom>
+          <a:noFill xmlns:a="http://schemas.openxmlformats.org/drawingml/2006/main"/>
+          <a:ln xmlns:a="http://schemas.openxmlformats.org/drawingml/2006/main" w="0">
+            <a:noFill/>
+          </a:ln>
+        </p:spPr>
+        <p:txBody>
+          <a:bodyPr xmlns:a="http://schemas.openxmlformats.org/drawingml/2006/main" lIns="0" tIns="0" rIns="0" bIns="0"/>
+          <a:lstStyle xmlns:a="http://schemas.openxmlformats.org/drawingml/2006/main">
+            <a:defPPr>
+              <a:defRPr sz="2025" b="1">
+                <a:solidFill>
+                  <a:srgbClr val="142839"/>
+                </a:solidFill>
+                <a:latin typeface="Arial"/>
+                <a:ea typeface="Arial"/>
+                <a:cs typeface="Arial"/>
+              </a:defRPr>
+            </a:defPPr>
+          </a:lstStyle>
+          <a:p xmlns:a="http://schemas.openxmlformats.org/drawingml/2006/main">
+            <a:pPr>
+              <a:defRPr sz="2025" b="1">
+                <a:solidFill>
+                  <a:srgbClr val="142839"/>
+                </a:solidFill>
+                <a:latin typeface="Arial"/>
+                <a:ea typeface="Arial"/>
+                <a:cs typeface="Arial"/>
+              </a:defRPr>
+            </a:pPr>
+            <a:r>
+              <a:rPr sz="2025" b="1">
+                <a:solidFill>
+                  <a:srgbClr val="142839"/>
+                </a:solidFill>
+                <a:latin typeface="Arial"/>
+                <a:ea typeface="Arial"/>
+                <a:cs typeface="Arial"/>
+              </a:rPr>
+              <a:t>Intent output</a:t>
+            </a:r>
+          </a:p>
+        </p:txBody>
+      </p:sp>
+      <p:sp>
+        <p:nvSpPr>
+          <p:cNvPr id="16" name="">
+            <a:extLst xmlns:a="http://schemas.openxmlformats.org/drawingml/2006/main">
+              <a:ext uri="{FF2B5EF4-FFF2-40B4-BE49-F238E27FC236}">
+                <a16:creationId xmlns:a16="http://schemas.microsoft.com/office/drawing/2014/main" id="{786E7535-19CF-4651-9B65-134E3CE2DA74}"/>
+              </a:ext>
+            </a:extLst>
+          </p:cNvPr>
+          <p:cNvSpPr>
+            <a:spLocks xmlns:a="http://schemas.openxmlformats.org/drawingml/2006/main" noGrp="1"/>
+          </p:cNvSpPr>
+          <p:nvPr/>
+        </p:nvSpPr>
+        <p:spPr>
+          <a:xfrm xmlns:a="http://schemas.openxmlformats.org/drawingml/2006/main">
+            <a:off x="9410700" y="2714625"/>
+            <a:ext cx="2057400" cy="428625"/>
+          </a:xfrm>
+          <a:prstGeom xmlns:a="http://schemas.openxmlformats.org/drawingml/2006/main" prst="rect">
+            <a:avLst/>
+          </a:prstGeom>
+          <a:noFill xmlns:a="http://schemas.openxmlformats.org/drawingml/2006/main"/>
+          <a:ln xmlns:a="http://schemas.openxmlformats.org/drawingml/2006/main" w="0">
+            <a:noFill/>
+          </a:ln>
+        </p:spPr>
+        <p:txBody>
+          <a:bodyPr xmlns:a="http://schemas.openxmlformats.org/drawingml/2006/main" lIns="0" tIns="0" rIns="0" bIns="0"/>
+          <a:lstStyle xmlns:a="http://schemas.openxmlformats.org/drawingml/2006/main">
+            <a:defPPr>
+              <a:defRPr sz="1575" b="0">
+                <a:solidFill>
+                  <a:srgbClr val="42586A"/>
+                </a:solidFill>
+                <a:latin typeface="Arial"/>
+                <a:ea typeface="Arial"/>
+                <a:cs typeface="Arial"/>
+              </a:defRPr>
+            </a:defPPr>
+          </a:lstStyle>
+          <a:p xmlns:a="http://schemas.openxmlformats.org/drawingml/2006/main">
+            <a:pPr>
+              <a:defRPr sz="1575" b="0">
+                <a:solidFill>
+                  <a:srgbClr val="42586A"/>
+                </a:solidFill>
+                <a:latin typeface="Arial"/>
+                <a:ea typeface="Arial"/>
+                <a:cs typeface="Arial"/>
+              </a:defRPr>
+            </a:pPr>
+            <a:r>
+              <a:rPr sz="1575" b="0">
+                <a:solidFill>
+                  <a:srgbClr val="42586A"/>
+                </a:solidFill>
+                <a:latin typeface="Arial"/>
+                <a:ea typeface="Arial"/>
+                <a:cs typeface="Arial"/>
+              </a:rPr>
+              <a:t>Current recommendations</a:t>
+            </a:r>
+          </a:p>
+        </p:txBody>
+      </p:sp>
+      <p:sp>
+        <p:nvSpPr>
+          <p:cNvPr id="17" name="">
+            <a:extLst xmlns:a="http://schemas.openxmlformats.org/drawingml/2006/main">
+              <a:ext uri="{FF2B5EF4-FFF2-40B4-BE49-F238E27FC236}">
+                <a16:creationId xmlns:a16="http://schemas.microsoft.com/office/drawing/2014/main" id="{51C83516-D0CA-4B33-AF3D-DAF67E6B8CB7}"/>
+              </a:ext>
+            </a:extLst>
+          </p:cNvPr>
+          <p:cNvSpPr>
+            <a:spLocks xmlns:a="http://schemas.openxmlformats.org/drawingml/2006/main" noGrp="1"/>
+          </p:cNvSpPr>
+          <p:nvPr/>
+        </p:nvSpPr>
+        <p:spPr>
+          <a:xfrm xmlns:a="http://schemas.openxmlformats.org/drawingml/2006/main">
+            <a:off x="704850" y="3829050"/>
+            <a:ext cx="10668000" cy="619125"/>
+          </a:xfrm>
+          <a:prstGeom xmlns:a="http://schemas.openxmlformats.org/drawingml/2006/main" prst="rect">
+            <a:avLst/>
+          </a:prstGeom>
+          <a:noFill xmlns:a="http://schemas.openxmlformats.org/drawingml/2006/main"/>
+          <a:ln xmlns:a="http://schemas.openxmlformats.org/drawingml/2006/main" w="0">
+            <a:noFill/>
+          </a:ln>
+        </p:spPr>
+        <p:txBody>
+          <a:bodyPr xmlns:a="http://schemas.openxmlformats.org/drawingml/2006/main" lIns="0" tIns="0" rIns="0" bIns="0"/>
+          <a:lstStyle xmlns:a="http://schemas.openxmlformats.org/drawingml/2006/main">
+            <a:defPPr>
+              <a:defRPr sz="2325" b="1">
+                <a:solidFill>
+                  <a:srgbClr val="142839"/>
+                </a:solidFill>
+                <a:latin typeface="Arial"/>
+                <a:ea typeface="Arial"/>
+                <a:cs typeface="Arial"/>
+              </a:defRPr>
+            </a:defPPr>
+          </a:lstStyle>
+          <a:p xmlns:a="http://schemas.openxmlformats.org/drawingml/2006/main">
+            <a:pPr>
+              <a:defRPr sz="2325" b="1">
+                <a:solidFill>
+                  <a:srgbClr val="142839"/>
+                </a:solidFill>
+                <a:latin typeface="Arial"/>
+                <a:ea typeface="Arial"/>
+                <a:cs typeface="Arial"/>
+              </a:defRPr>
+            </a:pPr>
+            <a:r>
+              <a:rPr sz="2325" b="1">
+                <a:solidFill>
+                  <a:srgbClr val="142839"/>
+                </a:solidFill>
+                <a:latin typeface="Arial"/>
+                <a:ea typeface="Arial"/>
+                <a:cs typeface="Arial"/>
+              </a:rPr>
+              <a:t>10-minute windows     1-minute slide     5-minute watermark</a:t>
+            </a:r>
+          </a:p>
+        </p:txBody>
+      </p:sp>
+      <p:sp>
+        <p:nvSpPr>
+          <p:cNvPr id="18" name="">
+            <a:extLst xmlns:a="http://schemas.openxmlformats.org/drawingml/2006/main">
+              <a:ext uri="{FF2B5EF4-FFF2-40B4-BE49-F238E27FC236}">
+                <a16:creationId xmlns:a16="http://schemas.microsoft.com/office/drawing/2014/main" id="{E903931C-133D-40A7-80BE-F16E094AC43D}"/>
+              </a:ext>
+            </a:extLst>
+          </p:cNvPr>
+          <p:cNvSpPr>
+            <a:spLocks xmlns:a="http://schemas.openxmlformats.org/drawingml/2006/main" noGrp="1"/>
+          </p:cNvSpPr>
+          <p:nvPr/>
+        </p:nvSpPr>
+        <p:spPr>
+          <a:xfrm xmlns:a="http://schemas.openxmlformats.org/drawingml/2006/main">
+            <a:off x="704850" y="4810125"/>
+            <a:ext cx="10668000" cy="1047750"/>
+          </a:xfrm>
+          <a:prstGeom xmlns:a="http://schemas.openxmlformats.org/drawingml/2006/main" prst="rect">
+            <a:avLst/>
+          </a:prstGeom>
+          <a:noFill xmlns:a="http://schemas.openxmlformats.org/drawingml/2006/main"/>
+          <a:ln xmlns:a="http://schemas.openxmlformats.org/drawingml/2006/main" w="0">
+            <a:noFill/>
+          </a:ln>
+        </p:spPr>
+        <p:txBody>
+          <a:bodyPr xmlns:a="http://schemas.openxmlformats.org/drawingml/2006/main" lIns="0" tIns="0" rIns="0" bIns="0"/>
+          <a:lstStyle xmlns:a="http://schemas.openxmlformats.org/drawingml/2006/main">
+            <a:defPPr>
+              <a:defRPr sz="2250" b="0">
+                <a:solidFill>
+                  <a:srgbClr val="42586A"/>
+                </a:solidFill>
+                <a:latin typeface="Arial"/>
+                <a:ea typeface="Arial"/>
+                <a:cs typeface="Arial"/>
+              </a:defRPr>
+            </a:defPPr>
+          </a:lstStyle>
+          <a:p xmlns:a="http://schemas.openxmlformats.org/drawingml/2006/main">
+            <a:pPr>
+              <a:defRPr sz="2250" b="0">
+                <a:solidFill>
+                  <a:srgbClr val="42586A"/>
+                </a:solidFill>
+                <a:latin typeface="Arial"/>
+                <a:ea typeface="Arial"/>
+                <a:cs typeface="Arial"/>
+              </a:defRPr>
+            </a:pPr>
+            <a:r>
+              <a:rPr sz="2250" b="0">
+                <a:solidFill>
+                  <a:srgbClr val="42586A"/>
+                </a:solidFill>
+                <a:latin typeface="Arial"/>
+                <a:ea typeface="Arial"/>
+                <a:cs typeface="Arial"/>
+              </a:rPr>
+              <a:t>Partitioned Parquet audit and intent epochs</a:t>
+            </a:r>
+          </a:p>
+          <a:p xmlns:a="http://schemas.openxmlformats.org/drawingml/2006/main">
+            <a:pPr>
+              <a:defRPr sz="2250" b="0">
+                <a:solidFill>
+                  <a:srgbClr val="42586A"/>
+                </a:solidFill>
+                <a:latin typeface="Arial"/>
+                <a:ea typeface="Arial"/>
+                <a:cs typeface="Arial"/>
+              </a:defRPr>
+            </a:pPr>
+            <a:r>
+              <a:rPr sz="2250" b="0">
+                <a:solidFill>
+                  <a:srgbClr val="42586A"/>
+                </a:solidFill>
+                <a:latin typeface="Arial"/>
+                <a:ea typeface="Arial"/>
+                <a:cs typeface="Arial"/>
+              </a:rPr>
+              <a:t>Independent checkpoints and structured batch logs</a:t>
+            </a:r>
+          </a:p>
+        </p:txBody>
+      </p:sp>
+    </p:spTree>
+    <p:extLst>
+      <p:ext uri="{BB962C8B-B14F-4D97-AF65-F5344CB8AC3E}">
+        <p14:creationId xmlns:p14="http://schemas.microsoft.com/office/powerpoint/2010/main" val="1846136530"/>
+      </p:ext>
+    </p:extLst>
+  </p:cSld>
+</p:sld>
+</file>
+
+<file path=ppt/slides/slide9.xml><?xml version="1.0" encoding="utf-8"?>
+<p:sld xmlns:p="http://schemas.openxmlformats.org/presentationml/2006/main">
+  <p:cSld>
+    <p:bg>
+      <p:bgPr>
+        <a:solidFill xmlns:a="http://schemas.openxmlformats.org/drawingml/2006/main">
+          <a:srgbClr val="FCFCFA"/>
+        </a:solidFill>
+      </p:bgPr>
+    </p:bg>
+    <p:spTree>
+      <p:nvGrpSpPr>
+        <p:cNvPr id="1" name=""/>
+        <p:cNvGrpSpPr/>
+        <p:nvPr/>
+      </p:nvGrpSpPr>
+      <p:grpSpPr>
+        <a:xfrm xmlns:a="http://schemas.openxmlformats.org/drawingml/2006/main"/>
+      </p:grpSpPr>
+      <p:sp>
+        <p:nvSpPr>
+          <p:cNvPr id="5" name="">
+            <a:extLst xmlns:a="http://schemas.openxmlformats.org/drawingml/2006/main">
+              <a:ext uri="{FF2B5EF4-FFF2-40B4-BE49-F238E27FC236}">
+                <a16:creationId xmlns:a16="http://schemas.microsoft.com/office/drawing/2014/main" id="{DB27B9FE-2923-4CF9-89F1-1FD534243E43}"/>
+              </a:ext>
+            </a:extLst>
+          </p:cNvPr>
+          <p:cNvSpPr>
+            <a:spLocks xmlns:a="http://schemas.openxmlformats.org/drawingml/2006/main" noGrp="1"/>
+          </p:cNvSpPr>
+          <p:nvPr/>
+        </p:nvSpPr>
+        <p:spPr>
+          <a:xfrm xmlns:a="http://schemas.openxmlformats.org/drawingml/2006/main">
+            <a:off x="609600" y="476250"/>
+            <a:ext cx="10934700" cy="1028700"/>
+          </a:xfrm>
+          <a:prstGeom xmlns:a="http://schemas.openxmlformats.org/drawingml/2006/main" prst="rect">
+            <a:avLst/>
+          </a:prstGeom>
+          <a:noFill xmlns:a="http://schemas.openxmlformats.org/drawingml/2006/main"/>
+          <a:ln xmlns:a="http://schemas.openxmlformats.org/drawingml/2006/main" w="0">
+            <a:noFill/>
+          </a:ln>
+        </p:spPr>
+        <p:txBody>
+          <a:bodyPr xmlns:a="http://schemas.openxmlformats.org/drawingml/2006/main" lIns="0" tIns="0" rIns="0" bIns="0"/>
+          <a:lstStyle xmlns:a="http://schemas.openxmlformats.org/drawingml/2006/main">
+            <a:defPPr>
+              <a:defRPr sz="3300" b="1">
+                <a:solidFill>
+                  <a:srgbClr val="142839"/>
+                </a:solidFill>
+                <a:latin typeface="Arial"/>
+                <a:ea typeface="Arial"/>
+                <a:cs typeface="Arial"/>
+              </a:defRPr>
+            </a:defPPr>
+          </a:lstStyle>
+          <a:p xmlns:a="http://schemas.openxmlformats.org/drawingml/2006/main">
+            <a:pPr>
+              <a:defRPr sz="3300" b="1">
+                <a:solidFill>
+                  <a:srgbClr val="142839"/>
+                </a:solidFill>
+                <a:latin typeface="Arial"/>
+                <a:ea typeface="Arial"/>
+                <a:cs typeface="Arial"/>
+              </a:defRPr>
+            </a:pPr>
+            <a:r>
+              <a:rPr sz="3300" b="1">
+                <a:solidFill>
+                  <a:srgbClr val="142839"/>
+                </a:solidFill>
+                <a:latin typeface="Arial"/>
+                <a:ea typeface="Arial"/>
+                <a:cs typeface="Arial"/>
+              </a:rPr>
               <a:t>Event-time windows and late records</a:t>
             </a:r>
           </a:p>
@@ -9222,7 +10345,7 @@
           <p:cNvPr id="2" name="">
             <a:extLst xmlns:a="http://schemas.openxmlformats.org/drawingml/2006/main">
               <a:ext uri="{FF2B5EF4-FFF2-40B4-BE49-F238E27FC236}">
-                <a16:creationId xmlns:a16="http://schemas.microsoft.com/office/drawing/2014/main" id="{DE477F95-C10C-48D8-B3E6-4FC767E76114}"/>
+                <a16:creationId xmlns:a16="http://schemas.microsoft.com/office/drawing/2014/main" id="{F90C86A6-6BF1-436D-B913-F9FAA74FFAEF}"/>
               </a:ext>
             </a:extLst>
           </p:cNvPr>
@@ -9311,7 +10434,7 @@
           <p:cNvPr id="3" name="">
             <a:extLst xmlns:a="http://schemas.openxmlformats.org/drawingml/2006/main">
               <a:ext uri="{FF2B5EF4-FFF2-40B4-BE49-F238E27FC236}">
-                <a16:creationId xmlns:a16="http://schemas.microsoft.com/office/drawing/2014/main" id="{A38555E8-9724-4D29-B45F-036AB979B6BA}"/>
+                <a16:creationId xmlns:a16="http://schemas.microsoft.com/office/drawing/2014/main" id="{F85F183D-3D58-4D5F-825C-7214D890F754}"/>
               </a:ext>
             </a:extLst>
           </p:cNvPr>
@@ -9636,7 +10759,7 @@
           <p:cNvPr id="4" name="">
             <a:extLst xmlns:a="http://schemas.openxmlformats.org/drawingml/2006/main">
               <a:ext uri="{FF2B5EF4-FFF2-40B4-BE49-F238E27FC236}">
-                <a16:creationId xmlns:a16="http://schemas.microsoft.com/office/drawing/2014/main" id="{9C94C127-366D-40E9-8DAA-1A4E1FDB18F7}"/>
+                <a16:creationId xmlns:a16="http://schemas.microsoft.com/office/drawing/2014/main" id="{0E417D13-3D69-4AAC-B803-53F37D3796BF}"/>
               </a:ext>
             </a:extLst>
           </p:cNvPr>
@@ -9700,941 +10823,7 @@
     </p:spTree>
     <p:extLst>
       <p:ext uri="{BB962C8B-B14F-4D97-AF65-F5344CB8AC3E}">
-        <p14:creationId xmlns:p14="http://schemas.microsoft.com/office/powerpoint/2010/main" val="1943084300"/>
-      </p:ext>
-    </p:extLst>
-  </p:cSld>
-</p:sld>
-</file>
-
-<file path=ppt/slides/slide8.xml><?xml version="1.0" encoding="utf-8"?>
-<p:sld xmlns:p="http://schemas.openxmlformats.org/presentationml/2006/main">
-  <p:cSld>
-    <p:bg>
-      <p:bgPr>
-        <a:solidFill xmlns:a="http://schemas.openxmlformats.org/drawingml/2006/main">
-          <a:srgbClr val="FCFCFA"/>
-        </a:solidFill>
-      </p:bgPr>
-    </p:bg>
-    <p:spTree>
-      <p:nvGrpSpPr>
-        <p:cNvPr id="1" name=""/>
-        <p:cNvGrpSpPr/>
-        <p:nvPr/>
-      </p:nvGrpSpPr>
-      <p:grpSpPr>
-        <a:xfrm xmlns:a="http://schemas.openxmlformats.org/drawingml/2006/main"/>
-      </p:grpSpPr>
-      <p:sp>
-        <p:nvSpPr>
-          <p:cNvPr id="4" name="">
-            <a:extLst xmlns:a="http://schemas.openxmlformats.org/drawingml/2006/main">
-              <a:ext uri="{FF2B5EF4-FFF2-40B4-BE49-F238E27FC236}">
-                <a16:creationId xmlns:a16="http://schemas.microsoft.com/office/drawing/2014/main" id="{2A2C8C22-7491-40EF-8FA5-09A07E2619D9}"/>
-              </a:ext>
-            </a:extLst>
-          </p:cNvPr>
-          <p:cNvSpPr>
-            <a:spLocks xmlns:a="http://schemas.openxmlformats.org/drawingml/2006/main" noGrp="1"/>
-          </p:cNvSpPr>
-          <p:nvPr/>
-        </p:nvSpPr>
-        <p:spPr>
-          <a:xfrm xmlns:a="http://schemas.openxmlformats.org/drawingml/2006/main">
-            <a:off x="609600" y="476250"/>
-            <a:ext cx="10934700" cy="1028700"/>
-          </a:xfrm>
-          <a:prstGeom xmlns:a="http://schemas.openxmlformats.org/drawingml/2006/main" prst="rect">
-            <a:avLst/>
-          </a:prstGeom>
-          <a:noFill xmlns:a="http://schemas.openxmlformats.org/drawingml/2006/main"/>
-          <a:ln xmlns:a="http://schemas.openxmlformats.org/drawingml/2006/main" w="0">
-            <a:noFill/>
-          </a:ln>
-        </p:spPr>
-        <p:txBody>
-          <a:bodyPr xmlns:a="http://schemas.openxmlformats.org/drawingml/2006/main" lIns="0" tIns="0" rIns="0" bIns="0"/>
-          <a:lstStyle xmlns:a="http://schemas.openxmlformats.org/drawingml/2006/main">
-            <a:defPPr>
-              <a:defRPr sz="3300" b="1">
-                <a:solidFill>
-                  <a:srgbClr val="142839"/>
-                </a:solidFill>
-                <a:latin typeface="Arial"/>
-                <a:ea typeface="Arial"/>
-                <a:cs typeface="Arial"/>
-              </a:defRPr>
-            </a:defPPr>
-          </a:lstStyle>
-          <a:p xmlns:a="http://schemas.openxmlformats.org/drawingml/2006/main">
-            <a:pPr>
-              <a:defRPr sz="3300" b="1">
-                <a:solidFill>
-                  <a:srgbClr val="142839"/>
-                </a:solidFill>
-                <a:latin typeface="Arial"/>
-                <a:ea typeface="Arial"/>
-                <a:cs typeface="Arial"/>
-              </a:defRPr>
-            </a:pPr>
-            <a:r>
-              <a:rPr sz="3300" b="1">
-                <a:solidFill>
-                  <a:srgbClr val="142839"/>
-                </a:solidFill>
-                <a:latin typeface="Arial"/>
-                <a:ea typeface="Arial"/>
-                <a:cs typeface="Arial"/>
-              </a:rPr>
-              <a:t>Intent scores and purchase suppression</a:t>
-            </a:r>
-          </a:p>
-        </p:txBody>
-      </p:sp>
-      <p:graphicFrame>
-        <p:nvGraphicFramePr>
-          <p:cNvPr id="2" name="">
-            <a:extLst xmlns:a="http://schemas.openxmlformats.org/drawingml/2006/main">
-              <a:ext uri="{FF2B5EF4-FFF2-40B4-BE49-F238E27FC236}">
-                <a16:creationId xmlns:a16="http://schemas.microsoft.com/office/drawing/2014/main" id="{330F1932-E69E-44D2-BA56-9CAE240013C6}"/>
-              </a:ext>
-            </a:extLst>
-          </p:cNvPr>
-          <p:cNvGraphicFramePr/>
-          <p:nvPr/>
-        </p:nvGraphicFramePr>
-        <p:xfrm>
-          <a:off xmlns:a="http://schemas.openxmlformats.org/drawingml/2006/main" x="609600" y="1714500"/>
-          <a:ext xmlns:a="http://schemas.openxmlformats.org/drawingml/2006/main" cx="10972800" cy="2714625"/>
-        </p:xfrm>
-        <a:graphic xmlns:a="http://schemas.openxmlformats.org/drawingml/2006/main">
-          <a:graphicData uri="http://schemas.openxmlformats.org/drawingml/2006/table">
-            <a:tbl>
-              <a:tblPr/>
-              <a:tblGrid>
-                <a:gridCol w="3333750"/>
-                <a:gridCol w="2095500"/>
-                <a:gridCol w="5543550"/>
-              </a:tblGrid>
-              <a:tr h="678656">
-                <a:tc>
-                  <a:txBody>
-                    <a:bodyPr/>
-                    <a:lstStyle/>
-                    <a:p>
-                      <a:r>
-                        <a:rPr sz="2175" b="1">
-                          <a:solidFill>
-                            <a:srgbClr val="FFFFFF"/>
-                          </a:solidFill>
-                          <a:latin typeface="Arial"/>
-                          <a:ea typeface="Arial"/>
-                          <a:cs typeface="Arial"/>
-                        </a:rPr>
-                        <a:t>Event</a:t>
-                      </a:r>
-                    </a:p>
-                  </a:txBody>
-                  <a:tcPr marL="91440" marR="91440" marT="45720" marB="45720">
-                    <a:solidFill>
-                      <a:srgbClr val="142839"/>
-                    </a:solidFill>
-                  </a:tcPr>
-                </a:tc>
-                <a:tc>
-                  <a:txBody>
-                    <a:bodyPr/>
-                    <a:lstStyle/>
-                    <a:p>
-                      <a:r>
-                        <a:rPr sz="2175" b="1">
-                          <a:solidFill>
-                            <a:srgbClr val="FFFFFF"/>
-                          </a:solidFill>
-                          <a:latin typeface="Arial"/>
-                          <a:ea typeface="Arial"/>
-                          <a:cs typeface="Arial"/>
-                        </a:rPr>
-                        <a:t>Weight</a:t>
-                      </a:r>
-                    </a:p>
-                  </a:txBody>
-                  <a:tcPr marL="91440" marR="91440" marT="45720" marB="45720">
-                    <a:solidFill>
-                      <a:srgbClr val="142839"/>
-                    </a:solidFill>
-                  </a:tcPr>
-                </a:tc>
-                <a:tc>
-                  <a:txBody>
-                    <a:bodyPr/>
-                    <a:lstStyle/>
-                    <a:p>
-                      <a:r>
-                        <a:rPr sz="2175" b="1">
-                          <a:solidFill>
-                            <a:srgbClr val="FFFFFF"/>
-                          </a:solidFill>
-                          <a:latin typeface="Arial"/>
-                          <a:ea typeface="Arial"/>
-                          <a:cs typeface="Arial"/>
-                        </a:rPr>
-                        <a:t>Example running score</a:t>
-                      </a:r>
-                    </a:p>
-                  </a:txBody>
-                  <a:tcPr marL="91440" marR="91440" marT="45720" marB="45720">
-                    <a:solidFill>
-                      <a:srgbClr val="142839"/>
-                    </a:solidFill>
-                  </a:tcPr>
-                </a:tc>
-              </a:tr>
-              <a:tr h="678656">
-                <a:tc>
-                  <a:txBody>
-                    <a:bodyPr/>
-                    <a:lstStyle/>
-                    <a:p>
-                      <a:r>
-                        <a:rPr sz="2175" b="0">
-                          <a:solidFill>
-                            <a:srgbClr val="142839"/>
-                          </a:solidFill>
-                          <a:latin typeface="Arial"/>
-                          <a:ea typeface="Arial"/>
-                          <a:cs typeface="Arial"/>
-                        </a:rPr>
-                        <a:t>view</a:t>
-                      </a:r>
-                    </a:p>
-                  </a:txBody>
-                  <a:tcPr marL="91440" marR="91440" marT="45720" marB="45720">
-                    <a:solidFill>
-                      <a:srgbClr val="FFFFFF"/>
-                    </a:solidFill>
-                  </a:tcPr>
-                </a:tc>
-                <a:tc>
-                  <a:txBody>
-                    <a:bodyPr/>
-                    <a:lstStyle/>
-                    <a:p>
-                      <a:r>
-                        <a:rPr sz="2175" b="0">
-                          <a:solidFill>
-                            <a:srgbClr val="142839"/>
-                          </a:solidFill>
-                          <a:latin typeface="Arial"/>
-                          <a:ea typeface="Arial"/>
-                          <a:cs typeface="Arial"/>
-                        </a:rPr>
-                        <a:t>1</a:t>
-                      </a:r>
-                    </a:p>
-                  </a:txBody>
-                  <a:tcPr marL="91440" marR="91440" marT="45720" marB="45720">
-                    <a:solidFill>
-                      <a:srgbClr val="FFFFFF"/>
-                    </a:solidFill>
-                  </a:tcPr>
-                </a:tc>
-                <a:tc>
-                  <a:txBody>
-                    <a:bodyPr/>
-                    <a:lstStyle/>
-                    <a:p>
-                      <a:r>
-                        <a:rPr sz="2175" b="0">
-                          <a:solidFill>
-                            <a:srgbClr val="142839"/>
-                          </a:solidFill>
-                          <a:latin typeface="Arial"/>
-                          <a:ea typeface="Arial"/>
-                          <a:cs typeface="Arial"/>
-                        </a:rPr>
-                        <a:t>1</a:t>
-                      </a:r>
-                    </a:p>
-                  </a:txBody>
-                  <a:tcPr marL="91440" marR="91440" marT="45720" marB="45720">
-                    <a:solidFill>
-                      <a:srgbClr val="FFFFFF"/>
-                    </a:solidFill>
-                  </a:tcPr>
-                </a:tc>
-              </a:tr>
-              <a:tr h="678656">
-                <a:tc>
-                  <a:txBody>
-                    <a:bodyPr/>
-                    <a:lstStyle/>
-                    <a:p>
-                      <a:r>
-                        <a:rPr sz="2175" b="0">
-                          <a:solidFill>
-                            <a:srgbClr val="142839"/>
-                          </a:solidFill>
-                          <a:latin typeface="Arial"/>
-                          <a:ea typeface="Arial"/>
-                          <a:cs typeface="Arial"/>
-                        </a:rPr>
-                        <a:t>addtocart</a:t>
-                      </a:r>
-                    </a:p>
-                  </a:txBody>
-                  <a:tcPr marL="91440" marR="91440" marT="45720" marB="45720">
-                    <a:solidFill>
-                      <a:srgbClr val="EDF2F4"/>
-                    </a:solidFill>
-                  </a:tcPr>
-                </a:tc>
-                <a:tc>
-                  <a:txBody>
-                    <a:bodyPr/>
-                    <a:lstStyle/>
-                    <a:p>
-                      <a:r>
-                        <a:rPr sz="2175" b="0">
-                          <a:solidFill>
-                            <a:srgbClr val="142839"/>
-                          </a:solidFill>
-                          <a:latin typeface="Arial"/>
-                          <a:ea typeface="Arial"/>
-                          <a:cs typeface="Arial"/>
-                        </a:rPr>
-                        <a:t>5</a:t>
-                      </a:r>
-                    </a:p>
-                  </a:txBody>
-                  <a:tcPr marL="91440" marR="91440" marT="45720" marB="45720">
-                    <a:solidFill>
-                      <a:srgbClr val="EDF2F4"/>
-                    </a:solidFill>
-                  </a:tcPr>
-                </a:tc>
-                <a:tc>
-                  <a:txBody>
-                    <a:bodyPr/>
-                    <a:lstStyle/>
-                    <a:p>
-                      <a:r>
-                        <a:rPr sz="2175" b="0">
-                          <a:solidFill>
-                            <a:srgbClr val="142839"/>
-                          </a:solidFill>
-                          <a:latin typeface="Arial"/>
-                          <a:ea typeface="Arial"/>
-                          <a:cs typeface="Arial"/>
-                        </a:rPr>
-                        <a:t>6</a:t>
-                      </a:r>
-                    </a:p>
-                  </a:txBody>
-                  <a:tcPr marL="91440" marR="91440" marT="45720" marB="45720">
-                    <a:solidFill>
-                      <a:srgbClr val="EDF2F4"/>
-                    </a:solidFill>
-                  </a:tcPr>
-                </a:tc>
-              </a:tr>
-              <a:tr h="678656">
-                <a:tc>
-                  <a:txBody>
-                    <a:bodyPr/>
-                    <a:lstStyle/>
-                    <a:p>
-                      <a:r>
-                        <a:rPr sz="2175" b="0">
-                          <a:solidFill>
-                            <a:srgbClr val="142839"/>
-                          </a:solidFill>
-                          <a:latin typeface="Arial"/>
-                          <a:ea typeface="Arial"/>
-                          <a:cs typeface="Arial"/>
-                        </a:rPr>
-                        <a:t>transaction</a:t>
-                      </a:r>
-                    </a:p>
-                  </a:txBody>
-                  <a:tcPr marL="91440" marR="91440" marT="45720" marB="45720">
-                    <a:solidFill>
-                      <a:srgbClr val="FFFFFF"/>
-                    </a:solidFill>
-                  </a:tcPr>
-                </a:tc>
-                <a:tc>
-                  <a:txBody>
-                    <a:bodyPr/>
-                    <a:lstStyle/>
-                    <a:p>
-                      <a:r>
-                        <a:rPr sz="2175" b="0">
-                          <a:solidFill>
-                            <a:srgbClr val="142839"/>
-                          </a:solidFill>
-                          <a:latin typeface="Arial"/>
-                          <a:ea typeface="Arial"/>
-                          <a:cs typeface="Arial"/>
-                        </a:rPr>
-                        <a:t>10</a:t>
-                      </a:r>
-                    </a:p>
-                  </a:txBody>
-                  <a:tcPr marL="91440" marR="91440" marT="45720" marB="45720">
-                    <a:solidFill>
-                      <a:srgbClr val="FFFFFF"/>
-                    </a:solidFill>
-                  </a:tcPr>
-                </a:tc>
-                <a:tc>
-                  <a:txBody>
-                    <a:bodyPr/>
-                    <a:lstStyle/>
-                    <a:p>
-                      <a:r>
-                        <a:rPr sz="2175" b="0">
-                          <a:solidFill>
-                            <a:srgbClr val="142839"/>
-                          </a:solidFill>
-                          <a:latin typeface="Arial"/>
-                          <a:ea typeface="Arial"/>
-                          <a:cs typeface="Arial"/>
-                        </a:rPr>
-                        <a:t>16</a:t>
-                      </a:r>
-                    </a:p>
-                  </a:txBody>
-                  <a:tcPr marL="91440" marR="91440" marT="45720" marB="45720">
-                    <a:solidFill>
-                      <a:srgbClr val="FFFFFF"/>
-                    </a:solidFill>
-                  </a:tcPr>
-                </a:tc>
-              </a:tr>
-            </a:tbl>
-          </a:graphicData>
-        </a:graphic>
-      </p:graphicFrame>
-      <p:sp>
-        <p:nvSpPr>
-          <p:cNvPr id="3" name="">
-            <a:extLst xmlns:a="http://schemas.openxmlformats.org/drawingml/2006/main">
-              <a:ext uri="{FF2B5EF4-FFF2-40B4-BE49-F238E27FC236}">
-                <a16:creationId xmlns:a16="http://schemas.microsoft.com/office/drawing/2014/main" id="{7FEB08F7-9B65-4C90-8CCC-9D461E9EDFF3}"/>
-              </a:ext>
-            </a:extLst>
-          </p:cNvPr>
-          <p:cNvSpPr>
-            <a:spLocks xmlns:a="http://schemas.openxmlformats.org/drawingml/2006/main" noGrp="1"/>
-          </p:cNvSpPr>
-          <p:nvPr/>
-        </p:nvSpPr>
-        <p:spPr>
-          <a:xfrm xmlns:a="http://schemas.openxmlformats.org/drawingml/2006/main">
-            <a:off x="704850" y="4857750"/>
-            <a:ext cx="10668000" cy="1095375"/>
-          </a:xfrm>
-          <a:prstGeom xmlns:a="http://schemas.openxmlformats.org/drawingml/2006/main" prst="rect">
-            <a:avLst/>
-          </a:prstGeom>
-          <a:noFill xmlns:a="http://schemas.openxmlformats.org/drawingml/2006/main"/>
-          <a:ln xmlns:a="http://schemas.openxmlformats.org/drawingml/2006/main" w="0">
-            <a:noFill/>
-          </a:ln>
-        </p:spPr>
-        <p:txBody>
-          <a:bodyPr xmlns:a="http://schemas.openxmlformats.org/drawingml/2006/main" lIns="0" tIns="0" rIns="0" bIns="0"/>
-          <a:lstStyle xmlns:a="http://schemas.openxmlformats.org/drawingml/2006/main">
-            <a:defPPr>
-              <a:defRPr sz="2625" b="1">
-                <a:solidFill>
-                  <a:srgbClr val="176C75"/>
-                </a:solidFill>
-                <a:latin typeface="Arial"/>
-                <a:ea typeface="Arial"/>
-                <a:cs typeface="Arial"/>
-              </a:defRPr>
-            </a:defPPr>
-          </a:lstStyle>
-          <a:p xmlns:a="http://schemas.openxmlformats.org/drawingml/2006/main">
-            <a:pPr>
-              <a:defRPr sz="2625" b="1">
-                <a:solidFill>
-                  <a:srgbClr val="176C75"/>
-                </a:solidFill>
-                <a:latin typeface="Arial"/>
-                <a:ea typeface="Arial"/>
-                <a:cs typeface="Arial"/>
-              </a:defRPr>
-            </a:pPr>
-            <a:r>
-              <a:rPr sz="2625" b="1">
-                <a:solidFill>
-                  <a:srgbClr val="176C75"/>
-                </a:solidFill>
-                <a:latin typeface="Arial"/>
-                <a:ea typeface="Arial"/>
-                <a:cs typeface="Arial"/>
-              </a:rPr>
-              <a:t>Cart at score 6 qualifies.</a:t>
-            </a:r>
-          </a:p>
-          <a:p xmlns:a="http://schemas.openxmlformats.org/drawingml/2006/main">
-            <a:pPr>
-              <a:defRPr sz="2625" b="1">
-                <a:solidFill>
-                  <a:srgbClr val="176C75"/>
-                </a:solidFill>
-                <a:latin typeface="Arial"/>
-                <a:ea typeface="Arial"/>
-                <a:cs typeface="Arial"/>
-              </a:defRPr>
-            </a:pPr>
-            <a:r>
-              <a:rPr sz="2625" b="1">
-                <a:solidFill>
-                  <a:srgbClr val="176C75"/>
-                </a:solidFill>
-                <a:latin typeface="Arial"/>
-                <a:ea typeface="Arial"/>
-                <a:cs typeface="Arial"/>
-              </a:rPr>
-              <a:t>Purchase at score 16 removes that item from eligibility.</a:t>
-            </a:r>
-          </a:p>
-        </p:txBody>
-      </p:sp>
-    </p:spTree>
-    <p:extLst>
-      <p:ext uri="{BB962C8B-B14F-4D97-AF65-F5344CB8AC3E}">
-        <p14:creationId xmlns:p14="http://schemas.microsoft.com/office/powerpoint/2010/main" val="1423493149"/>
-      </p:ext>
-    </p:extLst>
-  </p:cSld>
-</p:sld>
-</file>
-
-<file path=ppt/slides/slide9.xml><?xml version="1.0" encoding="utf-8"?>
-<p:sld xmlns:p="http://schemas.openxmlformats.org/presentationml/2006/main">
-  <p:cSld>
-    <p:bg>
-      <p:bgPr>
-        <a:solidFill xmlns:a="http://schemas.openxmlformats.org/drawingml/2006/main">
-          <a:srgbClr val="FCFCFA"/>
-        </a:solidFill>
-      </p:bgPr>
-    </p:bg>
-    <p:spTree>
-      <p:nvGrpSpPr>
-        <p:cNvPr id="1" name=""/>
-        <p:cNvGrpSpPr/>
-        <p:nvPr/>
-      </p:nvGrpSpPr>
-      <p:grpSpPr>
-        <a:xfrm xmlns:a="http://schemas.openxmlformats.org/drawingml/2006/main"/>
-      </p:grpSpPr>
-      <p:sp>
-        <p:nvSpPr>
-          <p:cNvPr id="7" name="">
-            <a:extLst xmlns:a="http://schemas.openxmlformats.org/drawingml/2006/main">
-              <a:ext uri="{FF2B5EF4-FFF2-40B4-BE49-F238E27FC236}">
-                <a16:creationId xmlns:a16="http://schemas.microsoft.com/office/drawing/2014/main" id="{A52A2F4F-9220-42E3-99FF-12CE473A91E6}"/>
-              </a:ext>
-            </a:extLst>
-          </p:cNvPr>
-          <p:cNvSpPr>
-            <a:spLocks xmlns:a="http://schemas.openxmlformats.org/drawingml/2006/main" noGrp="1"/>
-          </p:cNvSpPr>
-          <p:nvPr/>
-        </p:nvSpPr>
-        <p:spPr>
-          <a:xfrm xmlns:a="http://schemas.openxmlformats.org/drawingml/2006/main">
-            <a:off x="609600" y="476250"/>
-            <a:ext cx="10934700" cy="1028700"/>
-          </a:xfrm>
-          <a:prstGeom xmlns:a="http://schemas.openxmlformats.org/drawingml/2006/main" prst="rect">
-            <a:avLst/>
-          </a:prstGeom>
-          <a:noFill xmlns:a="http://schemas.openxmlformats.org/drawingml/2006/main"/>
-          <a:ln xmlns:a="http://schemas.openxmlformats.org/drawingml/2006/main" w="0">
-            <a:noFill/>
-          </a:ln>
-        </p:spPr>
-        <p:txBody>
-          <a:bodyPr xmlns:a="http://schemas.openxmlformats.org/drawingml/2006/main" lIns="0" tIns="0" rIns="0" bIns="0"/>
-          <a:lstStyle xmlns:a="http://schemas.openxmlformats.org/drawingml/2006/main">
-            <a:defPPr>
-              <a:defRPr sz="3300" b="1">
-                <a:solidFill>
-                  <a:srgbClr val="142839"/>
-                </a:solidFill>
-                <a:latin typeface="Arial"/>
-                <a:ea typeface="Arial"/>
-                <a:cs typeface="Arial"/>
-              </a:defRPr>
-            </a:defPPr>
-          </a:lstStyle>
-          <a:p xmlns:a="http://schemas.openxmlformats.org/drawingml/2006/main">
-            <a:pPr>
-              <a:defRPr sz="3300" b="1">
-                <a:solidFill>
-                  <a:srgbClr val="142839"/>
-                </a:solidFill>
-                <a:latin typeface="Arial"/>
-                <a:ea typeface="Arial"/>
-                <a:cs typeface="Arial"/>
-              </a:defRPr>
-            </a:pPr>
-            <a:r>
-              <a:rPr sz="3300" b="1">
-                <a:solidFill>
-                  <a:srgbClr val="142839"/>
-                </a:solidFill>
-                <a:latin typeface="Arial"/>
-                <a:ea typeface="Arial"/>
-                <a:cs typeface="Arial"/>
-              </a:rPr>
-              <a:t>Live recommendation selection</a:t>
-            </a:r>
-          </a:p>
-        </p:txBody>
-      </p:sp>
-      <p:sp>
-        <p:nvSpPr>
-          <p:cNvPr id="2" name="">
-            <a:extLst xmlns:a="http://schemas.openxmlformats.org/drawingml/2006/main">
-              <a:ext uri="{FF2B5EF4-FFF2-40B4-BE49-F238E27FC236}">
-                <a16:creationId xmlns:a16="http://schemas.microsoft.com/office/drawing/2014/main" id="{03ABE63B-8FF2-4F4A-A4C9-1822E16066BB}"/>
-              </a:ext>
-            </a:extLst>
-          </p:cNvPr>
-          <p:cNvSpPr>
-            <a:spLocks xmlns:a="http://schemas.openxmlformats.org/drawingml/2006/main" noGrp="1"/>
-          </p:cNvSpPr>
-          <p:nvPr/>
-        </p:nvSpPr>
-        <p:spPr>
-          <a:xfrm xmlns:a="http://schemas.openxmlformats.org/drawingml/2006/main">
-            <a:off x="704850" y="1714500"/>
-            <a:ext cx="10668000" cy="714375"/>
-          </a:xfrm>
-          <a:prstGeom xmlns:a="http://schemas.openxmlformats.org/drawingml/2006/main" prst="rect">
-            <a:avLst/>
-          </a:prstGeom>
-          <a:noFill xmlns:a="http://schemas.openxmlformats.org/drawingml/2006/main"/>
-          <a:ln xmlns:a="http://schemas.openxmlformats.org/drawingml/2006/main" w="0">
-            <a:noFill/>
-          </a:ln>
-        </p:spPr>
-        <p:txBody>
-          <a:bodyPr xmlns:a="http://schemas.openxmlformats.org/drawingml/2006/main" lIns="0" tIns="0" rIns="0" bIns="0"/>
-          <a:lstStyle xmlns:a="http://schemas.openxmlformats.org/drawingml/2006/main">
-            <a:defPPr>
-              <a:defRPr sz="2250" b="0">
-                <a:solidFill>
-                  <a:srgbClr val="142839"/>
-                </a:solidFill>
-                <a:latin typeface="Arial"/>
-                <a:ea typeface="Arial"/>
-                <a:cs typeface="Arial"/>
-              </a:defRPr>
-            </a:defPPr>
-          </a:lstStyle>
-          <a:p xmlns:a="http://schemas.openxmlformats.org/drawingml/2006/main">
-            <a:pPr>
-              <a:defRPr sz="2250" b="0">
-                <a:solidFill>
-                  <a:srgbClr val="142839"/>
-                </a:solidFill>
-                <a:latin typeface="Arial"/>
-                <a:ea typeface="Arial"/>
-                <a:cs typeface="Arial"/>
-              </a:defRPr>
-            </a:pPr>
-            <a:r>
-              <a:rPr sz="2250" b="0">
-                <a:solidFill>
-                  <a:srgbClr val="142839"/>
-                </a:solidFill>
-                <a:latin typeface="Arial"/>
-                <a:ea typeface="Arial"/>
-                <a:cs typeface="Arial"/>
-              </a:rPr>
-              <a:t>1   Select the strongest eligible visitor-item cart.</a:t>
-            </a:r>
-          </a:p>
-        </p:txBody>
-      </p:sp>
-      <p:sp>
-        <p:nvSpPr>
-          <p:cNvPr id="3" name="">
-            <a:extLst xmlns:a="http://schemas.openxmlformats.org/drawingml/2006/main">
-              <a:ext uri="{FF2B5EF4-FFF2-40B4-BE49-F238E27FC236}">
-                <a16:creationId xmlns:a16="http://schemas.microsoft.com/office/drawing/2014/main" id="{C874179C-7035-4CA7-8D28-FD69AF37B121}"/>
-              </a:ext>
-            </a:extLst>
-          </p:cNvPr>
-          <p:cNvSpPr>
-            <a:spLocks xmlns:a="http://schemas.openxmlformats.org/drawingml/2006/main" noGrp="1"/>
-          </p:cNvSpPr>
-          <p:nvPr/>
-        </p:nvSpPr>
-        <p:spPr>
-          <a:xfrm xmlns:a="http://schemas.openxmlformats.org/drawingml/2006/main">
-            <a:off x="704850" y="2609850"/>
-            <a:ext cx="10668000" cy="714375"/>
-          </a:xfrm>
-          <a:prstGeom xmlns:a="http://schemas.openxmlformats.org/drawingml/2006/main" prst="rect">
-            <a:avLst/>
-          </a:prstGeom>
-          <a:noFill xmlns:a="http://schemas.openxmlformats.org/drawingml/2006/main"/>
-          <a:ln xmlns:a="http://schemas.openxmlformats.org/drawingml/2006/main" w="0">
-            <a:noFill/>
-          </a:ln>
-        </p:spPr>
-        <p:txBody>
-          <a:bodyPr xmlns:a="http://schemas.openxmlformats.org/drawingml/2006/main" lIns="0" tIns="0" rIns="0" bIns="0"/>
-          <a:lstStyle xmlns:a="http://schemas.openxmlformats.org/drawingml/2006/main">
-            <a:defPPr>
-              <a:defRPr sz="2250" b="0">
-                <a:solidFill>
-                  <a:srgbClr val="142839"/>
-                </a:solidFill>
-                <a:latin typeface="Arial"/>
-                <a:ea typeface="Arial"/>
-                <a:cs typeface="Arial"/>
-              </a:defRPr>
-            </a:defPPr>
-          </a:lstStyle>
-          <a:p xmlns:a="http://schemas.openxmlformats.org/drawingml/2006/main">
-            <a:pPr>
-              <a:defRPr sz="2250" b="0">
-                <a:solidFill>
-                  <a:srgbClr val="142839"/>
-                </a:solidFill>
-                <a:latin typeface="Arial"/>
-                <a:ea typeface="Arial"/>
-                <a:cs typeface="Arial"/>
-              </a:defRPr>
-            </a:pPr>
-            <a:r>
-              <a:rPr sz="2250" b="0">
-                <a:solidFill>
-                  <a:srgbClr val="142839"/>
-                </a:solidFill>
-                <a:latin typeface="Arial"/>
-                <a:ea typeface="Arial"/>
-                <a:cs typeface="Arial"/>
-              </a:rPr>
-              <a:t>2   Rank products using popularity in the current live window.</a:t>
-            </a:r>
-          </a:p>
-        </p:txBody>
-      </p:sp>
-      <p:sp>
-        <p:nvSpPr>
-          <p:cNvPr id="4" name="">
-            <a:extLst xmlns:a="http://schemas.openxmlformats.org/drawingml/2006/main">
-              <a:ext uri="{FF2B5EF4-FFF2-40B4-BE49-F238E27FC236}">
-                <a16:creationId xmlns:a16="http://schemas.microsoft.com/office/drawing/2014/main" id="{41C286DE-EA37-4F68-9F1E-2E00A1A9707B}"/>
-              </a:ext>
-            </a:extLst>
-          </p:cNvPr>
-          <p:cNvSpPr>
-            <a:spLocks xmlns:a="http://schemas.openxmlformats.org/drawingml/2006/main" noGrp="1"/>
-          </p:cNvSpPr>
-          <p:nvPr/>
-        </p:nvSpPr>
-        <p:spPr>
-          <a:xfrm xmlns:a="http://schemas.openxmlformats.org/drawingml/2006/main">
-            <a:off x="704850" y="3505200"/>
-            <a:ext cx="10668000" cy="714375"/>
-          </a:xfrm>
-          <a:prstGeom xmlns:a="http://schemas.openxmlformats.org/drawingml/2006/main" prst="rect">
-            <a:avLst/>
-          </a:prstGeom>
-          <a:noFill xmlns:a="http://schemas.openxmlformats.org/drawingml/2006/main"/>
-          <a:ln xmlns:a="http://schemas.openxmlformats.org/drawingml/2006/main" w="0">
-            <a:noFill/>
-          </a:ln>
-        </p:spPr>
-        <p:txBody>
-          <a:bodyPr xmlns:a="http://schemas.openxmlformats.org/drawingml/2006/main" lIns="0" tIns="0" rIns="0" bIns="0"/>
-          <a:lstStyle xmlns:a="http://schemas.openxmlformats.org/drawingml/2006/main">
-            <a:defPPr>
-              <a:defRPr sz="2250" b="0">
-                <a:solidFill>
-                  <a:srgbClr val="142839"/>
-                </a:solidFill>
-                <a:latin typeface="Arial"/>
-                <a:ea typeface="Arial"/>
-                <a:cs typeface="Arial"/>
-              </a:defRPr>
-            </a:defPPr>
-          </a:lstStyle>
-          <a:p xmlns:a="http://schemas.openxmlformats.org/drawingml/2006/main">
-            <a:pPr>
-              <a:defRPr sz="2250" b="0">
-                <a:solidFill>
-                  <a:srgbClr val="142839"/>
-                </a:solidFill>
-                <a:latin typeface="Arial"/>
-                <a:ea typeface="Arial"/>
-                <a:cs typeface="Arial"/>
-              </a:defRPr>
-            </a:pPr>
-            <a:r>
-              <a:rPr sz="2250" b="0">
-                <a:solidFill>
-                  <a:srgbClr val="142839"/>
-                </a:solidFill>
-                <a:latin typeface="Arial"/>
-                <a:ea typeface="Arial"/>
-                <a:cs typeface="Arial"/>
-              </a:rPr>
-              <a:t>3   Exclude every product the visitor has already seen in that window.</a:t>
-            </a:r>
-          </a:p>
-        </p:txBody>
-      </p:sp>
-      <p:sp>
-        <p:nvSpPr>
-          <p:cNvPr id="5" name="">
-            <a:extLst xmlns:a="http://schemas.openxmlformats.org/drawingml/2006/main">
-              <a:ext uri="{FF2B5EF4-FFF2-40B4-BE49-F238E27FC236}">
-                <a16:creationId xmlns:a16="http://schemas.microsoft.com/office/drawing/2014/main" id="{67066287-280E-4286-986F-E1C6C8BA7F35}"/>
-              </a:ext>
-            </a:extLst>
-          </p:cNvPr>
-          <p:cNvSpPr>
-            <a:spLocks xmlns:a="http://schemas.openxmlformats.org/drawingml/2006/main" noGrp="1"/>
-          </p:cNvSpPr>
-          <p:nvPr/>
-        </p:nvSpPr>
-        <p:spPr>
-          <a:xfrm xmlns:a="http://schemas.openxmlformats.org/drawingml/2006/main">
-            <a:off x="704850" y="4400550"/>
-            <a:ext cx="10668000" cy="714375"/>
-          </a:xfrm>
-          <a:prstGeom xmlns:a="http://schemas.openxmlformats.org/drawingml/2006/main" prst="rect">
-            <a:avLst/>
-          </a:prstGeom>
-          <a:noFill xmlns:a="http://schemas.openxmlformats.org/drawingml/2006/main"/>
-          <a:ln xmlns:a="http://schemas.openxmlformats.org/drawingml/2006/main" w="0">
-            <a:noFill/>
-          </a:ln>
-        </p:spPr>
-        <p:txBody>
-          <a:bodyPr xmlns:a="http://schemas.openxmlformats.org/drawingml/2006/main" lIns="0" tIns="0" rIns="0" bIns="0"/>
-          <a:lstStyle xmlns:a="http://schemas.openxmlformats.org/drawingml/2006/main">
-            <a:defPPr>
-              <a:defRPr sz="2250" b="0">
-                <a:solidFill>
-                  <a:srgbClr val="142839"/>
-                </a:solidFill>
-                <a:latin typeface="Arial"/>
-                <a:ea typeface="Arial"/>
-                <a:cs typeface="Arial"/>
-              </a:defRPr>
-            </a:defPPr>
-          </a:lstStyle>
-          <a:p xmlns:a="http://schemas.openxmlformats.org/drawingml/2006/main">
-            <a:pPr>
-              <a:defRPr sz="2250" b="0">
-                <a:solidFill>
-                  <a:srgbClr val="142839"/>
-                </a:solidFill>
-                <a:latin typeface="Arial"/>
-                <a:ea typeface="Arial"/>
-                <a:cs typeface="Arial"/>
-              </a:defRPr>
-            </a:pPr>
-            <a:r>
-              <a:rPr sz="2250" b="0">
-                <a:solidFill>
-                  <a:srgbClr val="142839"/>
-                </a:solidFill>
-                <a:latin typeface="Arial"/>
-                <a:ea typeface="Arial"/>
-                <a:cs typeface="Arial"/>
-              </a:rPr>
-              <a:t>4   Publish up to three unseen items with rank and reason.</a:t>
-            </a:r>
-          </a:p>
-        </p:txBody>
-      </p:sp>
-      <p:sp>
-        <p:nvSpPr>
-          <p:cNvPr id="6" name="">
-            <a:extLst xmlns:a="http://schemas.openxmlformats.org/drawingml/2006/main">
-              <a:ext uri="{FF2B5EF4-FFF2-40B4-BE49-F238E27FC236}">
-                <a16:creationId xmlns:a16="http://schemas.microsoft.com/office/drawing/2014/main" id="{A8D5A36B-B1B5-40C9-A2BC-104313CDF77B}"/>
-              </a:ext>
-            </a:extLst>
-          </p:cNvPr>
-          <p:cNvSpPr>
-            <a:spLocks xmlns:a="http://schemas.openxmlformats.org/drawingml/2006/main" noGrp="1"/>
-          </p:cNvSpPr>
-          <p:nvPr/>
-        </p:nvSpPr>
-        <p:spPr>
-          <a:xfrm xmlns:a="http://schemas.openxmlformats.org/drawingml/2006/main">
-            <a:off x="704850" y="5762625"/>
-            <a:ext cx="10668000" cy="428625"/>
-          </a:xfrm>
-          <a:prstGeom xmlns:a="http://schemas.openxmlformats.org/drawingml/2006/main" prst="rect">
-            <a:avLst/>
-          </a:prstGeom>
-          <a:noFill xmlns:a="http://schemas.openxmlformats.org/drawingml/2006/main"/>
-          <a:ln xmlns:a="http://schemas.openxmlformats.org/drawingml/2006/main" w="0">
-            <a:noFill/>
-          </a:ln>
-        </p:spPr>
-        <p:txBody>
-          <a:bodyPr xmlns:a="http://schemas.openxmlformats.org/drawingml/2006/main" lIns="0" tIns="0" rIns="0" bIns="0"/>
-          <a:lstStyle xmlns:a="http://schemas.openxmlformats.org/drawingml/2006/main">
-            <a:defPPr>
-              <a:defRPr sz="2100" b="1">
-                <a:solidFill>
-                  <a:srgbClr val="176C75"/>
-                </a:solidFill>
-                <a:latin typeface="Arial"/>
-                <a:ea typeface="Arial"/>
-                <a:cs typeface="Arial"/>
-              </a:defRPr>
-            </a:defPPr>
-          </a:lstStyle>
-          <a:p xmlns:a="http://schemas.openxmlformats.org/drawingml/2006/main">
-            <a:pPr>
-              <a:defRPr sz="2100" b="1">
-                <a:solidFill>
-                  <a:srgbClr val="176C75"/>
-                </a:solidFill>
-                <a:latin typeface="Arial"/>
-                <a:ea typeface="Arial"/>
-                <a:cs typeface="Arial"/>
-              </a:defRPr>
-            </a:pPr>
-            <a:r>
-              <a:rPr sz="2100" b="1">
-                <a:solidFill>
-                  <a:srgbClr val="176C75"/>
-                </a:solidFill>
-                <a:latin typeface="Arial"/>
-                <a:ea typeface="Arial"/>
-                <a:cs typeface="Arial"/>
-              </a:rPr>
-              <a:t>Sparse traffic may produce no unseen candidates.</a:t>
-            </a:r>
-          </a:p>
-        </p:txBody>
-      </p:sp>
-    </p:spTree>
-    <p:extLst>
-      <p:ext uri="{BB962C8B-B14F-4D97-AF65-F5344CB8AC3E}">
-        <p14:creationId xmlns:p14="http://schemas.microsoft.com/office/powerpoint/2010/main" val="1900692907"/>
+        <p14:creationId xmlns:p14="http://schemas.microsoft.com/office/powerpoint/2010/main" val="1901724184"/>
       </p:ext>
     </p:extLst>
   </p:cSld>
